--- a/주제탐구_포스터.pptx
+++ b/주제탐구_포스터.pptx
@@ -4872,7 +4872,7 @@
         <p:spPr>
           <a:xfrm>
             <a:off x="3566160" y="3401568"/>
-            <a:ext cx="2834640" cy="2859757"/>
+            <a:ext cx="2834640" cy="2215991"/>
           </a:xfrm>
           <a:prstGeom prst="rect">
             <a:avLst/>
@@ -4880,17 +4880,27 @@
           <a:noFill/>
         </p:spPr>
         <p:txBody>
-          <a:bodyPr wrap="square" rtlCol="0" anchor="t">
+          <a:bodyPr wrap="square" lIns="0" rIns="0" rtlCol="0" anchor="t">
             <a:spAutoFit/>
           </a:bodyPr>
           <a:lstStyle/>
           <a:p>
-            <a:pPr algn="l">
+            <a:pPr>
               <a:spcAft>
                 <a:spcPts val="300"/>
               </a:spcAft>
             </a:pPr>
             <a:r>
+              <a:rPr lang="en-US" altLang="ko-KR" sz="900" b="1" dirty="0">
+                <a:solidFill>
+                  <a:srgbClr val="1E2761"/>
+                </a:solidFill>
+                <a:latin typeface="맑은 고딕"/>
+                <a:ea typeface="맑은 고딕"/>
+              </a:rPr>
+              <a:t>④</a:t>
+            </a:r>
+            <a:r>
               <a:rPr sz="900" b="1" dirty="0">
                 <a:solidFill>
                   <a:srgbClr val="1E2761"/>
@@ -4898,7 +4908,7 @@
                 <a:latin typeface="맑은 고딕"/>
                 <a:ea typeface="맑은 고딕"/>
               </a:rPr>
-              <a:t>③ </a:t>
+              <a:t> </a:t>
             </a:r>
             <a:r>
               <a:rPr lang="ko-KR" altLang="en-US" sz="900" b="1" dirty="0">
@@ -5005,11 +5015,11 @@
               </a:spcAft>
             </a:pPr>
             <a:r>
-              <a:rPr lang="ko-KR" altLang="en-US" sz="900" dirty="0"/>
+              <a:rPr lang="ko-KR" altLang="en-US" sz="800" dirty="0"/>
               <a:t>정렬 기준은 서로 독립적인 두 축을 설정한다</a:t>
             </a:r>
             <a:r>
-              <a:rPr lang="en-US" altLang="ko-KR" sz="900" dirty="0"/>
+              <a:rPr lang="en-US" altLang="ko-KR" sz="800" dirty="0"/>
               <a:t>.</a:t>
             </a:r>
           </a:p>
@@ -5020,84 +5030,84 @@
               </a:spcAft>
             </a:pPr>
             <a:r>
-              <a:rPr lang="ko-KR" altLang="en-US" sz="900" b="1" dirty="0">
+              <a:rPr lang="ko-KR" altLang="en-US" sz="800" b="1" dirty="0">
                 <a:latin typeface="맑은 고딕"/>
                 <a:ea typeface="맑은 고딕"/>
               </a:rPr>
               <a:t>정렬 키 축</a:t>
             </a:r>
             <a:r>
-              <a:rPr lang="ko-KR" altLang="en-US" sz="900" dirty="0">
+              <a:rPr lang="ko-KR" altLang="en-US" sz="800" dirty="0">
                 <a:latin typeface="맑은 고딕"/>
                 <a:ea typeface="맑은 고딕"/>
               </a:rPr>
               <a:t> </a:t>
             </a:r>
             <a:r>
-              <a:rPr lang="en-US" altLang="ko-KR" sz="900" dirty="0">
+              <a:rPr lang="en-US" altLang="ko-KR" sz="800" dirty="0">
                 <a:latin typeface="맑은 고딕"/>
                 <a:ea typeface="맑은 고딕"/>
               </a:rPr>
               <a:t>-</a:t>
             </a:r>
             <a:r>
-              <a:rPr lang="ko-KR" altLang="en-US" sz="900" dirty="0">
+              <a:rPr lang="ko-KR" altLang="en-US" sz="800" dirty="0">
                 <a:latin typeface="맑은 고딕"/>
                 <a:ea typeface="맑은 고딕"/>
               </a:rPr>
               <a:t> </a:t>
             </a:r>
             <a:r>
-              <a:rPr lang="ko-KR" altLang="en-US" sz="900" dirty="0" err="1">
+              <a:rPr lang="ko-KR" altLang="en-US" sz="800" dirty="0" err="1">
                 <a:latin typeface="맑은 고딕"/>
                 <a:ea typeface="맑은 고딕"/>
               </a:rPr>
               <a:t>항등</a:t>
             </a:r>
             <a:r>
-              <a:rPr lang="en-US" altLang="ko-KR" sz="900" dirty="0">
+              <a:rPr lang="en-US" altLang="ko-KR" sz="800" dirty="0">
                 <a:latin typeface="맑은 고딕"/>
                 <a:ea typeface="맑은 고딕"/>
               </a:rPr>
               <a:t>(</a:t>
             </a:r>
             <a:r>
-              <a:rPr lang="ko-KR" altLang="en-US" sz="900" dirty="0">
+              <a:rPr lang="ko-KR" altLang="en-US" sz="800" dirty="0">
                 <a:latin typeface="맑은 고딕"/>
                 <a:ea typeface="맑은 고딕"/>
               </a:rPr>
               <a:t>오름차순</a:t>
             </a:r>
             <a:r>
-              <a:rPr lang="en-US" altLang="ko-KR" sz="900" dirty="0">
+              <a:rPr lang="en-US" altLang="ko-KR" sz="800" dirty="0">
                 <a:latin typeface="맑은 고딕"/>
                 <a:ea typeface="맑은 고딕"/>
               </a:rPr>
               <a:t>) /</a:t>
             </a:r>
             <a:r>
-              <a:rPr lang="ko-KR" altLang="en-US" sz="900" dirty="0">
+              <a:rPr lang="ko-KR" altLang="en-US" sz="800" dirty="0">
                 <a:latin typeface="맑은 고딕"/>
                 <a:ea typeface="맑은 고딕"/>
               </a:rPr>
               <a:t> 주기</a:t>
             </a:r>
             <a:r>
-              <a:rPr lang="en-US" altLang="ko-KR" sz="900" dirty="0">
+              <a:rPr lang="en-US" altLang="ko-KR" sz="800" dirty="0">
                 <a:latin typeface="맑은 고딕"/>
                 <a:ea typeface="맑은 고딕"/>
               </a:rPr>
               <a:t>(mod</a:t>
             </a:r>
             <a:r>
-              <a:rPr lang="ko-KR" altLang="en-US" sz="900" dirty="0">
+              <a:rPr lang="ko-KR" altLang="en-US" sz="800" dirty="0">
                 <a:latin typeface="맑은 고딕"/>
                 <a:ea typeface="맑은 고딕"/>
               </a:rPr>
               <a:t> 기반</a:t>
             </a:r>
             <a:r>
-              <a:rPr lang="en-US" altLang="ko-KR" sz="900" dirty="0">
+              <a:rPr lang="en-US" altLang="ko-KR" sz="800" dirty="0">
                 <a:latin typeface="맑은 고딕"/>
                 <a:ea typeface="맑은 고딕"/>
               </a:rPr>
@@ -5111,91 +5121,91 @@
               </a:spcAft>
             </a:pPr>
             <a:r>
-              <a:rPr lang="ko-KR" altLang="en-US" sz="900" b="1" dirty="0">
+              <a:rPr lang="ko-KR" altLang="en-US" sz="800" b="1" dirty="0">
                 <a:latin typeface="맑은 고딕"/>
                 <a:ea typeface="맑은 고딕"/>
               </a:rPr>
               <a:t>매핑 축     </a:t>
             </a:r>
             <a:r>
-              <a:rPr lang="en-US" altLang="ko-KR" sz="900" dirty="0">
+              <a:rPr lang="en-US" altLang="ko-KR" sz="800" dirty="0">
                 <a:latin typeface="맑은 고딕"/>
                 <a:ea typeface="맑은 고딕"/>
               </a:rPr>
               <a:t>-</a:t>
             </a:r>
             <a:r>
-              <a:rPr lang="ko-KR" altLang="en-US" sz="900" dirty="0">
+              <a:rPr lang="ko-KR" altLang="en-US" sz="800" dirty="0">
                 <a:latin typeface="맑은 고딕"/>
                 <a:ea typeface="맑은 고딕"/>
               </a:rPr>
               <a:t> 단조</a:t>
             </a:r>
             <a:r>
-              <a:rPr lang="en-US" altLang="ko-KR" sz="900" dirty="0">
+              <a:rPr lang="en-US" altLang="ko-KR" sz="800" dirty="0">
                 <a:latin typeface="맑은 고딕"/>
                 <a:ea typeface="맑은 고딕"/>
               </a:rPr>
               <a:t>(</a:t>
             </a:r>
             <a:r>
-              <a:rPr lang="ko-KR" altLang="en-US" sz="900" dirty="0">
+              <a:rPr lang="ko-KR" altLang="en-US" sz="800" dirty="0">
                 <a:latin typeface="맑은 고딕"/>
                 <a:ea typeface="맑은 고딕"/>
               </a:rPr>
               <a:t>순서대로</a:t>
             </a:r>
             <a:r>
-              <a:rPr lang="en-US" altLang="ko-KR" sz="900" dirty="0">
+              <a:rPr lang="en-US" altLang="ko-KR" sz="800" dirty="0">
                 <a:latin typeface="맑은 고딕"/>
                 <a:ea typeface="맑은 고딕"/>
               </a:rPr>
               <a:t>)</a:t>
             </a:r>
             <a:r>
-              <a:rPr lang="ko-KR" altLang="en-US" sz="900" dirty="0">
+              <a:rPr lang="ko-KR" altLang="en-US" sz="800" dirty="0">
                 <a:latin typeface="맑은 고딕"/>
                 <a:ea typeface="맑은 고딕"/>
               </a:rPr>
               <a:t> </a:t>
             </a:r>
             <a:r>
-              <a:rPr lang="en-US" altLang="ko-KR" sz="900" dirty="0">
+              <a:rPr lang="en-US" altLang="ko-KR" sz="800" dirty="0">
                 <a:latin typeface="맑은 고딕"/>
                 <a:ea typeface="맑은 고딕"/>
               </a:rPr>
               <a:t>/</a:t>
             </a:r>
             <a:r>
-              <a:rPr lang="ko-KR" altLang="en-US" sz="900" dirty="0">
+              <a:rPr lang="ko-KR" altLang="en-US" sz="800" dirty="0">
                 <a:latin typeface="맑은 고딕"/>
                 <a:ea typeface="맑은 고딕"/>
               </a:rPr>
               <a:t> </a:t>
             </a:r>
             <a:r>
-              <a:rPr lang="ko-KR" altLang="en-US" sz="900" dirty="0" err="1">
+              <a:rPr lang="ko-KR" altLang="en-US" sz="800" dirty="0" err="1">
                 <a:latin typeface="맑은 고딕"/>
                 <a:ea typeface="맑은 고딕"/>
               </a:rPr>
               <a:t>비단조</a:t>
             </a:r>
             <a:r>
-              <a:rPr lang="en-US" altLang="ko-KR" sz="900" dirty="0">
+              <a:rPr lang="en-US" altLang="ko-KR" sz="800" dirty="0">
                 <a:latin typeface="맑은 고딕"/>
                 <a:ea typeface="맑은 고딕"/>
               </a:rPr>
               <a:t>(</a:t>
             </a:r>
             <a:r>
-              <a:rPr lang="ko-KR" altLang="en-US" sz="900" dirty="0">
+              <a:rPr lang="ko-KR" altLang="en-US" sz="800" dirty="0">
                 <a:latin typeface="맑은 고딕"/>
                 <a:ea typeface="맑은 고딕"/>
               </a:rPr>
               <a:t>교번</a:t>
             </a:r>
             <a:r>
-              <a:rPr lang="en-US" altLang="ko-KR" sz="900" dirty="0">
+              <a:rPr lang="en-US" altLang="ko-KR" sz="800" dirty="0">
                 <a:latin typeface="맑은 고딕"/>
                 <a:ea typeface="맑은 고딕"/>
               </a:rPr>
@@ -5249,630 +5259,101 @@
                 <a:spcPts val="300"/>
               </a:spcAft>
             </a:pPr>
-            <a:r>
-              <a:rPr lang="ko-KR" altLang="en-US" sz="800" dirty="0">
-                <a:latin typeface="맑은 고딕"/>
-                <a:ea typeface="맑은 고딕"/>
-              </a:rPr>
-              <a:t>이 두 축을 기반으로 다음 </a:t>
-            </a:r>
-            <a:r>
-              <a:rPr lang="en-US" altLang="ko-KR" sz="800" dirty="0">
-                <a:latin typeface="맑은 고딕"/>
-                <a:ea typeface="맑은 고딕"/>
-              </a:rPr>
-              <a:t>3</a:t>
-            </a:r>
-            <a:r>
-              <a:rPr lang="ko-KR" altLang="en-US" sz="800" dirty="0">
-                <a:latin typeface="맑은 고딕"/>
-                <a:ea typeface="맑은 고딕"/>
-              </a:rPr>
-              <a:t>가지 정렬 기준을 설정한다</a:t>
-            </a:r>
-            <a:r>
-              <a:rPr lang="en-US" altLang="ko-KR" sz="800">
-                <a:latin typeface="맑은 고딕"/>
-                <a:ea typeface="맑은 고딕"/>
-              </a:rPr>
-              <a:t>.</a:t>
-            </a:r>
-            <a:r>
-              <a:rPr sz="650" b="0">
-                <a:solidFill>
-                  <a:srgbClr val="555F6E"/>
+            <a:endParaRPr lang="en-US" sz="900" b="1" dirty="0">
+              <a:solidFill>
+                <a:srgbClr val="1E2761"/>
+              </a:solidFill>
+              <a:latin typeface="맑은 고딕"/>
+              <a:ea typeface="맑은 고딕"/>
+            </a:endParaRPr>
+          </a:p>
+          <a:p>
+            <a:pPr>
+              <a:spcAft>
+                <a:spcPts val="300"/>
+              </a:spcAft>
+            </a:pPr>
+            <a:endParaRPr lang="en-US" sz="900" b="1">
+              <a:solidFill>
+                <a:srgbClr val="1E2761"/>
+              </a:solidFill>
+              <a:latin typeface="맑은 고딕"/>
+              <a:ea typeface="맑은 고딕"/>
+            </a:endParaRPr>
+          </a:p>
+          <a:p>
+            <a:pPr>
+              <a:spcAft>
+                <a:spcPts val="300"/>
+              </a:spcAft>
+            </a:pPr>
+            <a:r>
+              <a:rPr sz="900" b="1">
+                <a:solidFill>
+                  <a:srgbClr val="1E2761"/>
+                </a:solidFill>
+                <a:latin typeface="맑은 고딕"/>
+                <a:ea typeface="맑은 고딕"/>
+              </a:rPr>
+              <a:t>④ </a:t>
+            </a:r>
+            <a:r>
+              <a:rPr sz="900" b="1" dirty="0" err="1">
+                <a:solidFill>
+                  <a:srgbClr val="1E2761"/>
+                </a:solidFill>
+                <a:latin typeface="맑은 고딕"/>
+                <a:ea typeface="맑은 고딕"/>
+              </a:rPr>
+              <a:t>기대효과</a:t>
+            </a:r>
+            <a:r>
+              <a:rPr sz="900" b="1" dirty="0">
+                <a:solidFill>
+                  <a:srgbClr val="1E2761"/>
+                </a:solidFill>
+                <a:latin typeface="맑은 고딕"/>
+                <a:ea typeface="맑은 고딕"/>
+              </a:rPr>
+              <a:t> · </a:t>
+            </a:r>
+            <a:r>
+              <a:rPr sz="900" b="1" dirty="0" err="1">
+                <a:solidFill>
+                  <a:srgbClr val="1E2761"/>
+                </a:solidFill>
+                <a:latin typeface="맑은 고딕"/>
+                <a:ea typeface="맑은 고딕"/>
+              </a:rPr>
+              <a:t>예상</a:t>
+            </a:r>
+            <a:r>
+              <a:rPr sz="900" b="1" dirty="0">
+                <a:solidFill>
+                  <a:srgbClr val="1E2761"/>
                 </a:solidFill>
                 <a:latin typeface="맑은 고딕"/>
                 <a:ea typeface="맑은 고딕"/>
               </a:rPr>
               <a:t> </a:t>
             </a:r>
-            <a:endParaRPr lang="en-US" sz="650" b="0">
+            <a:r>
+              <a:rPr sz="900" b="1" dirty="0" err="1">
+                <a:solidFill>
+                  <a:srgbClr val="1E2761"/>
+                </a:solidFill>
+                <a:latin typeface="맑은 고딕"/>
+                <a:ea typeface="맑은 고딕"/>
+              </a:rPr>
+              <a:t>결과</a:t>
+            </a:r>
+            <a:endParaRPr sz="600" b="0" dirty="0">
               <a:solidFill>
                 <a:srgbClr val="555F6E"/>
               </a:solidFill>
               <a:latin typeface="맑은 고딕"/>
               <a:ea typeface="맑은 고딕"/>
             </a:endParaRPr>
-          </a:p>
-          <a:p>
-            <a:pPr>
-              <a:spcAft>
-                <a:spcPts val="300"/>
-              </a:spcAft>
-            </a:pPr>
-            <a:r>
-              <a:rPr sz="900" b="1">
-                <a:solidFill>
-                  <a:srgbClr val="1E2761"/>
-                </a:solidFill>
-                <a:latin typeface="맑은 고딕"/>
-                <a:ea typeface="맑은 고딕"/>
-              </a:rPr>
-              <a:t>④ </a:t>
-            </a:r>
-            <a:r>
-              <a:rPr sz="900" b="1" dirty="0" err="1">
-                <a:solidFill>
-                  <a:srgbClr val="1E2761"/>
-                </a:solidFill>
-                <a:latin typeface="맑은 고딕"/>
-                <a:ea typeface="맑은 고딕"/>
-              </a:rPr>
-              <a:t>기대효과</a:t>
-            </a:r>
-            <a:r>
-              <a:rPr sz="900" b="1" dirty="0">
-                <a:solidFill>
-                  <a:srgbClr val="1E2761"/>
-                </a:solidFill>
-                <a:latin typeface="맑은 고딕"/>
-                <a:ea typeface="맑은 고딕"/>
-              </a:rPr>
-              <a:t> · </a:t>
-            </a:r>
-            <a:r>
-              <a:rPr sz="900" b="1" dirty="0" err="1">
-                <a:solidFill>
-                  <a:srgbClr val="1E2761"/>
-                </a:solidFill>
-                <a:latin typeface="맑은 고딕"/>
-                <a:ea typeface="맑은 고딕"/>
-              </a:rPr>
-              <a:t>예상</a:t>
-            </a:r>
-            <a:r>
-              <a:rPr sz="900" b="1" dirty="0">
-                <a:solidFill>
-                  <a:srgbClr val="1E2761"/>
-                </a:solidFill>
-                <a:latin typeface="맑은 고딕"/>
-                <a:ea typeface="맑은 고딕"/>
-              </a:rPr>
-              <a:t> </a:t>
-            </a:r>
-            <a:r>
-              <a:rPr sz="900" b="1" dirty="0" err="1">
-                <a:solidFill>
-                  <a:srgbClr val="1E2761"/>
-                </a:solidFill>
-                <a:latin typeface="맑은 고딕"/>
-                <a:ea typeface="맑은 고딕"/>
-              </a:rPr>
-              <a:t>결과</a:t>
-            </a:r>
-            <a:endParaRPr sz="900" b="1" dirty="0">
-              <a:solidFill>
-                <a:srgbClr val="1E2761"/>
-              </a:solidFill>
-              <a:latin typeface="맑은 고딕"/>
-              <a:ea typeface="맑은 고딕"/>
-            </a:endParaRPr>
-          </a:p>
-          <a:p>
-            <a:pPr algn="l">
-              <a:spcAft>
-                <a:spcPts val="800"/>
-              </a:spcAft>
-            </a:pPr>
-            <a:r>
-              <a:rPr sz="650" b="0" dirty="0" err="1">
-                <a:solidFill>
-                  <a:srgbClr val="555F6E"/>
-                </a:solidFill>
-                <a:latin typeface="맑은 고딕"/>
-                <a:ea typeface="맑은 고딕"/>
-              </a:rPr>
-              <a:t>비전공자</a:t>
-            </a:r>
-            <a:r>
-              <a:rPr sz="650" b="0" dirty="0">
-                <a:solidFill>
-                  <a:srgbClr val="555F6E"/>
-                </a:solidFill>
-                <a:latin typeface="맑은 고딕"/>
-                <a:ea typeface="맑은 고딕"/>
-              </a:rPr>
-              <a:t> </a:t>
-            </a:r>
-            <a:r>
-              <a:rPr sz="650" b="0" dirty="0" err="1">
-                <a:solidFill>
-                  <a:srgbClr val="555F6E"/>
-                </a:solidFill>
-                <a:latin typeface="맑은 고딕"/>
-                <a:ea typeface="맑은 고딕"/>
-              </a:rPr>
-              <a:t>눈높이</a:t>
-            </a:r>
-            <a:r>
-              <a:rPr sz="650" b="0" dirty="0">
-                <a:solidFill>
-                  <a:srgbClr val="555F6E"/>
-                </a:solidFill>
-                <a:latin typeface="맑은 고딕"/>
-                <a:ea typeface="맑은 고딕"/>
-              </a:rPr>
-              <a:t> </a:t>
-            </a:r>
-            <a:r>
-              <a:rPr sz="650" b="0" dirty="0" err="1">
-                <a:solidFill>
-                  <a:srgbClr val="555F6E"/>
-                </a:solidFill>
-                <a:latin typeface="맑은 고딕"/>
-                <a:ea typeface="맑은 고딕"/>
-              </a:rPr>
-              <a:t>기대효과</a:t>
-            </a:r>
-            <a:r>
-              <a:rPr sz="650" b="0" dirty="0">
-                <a:solidFill>
-                  <a:srgbClr val="555F6E"/>
-                </a:solidFill>
-                <a:latin typeface="맑은 고딕"/>
-                <a:ea typeface="맑은 고딕"/>
-              </a:rPr>
-              <a:t> 2~3개 </a:t>
-            </a:r>
-            <a:r>
-              <a:rPr sz="650" b="0" dirty="0" err="1">
-                <a:solidFill>
-                  <a:srgbClr val="555F6E"/>
-                </a:solidFill>
-                <a:latin typeface="맑은 고딕"/>
-                <a:ea typeface="맑은 고딕"/>
-              </a:rPr>
-              <a:t>입력</a:t>
-            </a:r>
-            <a:r>
-              <a:rPr sz="650" b="0" dirty="0">
-                <a:solidFill>
-                  <a:srgbClr val="555F6E"/>
-                </a:solidFill>
-                <a:latin typeface="맑은 고딕"/>
-                <a:ea typeface="맑은 고딕"/>
-              </a:rPr>
-              <a:t> (</a:t>
-            </a:r>
-            <a:r>
-              <a:rPr sz="650" b="0" dirty="0" err="1">
-                <a:solidFill>
-                  <a:srgbClr val="555F6E"/>
-                </a:solidFill>
-                <a:latin typeface="맑은 고딕"/>
-                <a:ea typeface="맑은 고딕"/>
-              </a:rPr>
-              <a:t>전문적</a:t>
-            </a:r>
-            <a:r>
-              <a:rPr sz="650" b="0" dirty="0">
-                <a:solidFill>
-                  <a:srgbClr val="555F6E"/>
-                </a:solidFill>
-                <a:latin typeface="맑은 고딕"/>
-                <a:ea typeface="맑은 고딕"/>
-              </a:rPr>
-              <a:t> </a:t>
-            </a:r>
-            <a:r>
-              <a:rPr sz="650" b="0" dirty="0" err="1">
-                <a:solidFill>
-                  <a:srgbClr val="555F6E"/>
-                </a:solidFill>
-                <a:latin typeface="맑은 고딕"/>
-                <a:ea typeface="맑은 고딕"/>
-              </a:rPr>
-              <a:t>예상</a:t>
-            </a:r>
-            <a:r>
-              <a:rPr sz="650" b="0" dirty="0">
-                <a:solidFill>
-                  <a:srgbClr val="555F6E"/>
-                </a:solidFill>
-                <a:latin typeface="맑은 고딕"/>
-                <a:ea typeface="맑은 고딕"/>
-              </a:rPr>
-              <a:t> </a:t>
-            </a:r>
-            <a:r>
-              <a:rPr sz="650" b="0" dirty="0" err="1">
-                <a:solidFill>
-                  <a:srgbClr val="555F6E"/>
-                </a:solidFill>
-                <a:latin typeface="맑은 고딕"/>
-                <a:ea typeface="맑은 고딕"/>
-              </a:rPr>
-              <a:t>결과는</a:t>
-            </a:r>
-            <a:r>
-              <a:rPr sz="650" b="0" dirty="0">
-                <a:solidFill>
-                  <a:srgbClr val="555F6E"/>
-                </a:solidFill>
-                <a:latin typeface="맑은 고딕"/>
-                <a:ea typeface="맑은 고딕"/>
-              </a:rPr>
-              <a:t> 1개 </a:t>
-            </a:r>
-            <a:r>
-              <a:rPr sz="650" b="0" dirty="0" err="1">
-                <a:solidFill>
-                  <a:srgbClr val="555F6E"/>
-                </a:solidFill>
-                <a:latin typeface="맑은 고딕"/>
-                <a:ea typeface="맑은 고딕"/>
-              </a:rPr>
-              <a:t>이내</a:t>
-            </a:r>
-            <a:r>
-              <a:rPr sz="650" b="0" dirty="0">
-                <a:solidFill>
-                  <a:srgbClr val="555F6E"/>
-                </a:solidFill>
-                <a:latin typeface="맑은 고딕"/>
-                <a:ea typeface="맑은 고딕"/>
-              </a:rPr>
-              <a:t>)</a:t>
-            </a:r>
-          </a:p>
-          <a:p>
-            <a:pPr algn="l">
-              <a:spcAft>
-                <a:spcPts val="300"/>
-              </a:spcAft>
-            </a:pPr>
-            <a:r>
-              <a:rPr sz="800" b="1" dirty="0" err="1">
-                <a:solidFill>
-                  <a:srgbClr val="1E2761"/>
-                </a:solidFill>
-                <a:latin typeface="맑은 고딕"/>
-                <a:ea typeface="맑은 고딕"/>
-              </a:rPr>
-              <a:t>연구</a:t>
-            </a:r>
-            <a:r>
-              <a:rPr sz="800" b="1" dirty="0">
-                <a:solidFill>
-                  <a:srgbClr val="1E2761"/>
-                </a:solidFill>
-                <a:latin typeface="맑은 고딕"/>
-                <a:ea typeface="맑은 고딕"/>
-              </a:rPr>
-              <a:t> </a:t>
-            </a:r>
-            <a:r>
-              <a:rPr sz="800" b="1" dirty="0" err="1">
-                <a:solidFill>
-                  <a:srgbClr val="1E2761"/>
-                </a:solidFill>
-                <a:latin typeface="맑은 고딕"/>
-                <a:ea typeface="맑은 고딕"/>
-              </a:rPr>
-              <a:t>일정</a:t>
-            </a:r>
-            <a:endParaRPr sz="800" b="1" dirty="0">
-              <a:solidFill>
-                <a:srgbClr val="1E2761"/>
-              </a:solidFill>
-              <a:latin typeface="맑은 고딕"/>
-              <a:ea typeface="맑은 고딕"/>
-            </a:endParaRPr>
-          </a:p>
-          <a:p>
-            <a:pPr algn="l">
-              <a:spcAft>
-                <a:spcPts val="800"/>
-              </a:spcAft>
-            </a:pPr>
-            <a:r>
-              <a:rPr sz="650" b="0" dirty="0" err="1">
-                <a:solidFill>
-                  <a:srgbClr val="555F6E"/>
-                </a:solidFill>
-                <a:latin typeface="맑은 고딕"/>
-                <a:ea typeface="맑은 고딕"/>
-              </a:rPr>
-              <a:t>월별</a:t>
-            </a:r>
-            <a:r>
-              <a:rPr sz="650" b="0" dirty="0">
-                <a:solidFill>
-                  <a:srgbClr val="555F6E"/>
-                </a:solidFill>
-                <a:latin typeface="맑은 고딕"/>
-                <a:ea typeface="맑은 고딕"/>
-              </a:rPr>
-              <a:t> </a:t>
-            </a:r>
-            <a:r>
-              <a:rPr sz="650" b="0" dirty="0" err="1">
-                <a:solidFill>
-                  <a:srgbClr val="555F6E"/>
-                </a:solidFill>
-                <a:latin typeface="맑은 고딕"/>
-                <a:ea typeface="맑은 고딕"/>
-              </a:rPr>
-              <a:t>핵심</a:t>
-            </a:r>
-            <a:r>
-              <a:rPr sz="650" b="0" dirty="0">
-                <a:solidFill>
-                  <a:srgbClr val="555F6E"/>
-                </a:solidFill>
-                <a:latin typeface="맑은 고딕"/>
-                <a:ea typeface="맑은 고딕"/>
-              </a:rPr>
-              <a:t> </a:t>
-            </a:r>
-            <a:r>
-              <a:rPr sz="650" b="0" dirty="0" err="1">
-                <a:solidFill>
-                  <a:srgbClr val="555F6E"/>
-                </a:solidFill>
-                <a:latin typeface="맑은 고딕"/>
-                <a:ea typeface="맑은 고딕"/>
-              </a:rPr>
-              <a:t>단계만</a:t>
-            </a:r>
-            <a:r>
-              <a:rPr sz="650" b="0" dirty="0">
-                <a:solidFill>
-                  <a:srgbClr val="555F6E"/>
-                </a:solidFill>
-                <a:latin typeface="맑은 고딕"/>
-                <a:ea typeface="맑은 고딕"/>
-              </a:rPr>
-              <a:t> 3~4줄 </a:t>
-            </a:r>
-            <a:r>
-              <a:rPr sz="650" b="0" dirty="0" err="1">
-                <a:solidFill>
-                  <a:srgbClr val="555F6E"/>
-                </a:solidFill>
-                <a:latin typeface="맑은 고딕"/>
-                <a:ea typeface="맑은 고딕"/>
-              </a:rPr>
-              <a:t>입력</a:t>
-            </a:r>
-            <a:r>
-              <a:rPr sz="650" b="0" dirty="0">
-                <a:solidFill>
-                  <a:srgbClr val="555F6E"/>
-                </a:solidFill>
-                <a:latin typeface="맑은 고딕"/>
-                <a:ea typeface="맑은 고딕"/>
-              </a:rPr>
-              <a:t> (</a:t>
-            </a:r>
-            <a:r>
-              <a:rPr sz="650" b="0" dirty="0" err="1">
-                <a:solidFill>
-                  <a:srgbClr val="555F6E"/>
-                </a:solidFill>
-                <a:latin typeface="맑은 고딕"/>
-                <a:ea typeface="맑은 고딕"/>
-              </a:rPr>
-              <a:t>예</a:t>
-            </a:r>
-            <a:r>
-              <a:rPr sz="650" b="0" dirty="0">
-                <a:solidFill>
-                  <a:srgbClr val="555F6E"/>
-                </a:solidFill>
-                <a:latin typeface="맑은 고딕"/>
-                <a:ea typeface="맑은 고딕"/>
-              </a:rPr>
-              <a:t>: 9월 </a:t>
-            </a:r>
-            <a:r>
-              <a:rPr sz="650" b="0" dirty="0" err="1">
-                <a:solidFill>
-                  <a:srgbClr val="555F6E"/>
-                </a:solidFill>
-                <a:latin typeface="맑은 고딕"/>
-                <a:ea typeface="맑은 고딕"/>
-              </a:rPr>
-              <a:t>모델</a:t>
-            </a:r>
-            <a:r>
-              <a:rPr sz="650" b="0" dirty="0">
-                <a:solidFill>
-                  <a:srgbClr val="555F6E"/>
-                </a:solidFill>
-                <a:latin typeface="맑은 고딕"/>
-                <a:ea typeface="맑은 고딕"/>
-              </a:rPr>
-              <a:t> </a:t>
-            </a:r>
-            <a:r>
-              <a:rPr sz="650" b="0" dirty="0" err="1">
-                <a:solidFill>
-                  <a:srgbClr val="555F6E"/>
-                </a:solidFill>
-                <a:latin typeface="맑은 고딕"/>
-                <a:ea typeface="맑은 고딕"/>
-              </a:rPr>
-              <a:t>제작</a:t>
-            </a:r>
-            <a:r>
-              <a:rPr sz="650" b="0" dirty="0">
-                <a:solidFill>
-                  <a:srgbClr val="555F6E"/>
-                </a:solidFill>
-                <a:latin typeface="맑은 고딕"/>
-                <a:ea typeface="맑은 고딕"/>
-              </a:rPr>
-              <a:t> → 10월 </a:t>
-            </a:r>
-            <a:r>
-              <a:rPr sz="650" b="0" dirty="0" err="1">
-                <a:solidFill>
-                  <a:srgbClr val="555F6E"/>
-                </a:solidFill>
-                <a:latin typeface="맑은 고딕"/>
-                <a:ea typeface="맑은 고딕"/>
-              </a:rPr>
-              <a:t>실험</a:t>
-            </a:r>
-            <a:r>
-              <a:rPr sz="650" b="0" dirty="0">
-                <a:solidFill>
-                  <a:srgbClr val="555F6E"/>
-                </a:solidFill>
-                <a:latin typeface="맑은 고딕"/>
-                <a:ea typeface="맑은 고딕"/>
-              </a:rPr>
-              <a:t> → 11월 </a:t>
-            </a:r>
-            <a:r>
-              <a:rPr sz="650" b="0" dirty="0" err="1">
-                <a:solidFill>
-                  <a:srgbClr val="555F6E"/>
-                </a:solidFill>
-                <a:latin typeface="맑은 고딕"/>
-                <a:ea typeface="맑은 고딕"/>
-              </a:rPr>
-              <a:t>정리</a:t>
-            </a:r>
-            <a:r>
-              <a:rPr sz="650" b="0" dirty="0">
-                <a:solidFill>
-                  <a:srgbClr val="555F6E"/>
-                </a:solidFill>
-                <a:latin typeface="맑은 고딕"/>
-                <a:ea typeface="맑은 고딕"/>
-              </a:rPr>
-              <a:t>)</a:t>
-            </a:r>
-          </a:p>
-          <a:p>
-            <a:pPr algn="l">
-              <a:spcAft>
-                <a:spcPts val="0"/>
-              </a:spcAft>
-            </a:pPr>
-            <a:r>
-              <a:rPr sz="700" b="1" dirty="0" err="1">
-                <a:solidFill>
-                  <a:srgbClr val="1E2761"/>
-                </a:solidFill>
-                <a:latin typeface="맑은 고딕"/>
-                <a:ea typeface="맑은 고딕"/>
-              </a:rPr>
-              <a:t>참고문헌</a:t>
-            </a:r>
-            <a:r>
-              <a:rPr sz="700" b="1" dirty="0">
-                <a:solidFill>
-                  <a:srgbClr val="1E2761"/>
-                </a:solidFill>
-                <a:latin typeface="맑은 고딕"/>
-                <a:ea typeface="맑은 고딕"/>
-              </a:rPr>
-              <a:t>  </a:t>
-            </a:r>
-            <a:r>
-              <a:rPr sz="600" b="0" dirty="0" err="1">
-                <a:solidFill>
-                  <a:srgbClr val="555F6E"/>
-                </a:solidFill>
-                <a:latin typeface="맑은 고딕"/>
-                <a:ea typeface="맑은 고딕"/>
-              </a:rPr>
-              <a:t>핵심</a:t>
-            </a:r>
-            <a:r>
-              <a:rPr sz="600" b="0" dirty="0">
-                <a:solidFill>
-                  <a:srgbClr val="555F6E"/>
-                </a:solidFill>
-                <a:latin typeface="맑은 고딕"/>
-                <a:ea typeface="맑은 고딕"/>
-              </a:rPr>
-              <a:t> 2~3편 </a:t>
-            </a:r>
-            <a:r>
-              <a:rPr sz="600" b="0" dirty="0" err="1">
-                <a:solidFill>
-                  <a:srgbClr val="555F6E"/>
-                </a:solidFill>
-                <a:latin typeface="맑은 고딕"/>
-                <a:ea typeface="맑은 고딕"/>
-              </a:rPr>
-              <a:t>축약</a:t>
-            </a:r>
-            <a:r>
-              <a:rPr sz="600" b="0" dirty="0">
-                <a:solidFill>
-                  <a:srgbClr val="555F6E"/>
-                </a:solidFill>
-                <a:latin typeface="맑은 고딕"/>
-                <a:ea typeface="맑은 고딕"/>
-              </a:rPr>
-              <a:t> </a:t>
-            </a:r>
-            <a:r>
-              <a:rPr sz="600" b="0" dirty="0" err="1">
-                <a:solidFill>
-                  <a:srgbClr val="555F6E"/>
-                </a:solidFill>
-                <a:latin typeface="맑은 고딕"/>
-                <a:ea typeface="맑은 고딕"/>
-              </a:rPr>
-              <a:t>입력</a:t>
-            </a:r>
-            <a:r>
-              <a:rPr sz="600" b="0" dirty="0">
-                <a:solidFill>
-                  <a:srgbClr val="555F6E"/>
-                </a:solidFill>
-                <a:latin typeface="맑은 고딕"/>
-                <a:ea typeface="맑은 고딕"/>
-              </a:rPr>
-              <a:t> (</a:t>
-            </a:r>
-            <a:r>
-              <a:rPr sz="600" b="0" dirty="0" err="1">
-                <a:solidFill>
-                  <a:srgbClr val="555F6E"/>
-                </a:solidFill>
-                <a:latin typeface="맑은 고딕"/>
-                <a:ea typeface="맑은 고딕"/>
-              </a:rPr>
-              <a:t>예</a:t>
-            </a:r>
-            <a:r>
-              <a:rPr sz="600" b="0" dirty="0">
-                <a:solidFill>
-                  <a:srgbClr val="555F6E"/>
-                </a:solidFill>
-                <a:latin typeface="맑은 고딕"/>
-                <a:ea typeface="맑은 고딕"/>
-              </a:rPr>
-              <a:t>: Power et al. 2022; Nanda et al. 2023)</a:t>
-            </a:r>
           </a:p>
         </p:txBody>
       </p:sp>

--- a/주제탐구_포스터.pptx
+++ b/주제탐구_포스터.pptx
@@ -118,6 +118,67 @@
 </p:presentation>
 </file>
 
+<file path=ppt/revisionInfo.xml><?xml version="1.0" encoding="utf-8"?>
+<p1510:revInfo xmlns:a="http://schemas.openxmlformats.org/drawingml/2006/main" xmlns:r="http://schemas.openxmlformats.org/officeDocument/2006/relationships" xmlns:p1510="http://schemas.microsoft.com/office/powerpoint/2015/10/main">
+  <p1510:revLst>
+    <p1510:client id="{9D31B771-F182-4304-8DFC-1F73E804F4FB}" v="1" dt="2026-07-02T13:13:33.837"/>
+  </p1510:revLst>
+</p1510:revInfo>
+</file>
+
+<file path=ppt/changesInfos/changesInfo1.xml><?xml version="1.0" encoding="utf-8"?>
+<pc:chgInfo xmlns:a="http://schemas.openxmlformats.org/drawingml/2006/main" xmlns:r="http://schemas.openxmlformats.org/officeDocument/2006/relationships" xmlns:ac="http://schemas.microsoft.com/office/drawing/2013/main/command" xmlns:pc="http://schemas.microsoft.com/office/powerpoint/2013/main/command">
+  <pc:docChgLst>
+    <pc:chgData name="서혁 김" userId="673a45dc699d0b3e" providerId="LiveId" clId="{B83A4E28-A29A-43FB-A79E-2E1372E663CB}"/>
+    <pc:docChg chg="undo custSel modSld">
+      <pc:chgData name="서혁 김" userId="673a45dc699d0b3e" providerId="LiveId" clId="{B83A4E28-A29A-43FB-A79E-2E1372E663CB}" dt="2026-07-02T13:13:55.256" v="204" actId="313"/>
+      <pc:docMkLst>
+        <pc:docMk/>
+      </pc:docMkLst>
+      <pc:sldChg chg="modSp mod">
+        <pc:chgData name="서혁 김" userId="673a45dc699d0b3e" providerId="LiveId" clId="{B83A4E28-A29A-43FB-A79E-2E1372E663CB}" dt="2026-07-02T13:13:55.256" v="204" actId="313"/>
+        <pc:sldMkLst>
+          <pc:docMk/>
+          <pc:sldMk cId="2775059156" sldId="256"/>
+        </pc:sldMkLst>
+        <pc:spChg chg="mod">
+          <ac:chgData name="서혁 김" userId="673a45dc699d0b3e" providerId="LiveId" clId="{B83A4E28-A29A-43FB-A79E-2E1372E663CB}" dt="2026-07-02T13:13:55.256" v="204" actId="313"/>
+          <ac:spMkLst>
+            <pc:docMk/>
+            <pc:sldMk cId="2775059156" sldId="256"/>
+            <ac:spMk id="5" creationId="{00000000-0000-0000-0000-000000000000}"/>
+          </ac:spMkLst>
+        </pc:spChg>
+        <pc:spChg chg="mod">
+          <ac:chgData name="서혁 김" userId="673a45dc699d0b3e" providerId="LiveId" clId="{B83A4E28-A29A-43FB-A79E-2E1372E663CB}" dt="2026-07-02T13:13:17.972" v="181" actId="20577"/>
+          <ac:spMkLst>
+            <pc:docMk/>
+            <pc:sldMk cId="2775059156" sldId="256"/>
+            <ac:spMk id="7" creationId="{00000000-0000-0000-0000-000000000000}"/>
+          </ac:spMkLst>
+        </pc:spChg>
+        <pc:spChg chg="mod">
+          <ac:chgData name="서혁 김" userId="673a45dc699d0b3e" providerId="LiveId" clId="{B83A4E28-A29A-43FB-A79E-2E1372E663CB}" dt="2026-07-02T13:13:39.908" v="198" actId="20577"/>
+          <ac:spMkLst>
+            <pc:docMk/>
+            <pc:sldMk cId="2775059156" sldId="256"/>
+            <ac:spMk id="8" creationId="{00000000-0000-0000-0000-000000000000}"/>
+          </ac:spMkLst>
+        </pc:spChg>
+        <pc:picChg chg="mod">
+          <ac:chgData name="서혁 김" userId="673a45dc699d0b3e" providerId="LiveId" clId="{B83A4E28-A29A-43FB-A79E-2E1372E663CB}" dt="2026-07-02T13:13:13.332" v="179" actId="1035"/>
+          <ac:picMkLst>
+            <pc:docMk/>
+            <pc:sldMk cId="2775059156" sldId="256"/>
+            <ac:picMk id="3" creationId="{1C3B43D1-5084-0DBF-18DC-F83ACDB330BC}"/>
+          </ac:picMkLst>
+        </pc:picChg>
+      </pc:sldChg>
+    </pc:docChg>
+  </pc:docChgLst>
+</pc:chgInfo>
+</file>
+
 <file path=ppt/handoutMasters/handoutMaster1.xml><?xml version="1.0" encoding="utf-8"?>
 <p:handoutMaster xmlns:a="http://schemas.openxmlformats.org/drawingml/2006/main" xmlns:r="http://schemas.openxmlformats.org/officeDocument/2006/relationships" xmlns:p="http://schemas.openxmlformats.org/presentationml/2006/main">
   <p:cSld>
@@ -200,7 +261,7 @@
           <a:p>
             <a:fld id="{678876DD-2ECB-4391-8BA8-BB23CD9FC081}" type="datetimeFigureOut">
               <a:rPr lang="ko-KR" altLang="en-US" smtClean="0"/>
-              <a:t>2026. 7. 2.</a:t>
+              <a:t>2026-07-02</a:t>
             </a:fld>
             <a:endParaRPr lang="ko-KR" altLang="en-US"/>
           </a:p>
@@ -815,7 +876,7 @@
           <a:p>
             <a:fld id="{65A0B9EE-98E3-481A-A7E8-04A8CF889727}" type="datetimeFigureOut">
               <a:rPr lang="ko-KR" altLang="en-US" smtClean="0"/>
-              <a:t>2026. 7. 2.</a:t>
+              <a:t>2026-07-02</a:t>
             </a:fld>
             <a:endParaRPr lang="ko-KR" altLang="en-US"/>
           </a:p>
@@ -1025,7 +1086,7 @@
           <a:p>
             <a:fld id="{65A0B9EE-98E3-481A-A7E8-04A8CF889727}" type="datetimeFigureOut">
               <a:rPr lang="ko-KR" altLang="en-US" smtClean="0"/>
-              <a:t>2026. 7. 2.</a:t>
+              <a:t>2026-07-02</a:t>
             </a:fld>
             <a:endParaRPr lang="ko-KR" altLang="en-US"/>
           </a:p>
@@ -1235,7 +1296,7 @@
           <a:p>
             <a:fld id="{65A0B9EE-98E3-481A-A7E8-04A8CF889727}" type="datetimeFigureOut">
               <a:rPr lang="ko-KR" altLang="en-US" smtClean="0"/>
-              <a:t>2026. 7. 2.</a:t>
+              <a:t>2026-07-02</a:t>
             </a:fld>
             <a:endParaRPr lang="ko-KR" altLang="en-US"/>
           </a:p>
@@ -1509,7 +1570,7 @@
           <a:p>
             <a:fld id="{65A0B9EE-98E3-481A-A7E8-04A8CF889727}" type="datetimeFigureOut">
               <a:rPr lang="ko-KR" altLang="en-US" smtClean="0"/>
-              <a:t>2026. 7. 2.</a:t>
+              <a:t>2026-07-02</a:t>
             </a:fld>
             <a:endParaRPr lang="ko-KR" altLang="en-US"/>
           </a:p>
@@ -1779,7 +1840,7 @@
           <a:p>
             <a:fld id="{65A0B9EE-98E3-481A-A7E8-04A8CF889727}" type="datetimeFigureOut">
               <a:rPr lang="ko-KR" altLang="en-US" smtClean="0"/>
-              <a:t>2026. 7. 2.</a:t>
+              <a:t>2026-07-02</a:t>
             </a:fld>
             <a:endParaRPr lang="ko-KR" altLang="en-US"/>
           </a:p>
@@ -2185,7 +2246,7 @@
           <a:p>
             <a:fld id="{65A0B9EE-98E3-481A-A7E8-04A8CF889727}" type="datetimeFigureOut">
               <a:rPr lang="ko-KR" altLang="en-US" smtClean="0"/>
-              <a:t>2026. 7. 2.</a:t>
+              <a:t>2026-07-02</a:t>
             </a:fld>
             <a:endParaRPr lang="ko-KR" altLang="en-US"/>
           </a:p>
@@ -2335,7 +2396,7 @@
           <a:p>
             <a:fld id="{65A0B9EE-98E3-481A-A7E8-04A8CF889727}" type="datetimeFigureOut">
               <a:rPr lang="ko-KR" altLang="en-US" smtClean="0"/>
-              <a:t>2026. 7. 2.</a:t>
+              <a:t>2026-07-02</a:t>
             </a:fld>
             <a:endParaRPr lang="ko-KR" altLang="en-US"/>
           </a:p>
@@ -2454,7 +2515,7 @@
           <a:p>
             <a:fld id="{65A0B9EE-98E3-481A-A7E8-04A8CF889727}" type="datetimeFigureOut">
               <a:rPr lang="ko-KR" altLang="en-US" smtClean="0"/>
-              <a:t>2026. 7. 2.</a:t>
+              <a:t>2026-07-02</a:t>
             </a:fld>
             <a:endParaRPr lang="ko-KR" altLang="en-US"/>
           </a:p>
@@ -2764,7 +2825,7 @@
           <a:p>
             <a:fld id="{65A0B9EE-98E3-481A-A7E8-04A8CF889727}" type="datetimeFigureOut">
               <a:rPr lang="ko-KR" altLang="en-US" smtClean="0"/>
-              <a:t>2026. 7. 2.</a:t>
+              <a:t>2026-07-02</a:t>
             </a:fld>
             <a:endParaRPr lang="ko-KR" altLang="en-US"/>
           </a:p>
@@ -3054,7 +3115,7 @@
           <a:p>
             <a:fld id="{65A0B9EE-98E3-481A-A7E8-04A8CF889727}" type="datetimeFigureOut">
               <a:rPr lang="ko-KR" altLang="en-US" smtClean="0"/>
-              <a:t>2026. 7. 2.</a:t>
+              <a:t>2026-07-02</a:t>
             </a:fld>
             <a:endParaRPr lang="ko-KR" altLang="en-US"/>
           </a:p>
@@ -3942,7 +4003,7 @@
             </a:r>
             <a:r>
               <a:rPr lang="en-US" altLang="ko-KR" sz="800" dirty="0"/>
-              <a:t>"</a:t>
+              <a:t>‘</a:t>
             </a:r>
             <a:r>
               <a:rPr lang="ko-KR" altLang="en-US" sz="800" dirty="0"/>
@@ -3950,7 +4011,7 @@
             </a:r>
             <a:r>
               <a:rPr lang="en-US" altLang="ko-KR" sz="800" dirty="0"/>
-              <a:t>" </a:t>
+              <a:t>’ </a:t>
             </a:r>
             <a:r>
               <a:rPr lang="ko-KR" altLang="en-US" sz="800" dirty="0"/>
@@ -4202,7 +4263,7 @@
         </p:nvSpPr>
         <p:spPr>
           <a:xfrm>
-            <a:off x="502920" y="3401568"/>
+            <a:off x="502920" y="3347593"/>
             <a:ext cx="2788920" cy="5264912"/>
           </a:xfrm>
           <a:prstGeom prst="rect">
@@ -4217,6 +4278,9 @@
           <a:lstStyle/>
           <a:p>
             <a:pPr algn="l">
+              <a:lnSpc>
+                <a:spcPct val="120000"/>
+              </a:lnSpc>
               <a:spcAft>
                 <a:spcPts val="300"/>
               </a:spcAft>
@@ -4255,89 +4319,92 @@
           </a:p>
           <a:p>
             <a:pPr>
+              <a:lnSpc>
+                <a:spcPct val="120000"/>
+              </a:lnSpc>
               <a:spcAft>
                 <a:spcPts val="600"/>
               </a:spcAft>
             </a:pPr>
             <a:r>
-              <a:rPr lang="ko-KR" altLang="en-US" sz="800" dirty="0">
+              <a:rPr lang="ko-KR" altLang="en-US" sz="750" dirty="0">
                 <a:latin typeface="맑은 고딕"/>
                 <a:ea typeface="맑은 고딕"/>
               </a:rPr>
               <a:t>신경망은 일반적으로 훈련 데이터를 먼저 암기하는 상태에 도달하며</a:t>
             </a:r>
             <a:r>
-              <a:rPr lang="en-US" altLang="ko-KR" sz="800" dirty="0">
+              <a:rPr lang="en-US" altLang="ko-KR" sz="750" dirty="0">
                 <a:latin typeface="맑은 고딕"/>
                 <a:ea typeface="맑은 고딕"/>
               </a:rPr>
               <a:t>, </a:t>
             </a:r>
             <a:r>
-              <a:rPr lang="ko-KR" altLang="en-US" sz="800" dirty="0">
+              <a:rPr lang="ko-KR" altLang="en-US" sz="750" dirty="0">
                 <a:latin typeface="맑은 고딕"/>
                 <a:ea typeface="맑은 고딕"/>
               </a:rPr>
               <a:t>이 상태에서는 훈련 문제는 모두 맞히지만 처음 보는 문제는 풀지 못한다</a:t>
             </a:r>
             <a:r>
-              <a:rPr lang="en-US" altLang="ko-KR" sz="800" dirty="0">
+              <a:rPr lang="en-US" altLang="ko-KR" sz="750" dirty="0">
                 <a:latin typeface="맑은 고딕"/>
                 <a:ea typeface="맑은 고딕"/>
               </a:rPr>
               <a:t>. </a:t>
             </a:r>
             <a:r>
-              <a:rPr lang="ko-KR" altLang="en-US" sz="800" dirty="0">
+              <a:rPr lang="ko-KR" altLang="en-US" sz="750" dirty="0">
                 <a:latin typeface="맑은 고딕"/>
                 <a:ea typeface="맑은 고딕"/>
               </a:rPr>
               <a:t>그러나 이 시점 이후에도 훈련을 계속하면</a:t>
             </a:r>
             <a:r>
-              <a:rPr lang="en-US" altLang="ko-KR" sz="800" dirty="0">
+              <a:rPr lang="en-US" altLang="ko-KR" sz="750" dirty="0">
                 <a:latin typeface="맑은 고딕"/>
                 <a:ea typeface="맑은 고딕"/>
               </a:rPr>
               <a:t>, </a:t>
             </a:r>
             <a:r>
-              <a:rPr lang="ko-KR" altLang="en-US" sz="800" dirty="0">
+              <a:rPr lang="ko-KR" altLang="en-US" sz="750" dirty="0">
                 <a:latin typeface="맑은 고딕"/>
                 <a:ea typeface="맑은 고딕"/>
               </a:rPr>
               <a:t>특정 조건에서 검증 정확도가 갑자기 상승하며 규칙 자체를 학습하는 현상이 나타난다</a:t>
             </a:r>
             <a:r>
-              <a:rPr lang="en-US" altLang="ko-KR" sz="800" dirty="0">
+              <a:rPr lang="en-US" altLang="ko-KR" sz="750" dirty="0">
                 <a:latin typeface="맑은 고딕"/>
                 <a:ea typeface="맑은 고딕"/>
               </a:rPr>
               <a:t>. </a:t>
             </a:r>
             <a:r>
-              <a:rPr lang="ko-KR" altLang="en-US" sz="800" dirty="0">
+              <a:rPr lang="ko-KR" altLang="en-US" sz="750" dirty="0">
                 <a:latin typeface="맑은 고딕"/>
                 <a:ea typeface="맑은 고딕"/>
               </a:rPr>
               <a:t>이러한 지연된 일반화 현상을 </a:t>
             </a:r>
             <a:r>
-              <a:rPr lang="en" sz="800" dirty="0">
+              <a:rPr lang="en" sz="750" dirty="0">
                 <a:latin typeface="맑은 고딕"/>
                 <a:ea typeface="맑은 고딕"/>
               </a:rPr>
               <a:t>Grokking</a:t>
             </a:r>
             <a:r>
-              <a:rPr lang="ko-KR" altLang="en-US" sz="800" dirty="0">
+              <a:rPr lang="ko-KR" altLang="en-US" sz="750" dirty="0">
                 <a:latin typeface="맑은 고딕"/>
                 <a:ea typeface="맑은 고딕"/>
               </a:rPr>
               <a:t>이라 한다</a:t>
             </a:r>
             <a:r>
-              <a:rPr lang="en-US" altLang="ko-KR" sz="800" dirty="0">
+              <a:rPr lang="en-US" altLang="ko-KR" sz="750" dirty="0">
                 <a:latin typeface="맑은 고딕"/>
                 <a:ea typeface="맑은 고딕"/>
               </a:rPr>
@@ -4346,6 +4413,9 @@
           </a:p>
           <a:p>
             <a:pPr>
+              <a:lnSpc>
+                <a:spcPct val="120000"/>
+              </a:lnSpc>
               <a:spcAft>
                 <a:spcPts val="600"/>
               </a:spcAft>
@@ -4357,69 +4427,76 @@
           </a:p>
           <a:p>
             <a:pPr>
+              <a:lnSpc>
+                <a:spcPct val="120000"/>
+              </a:lnSpc>
               <a:spcAft>
                 <a:spcPts val="600"/>
               </a:spcAft>
             </a:pPr>
-            <a:endParaRPr lang="en-US" altLang="ko-KR" sz="650" dirty="0">
+            <a:endParaRPr lang="en-US" altLang="ko-KR" sz="550" dirty="0">
               <a:latin typeface="맑은 고딕"/>
               <a:ea typeface="맑은 고딕"/>
             </a:endParaRPr>
           </a:p>
           <a:p>
             <a:pPr>
+              <a:lnSpc>
+                <a:spcPct val="120000"/>
+              </a:lnSpc>
               <a:spcAft>
                 <a:spcPts val="600"/>
               </a:spcAft>
             </a:pPr>
-            <a:endParaRPr lang="en-US" altLang="ko-KR" sz="650" dirty="0">
+            <a:endParaRPr lang="en-US" altLang="ko-KR" sz="550" dirty="0">
               <a:latin typeface="맑은 고딕"/>
               <a:ea typeface="맑은 고딕"/>
             </a:endParaRPr>
           </a:p>
           <a:p>
             <a:pPr>
+              <a:lnSpc>
+                <a:spcPct val="120000"/>
+              </a:lnSpc>
               <a:spcAft>
                 <a:spcPts val="600"/>
               </a:spcAft>
             </a:pPr>
-            <a:endParaRPr lang="en-US" altLang="ko-KR" sz="650" dirty="0">
+            <a:endParaRPr lang="en-US" altLang="ko-KR" sz="550" dirty="0">
               <a:latin typeface="맑은 고딕"/>
               <a:ea typeface="맑은 고딕"/>
             </a:endParaRPr>
           </a:p>
           <a:p>
             <a:pPr>
+              <a:lnSpc>
+                <a:spcPct val="120000"/>
+              </a:lnSpc>
               <a:spcAft>
                 <a:spcPts val="600"/>
               </a:spcAft>
             </a:pPr>
-            <a:endParaRPr lang="en-US" altLang="ko-KR" sz="650" dirty="0">
+            <a:endParaRPr lang="en-US" altLang="ko-KR" sz="550" dirty="0">
               <a:latin typeface="맑은 고딕"/>
               <a:ea typeface="맑은 고딕"/>
             </a:endParaRPr>
           </a:p>
           <a:p>
             <a:pPr>
+              <a:lnSpc>
+                <a:spcPct val="120000"/>
+              </a:lnSpc>
               <a:spcAft>
                 <a:spcPts val="600"/>
               </a:spcAft>
             </a:pPr>
-            <a:endParaRPr lang="en-US" altLang="ko-KR" sz="650" dirty="0">
-              <a:latin typeface="맑은 고딕"/>
-              <a:ea typeface="맑은 고딕"/>
-            </a:endParaRPr>
-          </a:p>
-          <a:p>
-            <a:pPr>
-              <a:spcAft>
-                <a:spcPts val="600"/>
-              </a:spcAft>
-            </a:pPr>
-            <a:endParaRPr lang="en-US" altLang="ko-KR" sz="500" dirty="0"/>
+            <a:endParaRPr lang="en-US" altLang="ko-KR" sz="550" dirty="0"/>
           </a:p>
           <a:p>
             <a:pPr algn="r">
+              <a:lnSpc>
+                <a:spcPct val="120000"/>
+              </a:lnSpc>
               <a:spcAft>
                 <a:spcPts val="1400"/>
               </a:spcAft>
@@ -4494,6 +4571,9 @@
           </a:p>
           <a:p>
             <a:pPr algn="l">
+              <a:lnSpc>
+                <a:spcPct val="120000"/>
+              </a:lnSpc>
               <a:spcAft>
                 <a:spcPts val="300"/>
               </a:spcAft>
@@ -4528,93 +4608,118 @@
           </a:p>
           <a:p>
             <a:pPr>
+              <a:lnSpc>
+                <a:spcPct val="120000"/>
+              </a:lnSpc>
               <a:spcAft>
                 <a:spcPts val="300"/>
               </a:spcAft>
             </a:pPr>
             <a:r>
-              <a:rPr lang="ko-KR" altLang="en-US" sz="800" dirty="0"/>
+              <a:rPr lang="ko-KR" altLang="en-US" sz="750" dirty="0"/>
               <a:t>기존 </a:t>
             </a:r>
             <a:r>
-              <a:rPr lang="en" altLang="ko-KR" sz="800" dirty="0"/>
+              <a:rPr lang="en" altLang="ko-KR" sz="750" dirty="0"/>
               <a:t>Grokking </a:t>
             </a:r>
             <a:r>
-              <a:rPr lang="ko-KR" altLang="en-US" sz="800" dirty="0"/>
-              <a:t>연구는 두 정수를 연산한 결과를 하나의 답으로 예측하는 나머지 연산 문제에 집중되어 왔다</a:t>
-            </a:r>
-            <a:r>
-              <a:rPr lang="en-US" altLang="ko-KR" sz="800" dirty="0"/>
+              <a:rPr lang="ko-KR" altLang="en-US" sz="750" dirty="0"/>
+              <a:t>연구는 두 정수를 연산한 결과를 하나의 답으로 예측하는 나머지 연산 문제에 집중되어 왔으나</a:t>
+            </a:r>
+            <a:r>
+              <a:rPr lang="en-US" altLang="ko-KR" sz="750" dirty="0"/>
+              <a:t>,</a:t>
+            </a:r>
+            <a:r>
+              <a:rPr lang="ko-KR" altLang="en-US" sz="750" dirty="0"/>
+              <a:t> </a:t>
+            </a:r>
+            <a:r>
+              <a:rPr lang="en-US" altLang="ko-KR" sz="750" dirty="0"/>
+              <a:t>(3, 1, 4, 1, 5) → (1, 1, 3, 4, 5)</a:t>
+            </a:r>
+            <a:r>
+              <a:rPr lang="ko-KR" altLang="en-US" sz="750" dirty="0"/>
+              <a:t>와 같이 출력 전체가 수열인 과제에서 </a:t>
+            </a:r>
+            <a:r>
+              <a:rPr lang="en" altLang="ko-KR" sz="750" dirty="0"/>
+              <a:t>Grokking</a:t>
+            </a:r>
+            <a:r>
+              <a:rPr lang="ko-KR" altLang="en-US" sz="750" dirty="0"/>
+              <a:t>이 발생하는지는 아직 규명되지 않았다</a:t>
+            </a:r>
+            <a:r>
+              <a:rPr lang="en-US" altLang="ko-KR" sz="750" dirty="0"/>
               <a:t>. </a:t>
             </a:r>
             <a:r>
-              <a:rPr lang="ko-KR" altLang="en-US" sz="800" dirty="0"/>
-              <a:t>그러나 </a:t>
-            </a:r>
-            <a:r>
-              <a:rPr lang="en-US" altLang="ko-KR" sz="800" dirty="0"/>
-              <a:t>(3, 1, 4, 1, 5) → (1, 1, 3, 4, 5)</a:t>
-            </a:r>
-            <a:r>
-              <a:rPr lang="ko-KR" altLang="en-US" sz="800" dirty="0"/>
-              <a:t>와 같이 출력 전체가 순서를 갖는 수열인 과제에서 </a:t>
-            </a:r>
-            <a:r>
-              <a:rPr lang="en" altLang="ko-KR" sz="800" dirty="0"/>
+              <a:rPr lang="ko-KR" altLang="en-US" sz="750" dirty="0"/>
+              <a:t>수열 정렬은 원소 간 비교와 자리 배치라는 성격을 띄기에</a:t>
+            </a:r>
+            <a:r>
+              <a:rPr lang="en-US" altLang="ko-KR" sz="750" dirty="0"/>
+              <a:t>, </a:t>
+            </a:r>
+            <a:r>
+              <a:rPr lang="ko-KR" altLang="en-US" sz="750" dirty="0"/>
+              <a:t>출력 수열 전체에 걸쳐 일관성이 유지되어야 하므로 단일 답 예측과는 본질적으로 다르게 볼 수 있다</a:t>
+            </a:r>
+            <a:r>
+              <a:rPr lang="en-US" altLang="ko-KR" sz="750" dirty="0"/>
+              <a:t>. </a:t>
+            </a:r>
+            <a:r>
+              <a:rPr lang="ko-KR" altLang="en-US" sz="750" dirty="0"/>
+              <a:t>즉</a:t>
+            </a:r>
+            <a:r>
+              <a:rPr lang="en-US" altLang="ko-KR" sz="750" dirty="0"/>
+              <a:t>, </a:t>
+            </a:r>
+            <a:r>
+              <a:rPr lang="ko-KR" altLang="en-US" sz="750" dirty="0"/>
+              <a:t>본 연구에서는 정렬 과제를 대상으로 </a:t>
+            </a:r>
+            <a:r>
+              <a:rPr lang="en" altLang="ko-KR" sz="750" dirty="0"/>
               <a:t>Grokking</a:t>
             </a:r>
             <a:r>
-              <a:rPr lang="ko-KR" altLang="en-US" sz="800" dirty="0"/>
-              <a:t>이 발생하는지는 아직 규명되지 않았다</a:t>
-            </a:r>
-            <a:r>
-              <a:rPr lang="en-US" altLang="ko-KR" sz="800" dirty="0"/>
-              <a:t>. </a:t>
-            </a:r>
-            <a:r>
-              <a:rPr lang="ko-KR" altLang="en-US" sz="800" dirty="0"/>
-              <a:t>정렬은 원소 간 비교와 자리 배치라는 구조를 내재하며</a:t>
-            </a:r>
-            <a:r>
-              <a:rPr lang="en-US" altLang="ko-KR" sz="800" dirty="0"/>
+              <a:rPr lang="ko-KR" altLang="en-US" sz="750" dirty="0"/>
+              <a:t>의 발현 여부를 검증하고</a:t>
+            </a:r>
+            <a:r>
+              <a:rPr lang="en-US" altLang="ko-KR" sz="750" dirty="0"/>
               <a:t>, </a:t>
             </a:r>
             <a:r>
-              <a:rPr lang="ko-KR" altLang="en-US" sz="800" dirty="0"/>
-              <a:t>출력 수열 전체에 걸쳐 일관성이 유지되어야 하므로 단일 답 예측과는 본질적으로 다른 과제이다</a:t>
-            </a:r>
-            <a:r>
-              <a:rPr lang="en-US" altLang="ko-KR" sz="800" dirty="0"/>
-              <a:t>. </a:t>
-            </a:r>
-            <a:r>
-              <a:rPr lang="ko-KR" altLang="en-US" sz="800" dirty="0"/>
-              <a:t>본 연구는 정렬 과제를 대상으로 </a:t>
-            </a:r>
-            <a:r>
-              <a:rPr lang="en" altLang="ko-KR" sz="800" dirty="0"/>
-              <a:t>Grokking</a:t>
-            </a:r>
-            <a:r>
-              <a:rPr lang="ko-KR" altLang="en-US" sz="800" dirty="0"/>
-              <a:t>의 발현 여부를 검증하고</a:t>
-            </a:r>
-            <a:r>
-              <a:rPr lang="en-US" altLang="ko-KR" sz="800" dirty="0"/>
-              <a:t>, </a:t>
-            </a:r>
-            <a:r>
-              <a:rPr lang="ko-KR" altLang="en-US" sz="800" dirty="0"/>
-              <a:t>그 내부 구조를 분석한다</a:t>
-            </a:r>
-            <a:r>
-              <a:rPr lang="en-US" altLang="ko-KR" sz="800" dirty="0"/>
+              <a:rPr lang="ko-KR" altLang="en-US" sz="750" dirty="0"/>
+              <a:t>그 내부 구조를 분석하는 것을 목표로 한다</a:t>
+            </a:r>
+            <a:r>
+              <a:rPr lang="en-US" altLang="ko-KR" sz="750" dirty="0"/>
               <a:t>.</a:t>
             </a:r>
           </a:p>
           <a:p>
             <a:pPr>
+              <a:lnSpc>
+                <a:spcPct val="120000"/>
+              </a:lnSpc>
+              <a:spcAft>
+                <a:spcPts val="300"/>
+              </a:spcAft>
+            </a:pPr>
+            <a:endParaRPr lang="en-US" altLang="ko-KR" sz="800" dirty="0"/>
+          </a:p>
+          <a:p>
+            <a:pPr>
+              <a:lnSpc>
+                <a:spcPct val="120000"/>
+              </a:lnSpc>
               <a:spcAft>
                 <a:spcPts val="300"/>
               </a:spcAft>
@@ -4649,89 +4754,92 @@
           </a:p>
           <a:p>
             <a:pPr>
+              <a:lnSpc>
+                <a:spcPct val="120000"/>
+              </a:lnSpc>
               <a:spcAft>
                 <a:spcPts val="300"/>
               </a:spcAft>
             </a:pPr>
             <a:r>
-              <a:rPr lang="en-US" altLang="ko-KR" sz="800" b="1" dirty="0">
+              <a:rPr lang="en-US" altLang="ko-KR" sz="750" b="1" dirty="0">
                 <a:latin typeface="맑은 고딕"/>
                 <a:ea typeface="맑은 고딕"/>
               </a:rPr>
               <a:t>[</a:t>
             </a:r>
             <a:r>
-              <a:rPr lang="ko-KR" altLang="en-US" sz="800" b="1" dirty="0">
+              <a:rPr lang="ko-KR" altLang="en-US" sz="750" b="1" dirty="0">
                 <a:latin typeface="맑은 고딕"/>
                 <a:ea typeface="맑은 고딕"/>
               </a:rPr>
               <a:t>연구 문제 </a:t>
             </a:r>
             <a:r>
-              <a:rPr lang="en-US" altLang="ko-KR" sz="800" b="1" dirty="0">
+              <a:rPr lang="en-US" altLang="ko-KR" sz="750" b="1" dirty="0">
                 <a:latin typeface="맑은 고딕"/>
                 <a:ea typeface="맑은 고딕"/>
               </a:rPr>
               <a:t>1]</a:t>
             </a:r>
             <a:r>
-              <a:rPr lang="en-US" altLang="ko-KR" sz="800" dirty="0">
+              <a:rPr lang="en-US" altLang="ko-KR" sz="750" dirty="0">
                 <a:latin typeface="맑은 고딕"/>
                 <a:ea typeface="맑은 고딕"/>
               </a:rPr>
               <a:t> </a:t>
             </a:r>
             <a:r>
-              <a:rPr lang="ko-KR" altLang="en-US" sz="800" dirty="0">
+              <a:rPr lang="ko-KR" altLang="en-US" sz="750" dirty="0">
                 <a:latin typeface="맑은 고딕"/>
                 <a:ea typeface="맑은 고딕"/>
               </a:rPr>
               <a:t>정렬 과제에서 </a:t>
             </a:r>
             <a:r>
-              <a:rPr lang="en" sz="800" dirty="0">
+              <a:rPr lang="en" sz="750" dirty="0">
                 <a:latin typeface="맑은 고딕"/>
                 <a:ea typeface="맑은 고딕"/>
               </a:rPr>
               <a:t>Grokking</a:t>
             </a:r>
             <a:r>
-              <a:rPr lang="ko-KR" altLang="en-US" sz="800" dirty="0">
+              <a:rPr lang="ko-KR" altLang="en-US" sz="750" dirty="0">
                 <a:latin typeface="맑은 고딕"/>
                 <a:ea typeface="맑은 고딕"/>
               </a:rPr>
               <a:t>이 발현되는가</a:t>
             </a:r>
             <a:r>
-              <a:rPr lang="en-US" altLang="ko-KR" sz="800" dirty="0">
+              <a:rPr lang="en-US" altLang="ko-KR" sz="750" dirty="0">
                 <a:latin typeface="맑은 고딕"/>
                 <a:ea typeface="맑은 고딕"/>
               </a:rPr>
               <a:t>? </a:t>
             </a:r>
             <a:r>
-              <a:rPr lang="ko-KR" altLang="en-US" sz="800" dirty="0">
+              <a:rPr lang="ko-KR" altLang="en-US" sz="750" dirty="0">
                 <a:latin typeface="맑은 고딕"/>
                 <a:ea typeface="맑은 고딕"/>
               </a:rPr>
               <a:t>정렬 규칙의 구조가 </a:t>
             </a:r>
             <a:r>
-              <a:rPr lang="ko-KR" altLang="en-US" sz="800" dirty="0" err="1">
+              <a:rPr lang="ko-KR" altLang="en-US" sz="750" dirty="0" err="1">
                 <a:latin typeface="맑은 고딕"/>
                 <a:ea typeface="맑은 고딕"/>
               </a:rPr>
               <a:t>복잡해질수록</a:t>
             </a:r>
             <a:r>
-              <a:rPr lang="ko-KR" altLang="en-US" sz="800" dirty="0">
+              <a:rPr lang="ko-KR" altLang="en-US" sz="750" dirty="0">
                 <a:latin typeface="맑은 고딕"/>
                 <a:ea typeface="맑은 고딕"/>
               </a:rPr>
               <a:t> 발현 여부와 발현 시점이 어떻게 달라지는가</a:t>
             </a:r>
             <a:r>
-              <a:rPr lang="en-US" altLang="ko-KR" sz="800" dirty="0">
+              <a:rPr lang="en-US" altLang="ko-KR" sz="750" dirty="0">
                 <a:latin typeface="맑은 고딕"/>
                 <a:ea typeface="맑은 고딕"/>
               </a:rPr>
@@ -4740,123 +4848,129 @@
           </a:p>
           <a:p>
             <a:pPr>
+              <a:lnSpc>
+                <a:spcPct val="120000"/>
+              </a:lnSpc>
               <a:spcAft>
                 <a:spcPts val="300"/>
               </a:spcAft>
             </a:pPr>
             <a:r>
-              <a:rPr lang="en-US" altLang="ko-KR" sz="800" b="1" dirty="0">
+              <a:rPr lang="en-US" altLang="ko-KR" sz="750" b="1" dirty="0">
                 <a:latin typeface="맑은 고딕"/>
                 <a:ea typeface="맑은 고딕"/>
               </a:rPr>
               <a:t>[</a:t>
             </a:r>
             <a:r>
-              <a:rPr lang="ko-KR" altLang="en-US" sz="800" b="1" dirty="0">
+              <a:rPr lang="ko-KR" altLang="en-US" sz="750" b="1" dirty="0">
                 <a:latin typeface="맑은 고딕"/>
                 <a:ea typeface="맑은 고딕"/>
               </a:rPr>
               <a:t>연구 문제 </a:t>
             </a:r>
             <a:r>
-              <a:rPr lang="en-US" altLang="ko-KR" sz="800" b="1" dirty="0">
+              <a:rPr lang="en-US" altLang="ko-KR" sz="750" b="1" dirty="0">
                 <a:latin typeface="맑은 고딕"/>
                 <a:ea typeface="맑은 고딕"/>
               </a:rPr>
               <a:t>2] </a:t>
             </a:r>
             <a:r>
-              <a:rPr lang="en" sz="800" dirty="0">
+              <a:rPr lang="en" sz="750" dirty="0">
                 <a:latin typeface="맑은 고딕"/>
                 <a:ea typeface="맑은 고딕"/>
               </a:rPr>
               <a:t>Grokking</a:t>
             </a:r>
             <a:r>
-              <a:rPr lang="ko-KR" altLang="en-US" sz="800" dirty="0">
+              <a:rPr lang="ko-KR" altLang="en-US" sz="750" dirty="0">
                 <a:latin typeface="맑은 고딕"/>
                 <a:ea typeface="맑은 고딕"/>
               </a:rPr>
               <a:t>이 완료된 모델의 내부 표현은 어떤 구조를 가지는가</a:t>
             </a:r>
             <a:r>
-              <a:rPr lang="en-US" altLang="ko-KR" sz="800" dirty="0">
-                <a:latin typeface="맑은 고딕"/>
-                <a:ea typeface="맑은 고딕"/>
-              </a:rPr>
-              <a:t>? ▎</a:t>
+              <a:rPr lang="en-US" altLang="ko-KR" sz="750" dirty="0">
+                <a:latin typeface="맑은 고딕"/>
+                <a:ea typeface="맑은 고딕"/>
+              </a:rPr>
+              <a:t>?</a:t>
             </a:r>
           </a:p>
           <a:p>
             <a:pPr>
+              <a:lnSpc>
+                <a:spcPct val="120000"/>
+              </a:lnSpc>
               <a:spcAft>
                 <a:spcPts val="300"/>
               </a:spcAft>
             </a:pPr>
             <a:r>
-              <a:rPr lang="en-US" altLang="ko-KR" sz="800" b="1" dirty="0">
+              <a:rPr lang="en-US" altLang="ko-KR" sz="750" b="1" dirty="0">
                 <a:latin typeface="맑은 고딕"/>
                 <a:ea typeface="맑은 고딕"/>
               </a:rPr>
               <a:t>[</a:t>
             </a:r>
             <a:r>
-              <a:rPr lang="ko-KR" altLang="en-US" sz="800" b="1" dirty="0">
+              <a:rPr lang="ko-KR" altLang="en-US" sz="750" b="1" dirty="0">
                 <a:latin typeface="맑은 고딕"/>
                 <a:ea typeface="맑은 고딕"/>
               </a:rPr>
               <a:t>연구 문제 </a:t>
             </a:r>
             <a:r>
-              <a:rPr lang="en-US" altLang="ko-KR" sz="800" b="1" dirty="0">
+              <a:rPr lang="en-US" altLang="ko-KR" sz="750" b="1" dirty="0">
                 <a:latin typeface="맑은 고딕"/>
                 <a:ea typeface="맑은 고딕"/>
               </a:rPr>
               <a:t>3] </a:t>
             </a:r>
             <a:r>
-              <a:rPr lang="ko-KR" altLang="en-US" sz="800" dirty="0">
+              <a:rPr lang="ko-KR" altLang="en-US" sz="750" dirty="0">
                 <a:latin typeface="맑은 고딕"/>
                 <a:ea typeface="맑은 고딕"/>
               </a:rPr>
               <a:t>값 정보를 담당하는 </a:t>
             </a:r>
             <a:r>
-              <a:rPr lang="en" sz="800" dirty="0">
+              <a:rPr lang="en" sz="750" dirty="0">
                 <a:latin typeface="맑은 고딕"/>
                 <a:ea typeface="맑은 고딕"/>
               </a:rPr>
               <a:t>token embedding</a:t>
             </a:r>
             <a:r>
-              <a:rPr lang="ko-KR" altLang="en-US" sz="800" dirty="0">
+              <a:rPr lang="ko-KR" altLang="en-US" sz="750" dirty="0">
                 <a:latin typeface="맑은 고딕"/>
                 <a:ea typeface="맑은 고딕"/>
               </a:rPr>
               <a:t>과 위치 정보를 담당하는 </a:t>
             </a:r>
             <a:r>
-              <a:rPr lang="en" sz="800" dirty="0">
+              <a:rPr lang="en" sz="750" dirty="0">
                 <a:latin typeface="맑은 고딕"/>
                 <a:ea typeface="맑은 고딕"/>
               </a:rPr>
               <a:t>positional embedding</a:t>
             </a:r>
             <a:r>
-              <a:rPr lang="ko-KR" altLang="en-US" sz="800" dirty="0">
+              <a:rPr lang="ko-KR" altLang="en-US" sz="750" dirty="0">
                 <a:latin typeface="맑은 고딕"/>
                 <a:ea typeface="맑은 고딕"/>
               </a:rPr>
               <a:t>은 일반화에 각각 어떤 기여를 하는가</a:t>
             </a:r>
             <a:r>
-              <a:rPr lang="en-US" altLang="ko-KR" sz="800" dirty="0">
+              <a:rPr lang="en-US" altLang="ko-KR" sz="750" dirty="0">
                 <a:latin typeface="맑은 고딕"/>
                 <a:ea typeface="맑은 고딕"/>
               </a:rPr>
               <a:t>? </a:t>
             </a:r>
-            <a:endParaRPr sz="800" b="0" dirty="0">
+            <a:endParaRPr sz="750" b="0" dirty="0">
               <a:latin typeface="맑은 고딕"/>
               <a:ea typeface="맑은 고딕"/>
             </a:endParaRPr>
@@ -5016,7 +5130,7 @@
             </a:pPr>
             <a:r>
               <a:rPr lang="ko-KR" altLang="en-US" sz="800" dirty="0"/>
-              <a:t>정렬 기준은 서로 독립적인 두 축을 설정한다</a:t>
+              <a:t>서로 독립적인 두 축으로 정렬한다</a:t>
             </a:r>
             <a:r>
               <a:rPr lang="en-US" altLang="ko-KR" sz="800" dirty="0"/>
@@ -5273,7 +5387,7 @@
                 <a:spcPts val="300"/>
               </a:spcAft>
             </a:pPr>
-            <a:endParaRPr lang="en-US" sz="900" b="1">
+            <a:endParaRPr lang="en-US" sz="900" b="1" dirty="0">
               <a:solidFill>
                 <a:srgbClr val="1E2761"/>
               </a:solidFill>
@@ -5288,7 +5402,7 @@
               </a:spcAft>
             </a:pPr>
             <a:r>
-              <a:rPr sz="900" b="1">
+              <a:rPr sz="900" b="1" dirty="0">
                 <a:solidFill>
                   <a:srgbClr val="1E2761"/>
                 </a:solidFill>
@@ -5379,7 +5493,7 @@
         </p:blipFill>
         <p:spPr>
           <a:xfrm>
-            <a:off x="549229" y="4401364"/>
+            <a:off x="549229" y="4347389"/>
             <a:ext cx="2696301" cy="1221513"/>
           </a:xfrm>
           <a:prstGeom prst="rect">

--- a/주제탐구_포스터.pptx
+++ b/주제탐구_포스터.pptx
@@ -261,7 +261,7 @@
           <a:p>
             <a:fld id="{678876DD-2ECB-4391-8BA8-BB23CD9FC081}" type="datetimeFigureOut">
               <a:rPr lang="ko-KR" altLang="en-US" smtClean="0"/>
-              <a:t>2026-07-02</a:t>
+              <a:t>2026. 7. 2.</a:t>
             </a:fld>
             <a:endParaRPr lang="ko-KR" altLang="en-US"/>
           </a:p>
@@ -876,7 +876,7 @@
           <a:p>
             <a:fld id="{65A0B9EE-98E3-481A-A7E8-04A8CF889727}" type="datetimeFigureOut">
               <a:rPr lang="ko-KR" altLang="en-US" smtClean="0"/>
-              <a:t>2026-07-02</a:t>
+              <a:t>2026. 7. 2.</a:t>
             </a:fld>
             <a:endParaRPr lang="ko-KR" altLang="en-US"/>
           </a:p>
@@ -1086,7 +1086,7 @@
           <a:p>
             <a:fld id="{65A0B9EE-98E3-481A-A7E8-04A8CF889727}" type="datetimeFigureOut">
               <a:rPr lang="ko-KR" altLang="en-US" smtClean="0"/>
-              <a:t>2026-07-02</a:t>
+              <a:t>2026. 7. 2.</a:t>
             </a:fld>
             <a:endParaRPr lang="ko-KR" altLang="en-US"/>
           </a:p>
@@ -1296,7 +1296,7 @@
           <a:p>
             <a:fld id="{65A0B9EE-98E3-481A-A7E8-04A8CF889727}" type="datetimeFigureOut">
               <a:rPr lang="ko-KR" altLang="en-US" smtClean="0"/>
-              <a:t>2026-07-02</a:t>
+              <a:t>2026. 7. 2.</a:t>
             </a:fld>
             <a:endParaRPr lang="ko-KR" altLang="en-US"/>
           </a:p>
@@ -1570,7 +1570,7 @@
           <a:p>
             <a:fld id="{65A0B9EE-98E3-481A-A7E8-04A8CF889727}" type="datetimeFigureOut">
               <a:rPr lang="ko-KR" altLang="en-US" smtClean="0"/>
-              <a:t>2026-07-02</a:t>
+              <a:t>2026. 7. 2.</a:t>
             </a:fld>
             <a:endParaRPr lang="ko-KR" altLang="en-US"/>
           </a:p>
@@ -1840,7 +1840,7 @@
           <a:p>
             <a:fld id="{65A0B9EE-98E3-481A-A7E8-04A8CF889727}" type="datetimeFigureOut">
               <a:rPr lang="ko-KR" altLang="en-US" smtClean="0"/>
-              <a:t>2026-07-02</a:t>
+              <a:t>2026. 7. 2.</a:t>
             </a:fld>
             <a:endParaRPr lang="ko-KR" altLang="en-US"/>
           </a:p>
@@ -2246,7 +2246,7 @@
           <a:p>
             <a:fld id="{65A0B9EE-98E3-481A-A7E8-04A8CF889727}" type="datetimeFigureOut">
               <a:rPr lang="ko-KR" altLang="en-US" smtClean="0"/>
-              <a:t>2026-07-02</a:t>
+              <a:t>2026. 7. 2.</a:t>
             </a:fld>
             <a:endParaRPr lang="ko-KR" altLang="en-US"/>
           </a:p>
@@ -2396,7 +2396,7 @@
           <a:p>
             <a:fld id="{65A0B9EE-98E3-481A-A7E8-04A8CF889727}" type="datetimeFigureOut">
               <a:rPr lang="ko-KR" altLang="en-US" smtClean="0"/>
-              <a:t>2026-07-02</a:t>
+              <a:t>2026. 7. 2.</a:t>
             </a:fld>
             <a:endParaRPr lang="ko-KR" altLang="en-US"/>
           </a:p>
@@ -2515,7 +2515,7 @@
           <a:p>
             <a:fld id="{65A0B9EE-98E3-481A-A7E8-04A8CF889727}" type="datetimeFigureOut">
               <a:rPr lang="ko-KR" altLang="en-US" smtClean="0"/>
-              <a:t>2026-07-02</a:t>
+              <a:t>2026. 7. 2.</a:t>
             </a:fld>
             <a:endParaRPr lang="ko-KR" altLang="en-US"/>
           </a:p>
@@ -2825,7 +2825,7 @@
           <a:p>
             <a:fld id="{65A0B9EE-98E3-481A-A7E8-04A8CF889727}" type="datetimeFigureOut">
               <a:rPr lang="ko-KR" altLang="en-US" smtClean="0"/>
-              <a:t>2026-07-02</a:t>
+              <a:t>2026. 7. 2.</a:t>
             </a:fld>
             <a:endParaRPr lang="ko-KR" altLang="en-US"/>
           </a:p>
@@ -3115,7 +3115,7 @@
           <a:p>
             <a:fld id="{65A0B9EE-98E3-481A-A7E8-04A8CF889727}" type="datetimeFigureOut">
               <a:rPr lang="ko-KR" altLang="en-US" smtClean="0"/>
-              <a:t>2026-07-02</a:t>
+              <a:t>2026. 7. 2.</a:t>
             </a:fld>
             <a:endParaRPr lang="ko-KR" altLang="en-US"/>
           </a:p>
@@ -3999,23 +3999,7 @@
             </a:r>
             <a:r>
               <a:rPr lang="ko-KR" altLang="en-US" sz="800" dirty="0"/>
-              <a:t>지금까지의 연구는 대부분 </a:t>
-            </a:r>
-            <a:r>
-              <a:rPr lang="en-US" altLang="ko-KR" sz="800" dirty="0"/>
-              <a:t>‘</a:t>
-            </a:r>
-            <a:r>
-              <a:rPr lang="ko-KR" altLang="en-US" sz="800" dirty="0"/>
-              <a:t>두 숫자를 계산해 답 하나를 내는</a:t>
-            </a:r>
-            <a:r>
-              <a:rPr lang="en-US" altLang="ko-KR" sz="800" dirty="0"/>
-              <a:t>’ </a:t>
-            </a:r>
-            <a:r>
-              <a:rPr lang="ko-KR" altLang="en-US" sz="800" dirty="0"/>
-              <a:t>단순한 문제에 머물러 있다</a:t>
+              <a:t>지금까지의 연구는 대부분 두 숫자를 계산해 답 하나를 내는 문제에 머물러 있다</a:t>
             </a:r>
             <a:r>
               <a:rPr lang="en-US" altLang="ko-KR" sz="800" dirty="0"/>
@@ -4085,7 +4069,7 @@
         </p:nvSpPr>
         <p:spPr>
           <a:xfrm>
-            <a:off x="4937760" y="1946566"/>
+            <a:off x="4937344" y="1926661"/>
             <a:ext cx="1536192" cy="898323"/>
           </a:xfrm>
           <a:prstGeom prst="rect">
@@ -4263,8 +4247,8 @@
         </p:nvSpPr>
         <p:spPr>
           <a:xfrm>
-            <a:off x="502920" y="3347593"/>
-            <a:ext cx="2788920" cy="5264912"/>
+            <a:off x="502920" y="3361038"/>
+            <a:ext cx="2847308" cy="5441607"/>
           </a:xfrm>
           <a:prstGeom prst="rect">
             <a:avLst/>
@@ -4315,7 +4299,7 @@
               </a:rPr>
               <a:t>?</a:t>
             </a:r>
-            <a:endParaRPr lang="en-US" altLang="ko-KR" dirty="0"/>
+            <a:endParaRPr lang="en-US" altLang="ko-KR" sz="900" dirty="0"/>
           </a:p>
           <a:p>
             <a:pPr>
@@ -4331,7 +4315,21 @@
                 <a:latin typeface="맑은 고딕"/>
                 <a:ea typeface="맑은 고딕"/>
               </a:rPr>
-              <a:t>신경망은 일반적으로 훈련 데이터를 먼저 암기하는 상태에 도달하며</a:t>
+              <a:t>신경망은 일반적으로 </a:t>
+            </a:r>
+            <a:r>
+              <a:rPr lang="ko-KR" altLang="en-US" sz="750" dirty="0" err="1">
+                <a:latin typeface="맑은 고딕"/>
+                <a:ea typeface="맑은 고딕"/>
+              </a:rPr>
+              <a:t>과적합</a:t>
+            </a:r>
+            <a:r>
+              <a:rPr lang="ko-KR" altLang="en-US" sz="750" dirty="0">
+                <a:latin typeface="맑은 고딕"/>
+                <a:ea typeface="맑은 고딕"/>
+              </a:rPr>
+              <a:t> 상태에 도달하며</a:t>
             </a:r>
             <a:r>
               <a:rPr lang="en-US" altLang="ko-KR" sz="750" dirty="0">
@@ -4420,7 +4418,7 @@
                 <a:spcPts val="600"/>
               </a:spcAft>
             </a:pPr>
-            <a:endParaRPr lang="en-US" altLang="ko-KR" sz="650" dirty="0">
+            <a:endParaRPr lang="en-US" altLang="ko-KR" sz="600" dirty="0">
               <a:latin typeface="맑은 고딕"/>
               <a:ea typeface="맑은 고딕"/>
             </a:endParaRPr>
@@ -4434,7 +4432,7 @@
                 <a:spcPts val="600"/>
               </a:spcAft>
             </a:pPr>
-            <a:endParaRPr lang="en-US" altLang="ko-KR" sz="550" dirty="0">
+            <a:endParaRPr lang="en-US" altLang="ko-KR" sz="600" dirty="0">
               <a:latin typeface="맑은 고딕"/>
               <a:ea typeface="맑은 고딕"/>
             </a:endParaRPr>
@@ -4448,7 +4446,7 @@
                 <a:spcPts val="600"/>
               </a:spcAft>
             </a:pPr>
-            <a:endParaRPr lang="en-US" altLang="ko-KR" sz="550" dirty="0">
+            <a:endParaRPr lang="en-US" altLang="ko-KR" sz="600" dirty="0">
               <a:latin typeface="맑은 고딕"/>
               <a:ea typeface="맑은 고딕"/>
             </a:endParaRPr>
@@ -4462,7 +4460,7 @@
                 <a:spcPts val="600"/>
               </a:spcAft>
             </a:pPr>
-            <a:endParaRPr lang="en-US" altLang="ko-KR" sz="550" dirty="0">
+            <a:endParaRPr lang="en-US" altLang="ko-KR" sz="600" dirty="0">
               <a:latin typeface="맑은 고딕"/>
               <a:ea typeface="맑은 고딕"/>
             </a:endParaRPr>
@@ -4476,7 +4474,7 @@
                 <a:spcPts val="600"/>
               </a:spcAft>
             </a:pPr>
-            <a:endParaRPr lang="en-US" altLang="ko-KR" sz="550" dirty="0">
+            <a:endParaRPr lang="en-US" altLang="ko-KR" sz="600" dirty="0">
               <a:latin typeface="맑은 고딕"/>
               <a:ea typeface="맑은 고딕"/>
             </a:endParaRPr>
@@ -4490,7 +4488,10 @@
                 <a:spcPts val="600"/>
               </a:spcAft>
             </a:pPr>
-            <a:endParaRPr lang="en-US" altLang="ko-KR" sz="550" dirty="0"/>
+            <a:endParaRPr lang="en-US" altLang="ko-KR" sz="300" dirty="0">
+              <a:latin typeface="맑은 고딕"/>
+              <a:ea typeface="맑은 고딕"/>
+            </a:endParaRPr>
           </a:p>
           <a:p>
             <a:pPr algn="r">
@@ -4503,7 +4504,7 @@
             </a:pPr>
             <a:r>
               <a:rPr lang="ko-KR" altLang="ko-KR" sz="500" dirty="0"/>
-              <a:t>출처: Google PAIR, "</a:t>
+              <a:t>Google PAIR, "</a:t>
             </a:r>
             <a:r>
               <a:rPr lang="ko-KR" altLang="ko-KR" sz="500" dirty="0" err="1"/>
@@ -4561,9 +4562,26 @@
               <a:rPr lang="ko-KR" altLang="ko-KR" sz="500" dirty="0"/>
               <a:t>?" (2023)</a:t>
             </a:r>
-            <a:endParaRPr lang="ko-KR" altLang="en-US" sz="500" dirty="0">
+            <a:endParaRPr lang="en-US" altLang="ko-KR" sz="500" dirty="0">
               <a:solidFill>
                 <a:srgbClr val="555F6E"/>
+              </a:solidFill>
+              <a:latin typeface="맑은 고딕"/>
+              <a:ea typeface="맑은 고딕"/>
+            </a:endParaRPr>
+          </a:p>
+          <a:p>
+            <a:pPr algn="r">
+              <a:lnSpc>
+                <a:spcPct val="120000"/>
+              </a:lnSpc>
+              <a:spcAft>
+                <a:spcPts val="1400"/>
+              </a:spcAft>
+            </a:pPr>
+            <a:endParaRPr lang="en-US" altLang="ko-KR" sz="900" b="1" dirty="0">
+              <a:solidFill>
+                <a:srgbClr val="1E2761"/>
               </a:solidFill>
               <a:latin typeface="맑은 고딕"/>
               <a:ea typeface="맑은 고딕"/>
@@ -4578,6 +4596,57 @@
                 <a:spcPts val="300"/>
               </a:spcAft>
             </a:pPr>
+            <a:endParaRPr lang="en-US" altLang="ko-KR" sz="900" b="1" dirty="0">
+              <a:solidFill>
+                <a:srgbClr val="1E2761"/>
+              </a:solidFill>
+              <a:latin typeface="맑은 고딕"/>
+              <a:ea typeface="맑은 고딕"/>
+            </a:endParaRPr>
+          </a:p>
+          <a:p>
+            <a:pPr algn="l">
+              <a:lnSpc>
+                <a:spcPct val="120000"/>
+              </a:lnSpc>
+              <a:spcAft>
+                <a:spcPts val="300"/>
+              </a:spcAft>
+            </a:pPr>
+            <a:endParaRPr lang="en-US" altLang="ko-KR" sz="900" b="1" dirty="0">
+              <a:solidFill>
+                <a:srgbClr val="1E2761"/>
+              </a:solidFill>
+              <a:latin typeface="맑은 고딕"/>
+              <a:ea typeface="맑은 고딕"/>
+            </a:endParaRPr>
+          </a:p>
+          <a:p>
+            <a:pPr algn="l">
+              <a:lnSpc>
+                <a:spcPct val="120000"/>
+              </a:lnSpc>
+              <a:spcAft>
+                <a:spcPts val="300"/>
+              </a:spcAft>
+            </a:pPr>
+            <a:endParaRPr lang="en-US" altLang="ko-KR" sz="900" b="1" dirty="0">
+              <a:solidFill>
+                <a:srgbClr val="1E2761"/>
+              </a:solidFill>
+              <a:latin typeface="맑은 고딕"/>
+              <a:ea typeface="맑은 고딕"/>
+            </a:endParaRPr>
+          </a:p>
+          <a:p>
+            <a:pPr algn="l">
+              <a:lnSpc>
+                <a:spcPct val="120000"/>
+              </a:lnSpc>
+              <a:spcAft>
+                <a:spcPts val="300"/>
+              </a:spcAft>
+            </a:pPr>
             <a:r>
               <a:rPr lang="en-US" altLang="ko-KR" sz="900" b="1" dirty="0">
                 <a:solidFill>
@@ -4641,7 +4710,7 @@
             </a:r>
             <a:r>
               <a:rPr lang="ko-KR" altLang="en-US" sz="750" dirty="0"/>
-              <a:t>와 같이 출력 전체가 수열인 과제에서 </a:t>
+              <a:t>와 같이 입출력 전체가 수열인 과제에서 </a:t>
             </a:r>
             <a:r>
               <a:rPr lang="en" altLang="ko-KR" sz="750" dirty="0"/>
@@ -4657,7 +4726,7 @@
             </a:r>
             <a:r>
               <a:rPr lang="ko-KR" altLang="en-US" sz="750" dirty="0"/>
-              <a:t>수열 정렬은 원소 간 비교와 자리 배치라는 성격을 띄기에</a:t>
+              <a:t>수열 정렬은 원소 간 비교와 자리 배치라는 성격을 가지기에</a:t>
             </a:r>
             <a:r>
               <a:rPr lang="en-US" altLang="ko-KR" sz="750" dirty="0"/>
@@ -4665,7 +4734,7 @@
             </a:r>
             <a:r>
               <a:rPr lang="ko-KR" altLang="en-US" sz="750" dirty="0"/>
-              <a:t>출력 수열 전체에 걸쳐 일관성이 유지되어야 하므로 단일 답 예측과는 본질적으로 다르게 볼 수 있다</a:t>
+              <a:t>출력 수열 전체에 걸쳐 일관성이 유지되어야 하므로 단일 답 예측과는 본질적으로 다르다</a:t>
             </a:r>
             <a:r>
               <a:rPr lang="en-US" altLang="ko-KR" sz="750" dirty="0"/>
@@ -4673,7 +4742,15 @@
             </a:r>
             <a:r>
               <a:rPr lang="ko-KR" altLang="en-US" sz="750" dirty="0"/>
-              <a:t>즉</a:t>
+              <a:t>본 연구에서는 정렬 과제를 대상으로 </a:t>
+            </a:r>
+            <a:r>
+              <a:rPr lang="en" altLang="ko-KR" sz="750" dirty="0"/>
+              <a:t>Grokking</a:t>
+            </a:r>
+            <a:r>
+              <a:rPr lang="ko-KR" altLang="en-US" sz="750" dirty="0"/>
+              <a:t>의 발현 여부를 검증하고</a:t>
             </a:r>
             <a:r>
               <a:rPr lang="en-US" altLang="ko-KR" sz="750" dirty="0"/>
@@ -4681,27 +4758,139 @@
             </a:r>
             <a:r>
               <a:rPr lang="ko-KR" altLang="en-US" sz="750" dirty="0"/>
-              <a:t>본 연구에서는 정렬 과제를 대상으로 </a:t>
-            </a:r>
-            <a:r>
-              <a:rPr lang="en" altLang="ko-KR" sz="750" dirty="0"/>
-              <a:t>Grokking</a:t>
-            </a:r>
-            <a:r>
-              <a:rPr lang="ko-KR" altLang="en-US" sz="750" dirty="0"/>
-              <a:t>의 발현 여부를 검증하고</a:t>
-            </a:r>
-            <a:r>
-              <a:rPr lang="en-US" altLang="ko-KR" sz="750" dirty="0"/>
-              <a:t>, </a:t>
-            </a:r>
-            <a:r>
-              <a:rPr lang="ko-KR" altLang="en-US" sz="750" dirty="0"/>
               <a:t>그 내부 구조를 분석하는 것을 목표로 한다</a:t>
             </a:r>
             <a:r>
               <a:rPr lang="en-US" altLang="ko-KR" sz="750" dirty="0"/>
               <a:t>.</a:t>
+            </a:r>
+          </a:p>
+          <a:p>
+            <a:pPr>
+              <a:lnSpc>
+                <a:spcPct val="120000"/>
+              </a:lnSpc>
+              <a:spcAft>
+                <a:spcPts val="300"/>
+              </a:spcAft>
+            </a:pPr>
+            <a:endParaRPr lang="en-US" altLang="ko-KR" sz="400" dirty="0"/>
+          </a:p>
+          <a:p>
+            <a:pPr>
+              <a:lnSpc>
+                <a:spcPct val="120000"/>
+              </a:lnSpc>
+              <a:spcAft>
+                <a:spcPts val="300"/>
+              </a:spcAft>
+            </a:pPr>
+            <a:r>
+              <a:rPr lang="en-US" altLang="ko-KR" sz="900" b="1" dirty="0">
+                <a:solidFill>
+                  <a:srgbClr val="1E2761"/>
+                </a:solidFill>
+                <a:latin typeface="맑은 고딕"/>
+                <a:ea typeface="맑은 고딕"/>
+              </a:rPr>
+              <a:t>③ </a:t>
+            </a:r>
+            <a:r>
+              <a:rPr lang="ko-KR" altLang="en-US" sz="900" b="1" dirty="0">
+                <a:solidFill>
+                  <a:srgbClr val="1E2761"/>
+                </a:solidFill>
+                <a:latin typeface="맑은 고딕"/>
+                <a:ea typeface="맑은 고딕"/>
+              </a:rPr>
+              <a:t>연구문제</a:t>
+            </a:r>
+          </a:p>
+          <a:p>
+            <a:pPr>
+              <a:lnSpc>
+                <a:spcPct val="120000"/>
+              </a:lnSpc>
+              <a:spcAft>
+                <a:spcPts val="300"/>
+              </a:spcAft>
+            </a:pPr>
+            <a:r>
+              <a:rPr lang="en-US" altLang="ko-KR" sz="750" b="1" dirty="0">
+                <a:latin typeface="맑은 고딕"/>
+                <a:ea typeface="맑은 고딕"/>
+              </a:rPr>
+              <a:t>[</a:t>
+            </a:r>
+            <a:r>
+              <a:rPr lang="ko-KR" altLang="en-US" sz="750" b="1" dirty="0">
+                <a:latin typeface="맑은 고딕"/>
+                <a:ea typeface="맑은 고딕"/>
+              </a:rPr>
+              <a:t>연구 문제 </a:t>
+            </a:r>
+            <a:r>
+              <a:rPr lang="en-US" altLang="ko-KR" sz="750" b="1" dirty="0">
+                <a:latin typeface="맑은 고딕"/>
+                <a:ea typeface="맑은 고딕"/>
+              </a:rPr>
+              <a:t>1]</a:t>
+            </a:r>
+            <a:r>
+              <a:rPr lang="ko-KR" altLang="en-US" sz="750" dirty="0">
+                <a:latin typeface="맑은 고딕"/>
+                <a:ea typeface="맑은 고딕"/>
+              </a:rPr>
+              <a:t> 정렬 과제에서 </a:t>
+            </a:r>
+            <a:r>
+              <a:rPr lang="en-US" altLang="ko-KR" sz="750" dirty="0">
+                <a:latin typeface="맑은 고딕"/>
+                <a:ea typeface="맑은 고딕"/>
+              </a:rPr>
+              <a:t>Grokking</a:t>
+            </a:r>
+            <a:r>
+              <a:rPr lang="ko-KR" altLang="en-US" sz="750" dirty="0">
+                <a:latin typeface="맑은 고딕"/>
+                <a:ea typeface="맑은 고딕"/>
+              </a:rPr>
+              <a:t>이 발현되는가</a:t>
+            </a:r>
+            <a:r>
+              <a:rPr lang="en-US" altLang="ko-KR" sz="750" dirty="0">
+                <a:latin typeface="맑은 고딕"/>
+                <a:ea typeface="맑은 고딕"/>
+              </a:rPr>
+              <a:t>? </a:t>
+            </a:r>
+            <a:r>
+              <a:rPr lang="ko-KR" altLang="en-US" sz="750" dirty="0">
+                <a:latin typeface="맑은 고딕"/>
+                <a:ea typeface="맑은 고딕"/>
+              </a:rPr>
+              <a:t>정렬 규칙의 구조가 </a:t>
+            </a:r>
+            <a:r>
+              <a:rPr lang="ko-KR" altLang="en-US" sz="750" dirty="0" err="1">
+                <a:latin typeface="맑은 고딕"/>
+                <a:ea typeface="맑은 고딕"/>
+              </a:rPr>
+              <a:t>복잡해질수록</a:t>
+            </a:r>
+            <a:r>
+              <a:rPr lang="ko-KR" altLang="en-US" sz="750" dirty="0">
+                <a:latin typeface="맑은 고딕"/>
+                <a:ea typeface="맑은 고딕"/>
+              </a:rPr>
+              <a:t> 발현 여부와 발현 시점이 어떻게 달라지는가</a:t>
+            </a:r>
+            <a:r>
+              <a:rPr lang="en-US" altLang="ko-KR" sz="750" dirty="0">
+                <a:latin typeface="맑은 고딕"/>
+                <a:ea typeface="맑은 고딕"/>
+              </a:rPr>
+              <a:t>?</a:t>
             </a:r>
           </a:p>
           <a:p>
@@ -4714,266 +4903,6 @@
               </a:spcAft>
             </a:pPr>
             <a:endParaRPr lang="en-US" altLang="ko-KR" sz="800" dirty="0"/>
-          </a:p>
-          <a:p>
-            <a:pPr>
-              <a:lnSpc>
-                <a:spcPct val="120000"/>
-              </a:lnSpc>
-              <a:spcAft>
-                <a:spcPts val="300"/>
-              </a:spcAft>
-            </a:pPr>
-            <a:r>
-              <a:rPr lang="en-US" altLang="ko-KR" sz="900" b="1" dirty="0">
-                <a:solidFill>
-                  <a:srgbClr val="1E2761"/>
-                </a:solidFill>
-                <a:latin typeface="맑은 고딕"/>
-                <a:ea typeface="맑은 고딕"/>
-              </a:rPr>
-              <a:t>③ </a:t>
-            </a:r>
-            <a:r>
-              <a:rPr lang="ko-KR" altLang="en-US" sz="900" b="1" dirty="0">
-                <a:solidFill>
-                  <a:srgbClr val="1E2761"/>
-                </a:solidFill>
-                <a:latin typeface="맑은 고딕"/>
-                <a:ea typeface="맑은 고딕"/>
-              </a:rPr>
-              <a:t>연구문제</a:t>
-            </a:r>
-            <a:endParaRPr lang="en-US" altLang="ko-KR" sz="900" b="1" dirty="0">
-              <a:solidFill>
-                <a:srgbClr val="1E2761"/>
-              </a:solidFill>
-              <a:latin typeface="맑은 고딕"/>
-              <a:ea typeface="맑은 고딕"/>
-            </a:endParaRPr>
-          </a:p>
-          <a:p>
-            <a:pPr>
-              <a:lnSpc>
-                <a:spcPct val="120000"/>
-              </a:lnSpc>
-              <a:spcAft>
-                <a:spcPts val="300"/>
-              </a:spcAft>
-            </a:pPr>
-            <a:r>
-              <a:rPr lang="en-US" altLang="ko-KR" sz="750" b="1" dirty="0">
-                <a:latin typeface="맑은 고딕"/>
-                <a:ea typeface="맑은 고딕"/>
-              </a:rPr>
-              <a:t>[</a:t>
-            </a:r>
-            <a:r>
-              <a:rPr lang="ko-KR" altLang="en-US" sz="750" b="1" dirty="0">
-                <a:latin typeface="맑은 고딕"/>
-                <a:ea typeface="맑은 고딕"/>
-              </a:rPr>
-              <a:t>연구 문제 </a:t>
-            </a:r>
-            <a:r>
-              <a:rPr lang="en-US" altLang="ko-KR" sz="750" b="1" dirty="0">
-                <a:latin typeface="맑은 고딕"/>
-                <a:ea typeface="맑은 고딕"/>
-              </a:rPr>
-              <a:t>1]</a:t>
-            </a:r>
-            <a:r>
-              <a:rPr lang="en-US" altLang="ko-KR" sz="750" dirty="0">
-                <a:latin typeface="맑은 고딕"/>
-                <a:ea typeface="맑은 고딕"/>
-              </a:rPr>
-              <a:t> </a:t>
-            </a:r>
-            <a:r>
-              <a:rPr lang="ko-KR" altLang="en-US" sz="750" dirty="0">
-                <a:latin typeface="맑은 고딕"/>
-                <a:ea typeface="맑은 고딕"/>
-              </a:rPr>
-              <a:t>정렬 과제에서 </a:t>
-            </a:r>
-            <a:r>
-              <a:rPr lang="en" sz="750" dirty="0">
-                <a:latin typeface="맑은 고딕"/>
-                <a:ea typeface="맑은 고딕"/>
-              </a:rPr>
-              <a:t>Grokking</a:t>
-            </a:r>
-            <a:r>
-              <a:rPr lang="ko-KR" altLang="en-US" sz="750" dirty="0">
-                <a:latin typeface="맑은 고딕"/>
-                <a:ea typeface="맑은 고딕"/>
-              </a:rPr>
-              <a:t>이 발현되는가</a:t>
-            </a:r>
-            <a:r>
-              <a:rPr lang="en-US" altLang="ko-KR" sz="750" dirty="0">
-                <a:latin typeface="맑은 고딕"/>
-                <a:ea typeface="맑은 고딕"/>
-              </a:rPr>
-              <a:t>? </a:t>
-            </a:r>
-            <a:r>
-              <a:rPr lang="ko-KR" altLang="en-US" sz="750" dirty="0">
-                <a:latin typeface="맑은 고딕"/>
-                <a:ea typeface="맑은 고딕"/>
-              </a:rPr>
-              <a:t>정렬 규칙의 구조가 </a:t>
-            </a:r>
-            <a:r>
-              <a:rPr lang="ko-KR" altLang="en-US" sz="750" dirty="0" err="1">
-                <a:latin typeface="맑은 고딕"/>
-                <a:ea typeface="맑은 고딕"/>
-              </a:rPr>
-              <a:t>복잡해질수록</a:t>
-            </a:r>
-            <a:r>
-              <a:rPr lang="ko-KR" altLang="en-US" sz="750" dirty="0">
-                <a:latin typeface="맑은 고딕"/>
-                <a:ea typeface="맑은 고딕"/>
-              </a:rPr>
-              <a:t> 발현 여부와 발현 시점이 어떻게 달라지는가</a:t>
-            </a:r>
-            <a:r>
-              <a:rPr lang="en-US" altLang="ko-KR" sz="750" dirty="0">
-                <a:latin typeface="맑은 고딕"/>
-                <a:ea typeface="맑은 고딕"/>
-              </a:rPr>
-              <a:t>?</a:t>
-            </a:r>
-          </a:p>
-          <a:p>
-            <a:pPr>
-              <a:lnSpc>
-                <a:spcPct val="120000"/>
-              </a:lnSpc>
-              <a:spcAft>
-                <a:spcPts val="300"/>
-              </a:spcAft>
-            </a:pPr>
-            <a:r>
-              <a:rPr lang="en-US" altLang="ko-KR" sz="750" b="1" dirty="0">
-                <a:latin typeface="맑은 고딕"/>
-                <a:ea typeface="맑은 고딕"/>
-              </a:rPr>
-              <a:t>[</a:t>
-            </a:r>
-            <a:r>
-              <a:rPr lang="ko-KR" altLang="en-US" sz="750" b="1" dirty="0">
-                <a:latin typeface="맑은 고딕"/>
-                <a:ea typeface="맑은 고딕"/>
-              </a:rPr>
-              <a:t>연구 문제 </a:t>
-            </a:r>
-            <a:r>
-              <a:rPr lang="en-US" altLang="ko-KR" sz="750" b="1" dirty="0">
-                <a:latin typeface="맑은 고딕"/>
-                <a:ea typeface="맑은 고딕"/>
-              </a:rPr>
-              <a:t>2] </a:t>
-            </a:r>
-            <a:r>
-              <a:rPr lang="en" sz="750" dirty="0">
-                <a:latin typeface="맑은 고딕"/>
-                <a:ea typeface="맑은 고딕"/>
-              </a:rPr>
-              <a:t>Grokking</a:t>
-            </a:r>
-            <a:r>
-              <a:rPr lang="ko-KR" altLang="en-US" sz="750" dirty="0">
-                <a:latin typeface="맑은 고딕"/>
-                <a:ea typeface="맑은 고딕"/>
-              </a:rPr>
-              <a:t>이 완료된 모델의 내부 표현은 어떤 구조를 가지는가</a:t>
-            </a:r>
-            <a:r>
-              <a:rPr lang="en-US" altLang="ko-KR" sz="750" dirty="0">
-                <a:latin typeface="맑은 고딕"/>
-                <a:ea typeface="맑은 고딕"/>
-              </a:rPr>
-              <a:t>?</a:t>
-            </a:r>
-          </a:p>
-          <a:p>
-            <a:pPr>
-              <a:lnSpc>
-                <a:spcPct val="120000"/>
-              </a:lnSpc>
-              <a:spcAft>
-                <a:spcPts val="300"/>
-              </a:spcAft>
-            </a:pPr>
-            <a:r>
-              <a:rPr lang="en-US" altLang="ko-KR" sz="750" b="1" dirty="0">
-                <a:latin typeface="맑은 고딕"/>
-                <a:ea typeface="맑은 고딕"/>
-              </a:rPr>
-              <a:t>[</a:t>
-            </a:r>
-            <a:r>
-              <a:rPr lang="ko-KR" altLang="en-US" sz="750" b="1" dirty="0">
-                <a:latin typeface="맑은 고딕"/>
-                <a:ea typeface="맑은 고딕"/>
-              </a:rPr>
-              <a:t>연구 문제 </a:t>
-            </a:r>
-            <a:r>
-              <a:rPr lang="en-US" altLang="ko-KR" sz="750" b="1" dirty="0">
-                <a:latin typeface="맑은 고딕"/>
-                <a:ea typeface="맑은 고딕"/>
-              </a:rPr>
-              <a:t>3] </a:t>
-            </a:r>
-            <a:r>
-              <a:rPr lang="ko-KR" altLang="en-US" sz="750" dirty="0">
-                <a:latin typeface="맑은 고딕"/>
-                <a:ea typeface="맑은 고딕"/>
-              </a:rPr>
-              <a:t>값 정보를 담당하는 </a:t>
-            </a:r>
-            <a:r>
-              <a:rPr lang="en" sz="750" dirty="0">
-                <a:latin typeface="맑은 고딕"/>
-                <a:ea typeface="맑은 고딕"/>
-              </a:rPr>
-              <a:t>token embedding</a:t>
-            </a:r>
-            <a:r>
-              <a:rPr lang="ko-KR" altLang="en-US" sz="750" dirty="0">
-                <a:latin typeface="맑은 고딕"/>
-                <a:ea typeface="맑은 고딕"/>
-              </a:rPr>
-              <a:t>과 위치 정보를 담당하는 </a:t>
-            </a:r>
-            <a:r>
-              <a:rPr lang="en" sz="750" dirty="0">
-                <a:latin typeface="맑은 고딕"/>
-                <a:ea typeface="맑은 고딕"/>
-              </a:rPr>
-              <a:t>positional embedding</a:t>
-            </a:r>
-            <a:r>
-              <a:rPr lang="ko-KR" altLang="en-US" sz="750" dirty="0">
-                <a:latin typeface="맑은 고딕"/>
-                <a:ea typeface="맑은 고딕"/>
-              </a:rPr>
-              <a:t>은 일반화에 각각 어떤 기여를 하는가</a:t>
-            </a:r>
-            <a:r>
-              <a:rPr lang="en-US" altLang="ko-KR" sz="750" dirty="0">
-                <a:latin typeface="맑은 고딕"/>
-                <a:ea typeface="맑은 고딕"/>
-              </a:rPr>
-              <a:t>? </a:t>
-            </a:r>
-            <a:endParaRPr sz="750" b="0" dirty="0">
-              <a:latin typeface="맑은 고딕"/>
-              <a:ea typeface="맑은 고딕"/>
-            </a:endParaRPr>
           </a:p>
         </p:txBody>
       </p:sp>
@@ -4985,8 +4914,8 @@
         </p:nvSpPr>
         <p:spPr>
           <a:xfrm>
-            <a:off x="3566160" y="3401568"/>
-            <a:ext cx="2834640" cy="2215991"/>
+            <a:off x="3540243" y="3399773"/>
+            <a:ext cx="2894203" cy="5363007"/>
           </a:xfrm>
           <a:prstGeom prst="rect">
             <a:avLst/>
@@ -5000,121 +4929,140 @@
           <a:lstStyle/>
           <a:p>
             <a:pPr>
+              <a:lnSpc>
+                <a:spcPct val="120000"/>
+              </a:lnSpc>
               <a:spcAft>
                 <a:spcPts val="300"/>
               </a:spcAft>
             </a:pPr>
             <a:r>
-              <a:rPr lang="en-US" altLang="ko-KR" sz="900" b="1" dirty="0">
-                <a:solidFill>
-                  <a:srgbClr val="1E2761"/>
-                </a:solidFill>
-                <a:latin typeface="맑은 고딕"/>
-                <a:ea typeface="맑은 고딕"/>
-              </a:rPr>
-              <a:t>④</a:t>
-            </a:r>
-            <a:r>
-              <a:rPr sz="900" b="1" dirty="0">
-                <a:solidFill>
-                  <a:srgbClr val="1E2761"/>
-                </a:solidFill>
-                <a:latin typeface="맑은 고딕"/>
-                <a:ea typeface="맑은 고딕"/>
-              </a:rPr>
-              <a:t> </a:t>
-            </a:r>
-            <a:r>
-              <a:rPr lang="ko-KR" altLang="en-US" sz="900" b="1" dirty="0">
-                <a:solidFill>
-                  <a:srgbClr val="1E2761"/>
-                </a:solidFill>
-                <a:latin typeface="맑은 고딕"/>
-                <a:ea typeface="맑은 고딕"/>
-              </a:rPr>
-              <a:t>실험설계 </a:t>
-            </a:r>
-            <a:r>
-              <a:rPr sz="900" b="1" dirty="0">
-                <a:solidFill>
-                  <a:srgbClr val="1E2761"/>
-                </a:solidFill>
-                <a:latin typeface="맑은 고딕"/>
-                <a:ea typeface="맑은 고딕"/>
-              </a:rPr>
-              <a:t>— </a:t>
-            </a:r>
-            <a:r>
-              <a:rPr sz="900" b="1" dirty="0" err="1">
-                <a:solidFill>
-                  <a:srgbClr val="1E2761"/>
-                </a:solidFill>
-                <a:latin typeface="맑은 고딕"/>
-                <a:ea typeface="맑은 고딕"/>
-              </a:rPr>
-              <a:t>세</a:t>
-            </a:r>
-            <a:r>
-              <a:rPr sz="900" b="1" dirty="0">
-                <a:solidFill>
-                  <a:srgbClr val="1E2761"/>
-                </a:solidFill>
-                <a:latin typeface="맑은 고딕"/>
-                <a:ea typeface="맑은 고딕"/>
-              </a:rPr>
-              <a:t> </a:t>
-            </a:r>
-            <a:r>
-              <a:rPr sz="900" b="1" dirty="0" err="1">
-                <a:solidFill>
-                  <a:srgbClr val="1E2761"/>
-                </a:solidFill>
-                <a:latin typeface="맑은 고딕"/>
-                <a:ea typeface="맑은 고딕"/>
-              </a:rPr>
-              <a:t>가지</a:t>
-            </a:r>
-            <a:r>
-              <a:rPr sz="900" b="1" dirty="0">
-                <a:solidFill>
-                  <a:srgbClr val="1E2761"/>
-                </a:solidFill>
-                <a:latin typeface="맑은 고딕"/>
-                <a:ea typeface="맑은 고딕"/>
-              </a:rPr>
-              <a:t> </a:t>
-            </a:r>
-            <a:r>
-              <a:rPr sz="900" b="1" dirty="0" err="1">
-                <a:solidFill>
-                  <a:srgbClr val="1E2761"/>
-                </a:solidFill>
-                <a:latin typeface="맑은 고딕"/>
-                <a:ea typeface="맑은 고딕"/>
-              </a:rPr>
-              <a:t>정렬</a:t>
-            </a:r>
-            <a:r>
-              <a:rPr sz="900" b="1" dirty="0">
-                <a:solidFill>
-                  <a:srgbClr val="1E2761"/>
-                </a:solidFill>
-                <a:latin typeface="맑은 고딕"/>
-                <a:ea typeface="맑은 고딕"/>
-              </a:rPr>
-              <a:t> </a:t>
-            </a:r>
-            <a:r>
-              <a:rPr lang="ko-KR" altLang="en-US" sz="900" b="1" dirty="0">
-                <a:solidFill>
-                  <a:srgbClr val="1E2761"/>
-                </a:solidFill>
-                <a:latin typeface="맑은 고딕"/>
-                <a:ea typeface="맑은 고딕"/>
-              </a:rPr>
-              <a:t>기준</a:t>
-            </a:r>
-            <a:endParaRPr lang="en-US" sz="900" b="1" dirty="0">
+              <a:rPr lang="en-US" altLang="ko-KR" sz="750" b="1" dirty="0">
+                <a:latin typeface="맑은 고딕"/>
+                <a:ea typeface="맑은 고딕"/>
+              </a:rPr>
+              <a:t>[</a:t>
+            </a:r>
+            <a:r>
+              <a:rPr lang="ko-KR" altLang="en-US" sz="750" b="1" dirty="0">
+                <a:latin typeface="맑은 고딕"/>
+                <a:ea typeface="맑은 고딕"/>
+              </a:rPr>
+              <a:t>연구 문제 </a:t>
+            </a:r>
+            <a:r>
+              <a:rPr lang="en-US" altLang="ko-KR" sz="750" b="1" dirty="0">
+                <a:latin typeface="맑은 고딕"/>
+                <a:ea typeface="맑은 고딕"/>
+              </a:rPr>
+              <a:t>2] </a:t>
+            </a:r>
+            <a:r>
+              <a:rPr lang="en-US" altLang="ko-KR" sz="750" dirty="0">
+                <a:latin typeface="맑은 고딕"/>
+                <a:ea typeface="맑은 고딕"/>
+              </a:rPr>
+              <a:t>Grokking</a:t>
+            </a:r>
+            <a:r>
+              <a:rPr lang="ko-KR" altLang="en-US" sz="750" dirty="0">
+                <a:latin typeface="맑은 고딕"/>
+                <a:ea typeface="맑은 고딕"/>
+              </a:rPr>
+              <a:t>이 완료된 모델의 내부 표현은 어떤 구조를 가지는가</a:t>
+            </a:r>
+            <a:r>
+              <a:rPr lang="en-US" altLang="ko-KR" sz="750" dirty="0">
+                <a:latin typeface="맑은 고딕"/>
+                <a:ea typeface="맑은 고딕"/>
+              </a:rPr>
+              <a:t>?</a:t>
+            </a:r>
+          </a:p>
+          <a:p>
+            <a:pPr>
+              <a:lnSpc>
+                <a:spcPct val="120000"/>
+              </a:lnSpc>
+              <a:spcAft>
+                <a:spcPts val="300"/>
+              </a:spcAft>
+            </a:pPr>
+            <a:r>
+              <a:rPr lang="en-US" altLang="ko-KR" sz="750" b="1" dirty="0">
+                <a:latin typeface="맑은 고딕"/>
+                <a:ea typeface="맑은 고딕"/>
+              </a:rPr>
+              <a:t>[</a:t>
+            </a:r>
+            <a:r>
+              <a:rPr lang="ko-KR" altLang="en-US" sz="750" b="1" dirty="0">
+                <a:latin typeface="맑은 고딕"/>
+                <a:ea typeface="맑은 고딕"/>
+              </a:rPr>
+              <a:t>연구 문제 </a:t>
+            </a:r>
+            <a:r>
+              <a:rPr lang="en-US" altLang="ko-KR" sz="750" b="1" dirty="0">
+                <a:latin typeface="맑은 고딕"/>
+                <a:ea typeface="맑은 고딕"/>
+              </a:rPr>
+              <a:t>3] </a:t>
+            </a:r>
+            <a:r>
+              <a:rPr lang="ko-KR" altLang="en-US" sz="750" dirty="0">
+                <a:latin typeface="맑은 고딕"/>
+                <a:ea typeface="맑은 고딕"/>
+              </a:rPr>
+              <a:t>값 정보를 담당하는 </a:t>
+            </a:r>
+            <a:r>
+              <a:rPr lang="en-US" altLang="ko-KR" sz="750" dirty="0">
+                <a:latin typeface="맑은 고딕"/>
+                <a:ea typeface="맑은 고딕"/>
+              </a:rPr>
+              <a:t>token embedding</a:t>
+            </a:r>
+            <a:r>
+              <a:rPr lang="ko-KR" altLang="en-US" sz="750" dirty="0">
+                <a:latin typeface="맑은 고딕"/>
+                <a:ea typeface="맑은 고딕"/>
+              </a:rPr>
+              <a:t>과 위치 정보를 담당하는 </a:t>
+            </a:r>
+            <a:r>
+              <a:rPr lang="en-US" altLang="ko-KR" sz="750" dirty="0">
+                <a:latin typeface="맑은 고딕"/>
+                <a:ea typeface="맑은 고딕"/>
+              </a:rPr>
+              <a:t>positional embedding</a:t>
+            </a:r>
+            <a:r>
+              <a:rPr lang="ko-KR" altLang="en-US" sz="750" dirty="0">
+                <a:latin typeface="맑은 고딕"/>
+                <a:ea typeface="맑은 고딕"/>
+              </a:rPr>
+              <a:t>은 일반화에 각각 어떤 기여를 하는가</a:t>
+            </a:r>
+            <a:r>
+              <a:rPr lang="en-US" altLang="ko-KR" sz="750" dirty="0">
+                <a:latin typeface="맑은 고딕"/>
+                <a:ea typeface="맑은 고딕"/>
+              </a:rPr>
+              <a:t>? </a:t>
+            </a:r>
+            <a:endParaRPr lang="ko-KR" altLang="en-US" sz="750" dirty="0">
+              <a:latin typeface="맑은 고딕"/>
+              <a:ea typeface="맑은 고딕"/>
+            </a:endParaRPr>
+          </a:p>
+          <a:p>
+            <a:pPr>
+              <a:spcAft>
+                <a:spcPts val="300"/>
+              </a:spcAft>
+            </a:pPr>
+            <a:endParaRPr lang="en-US" altLang="ko-KR" sz="100" b="1" dirty="0">
               <a:solidFill>
                 <a:srgbClr val="1E2761"/>
               </a:solidFill>
@@ -5129,209 +5077,35 @@
               </a:spcAft>
             </a:pPr>
             <a:r>
-              <a:rPr lang="ko-KR" altLang="en-US" sz="800" dirty="0"/>
-              <a:t>서로 독립적인 두 축으로 정렬한다</a:t>
-            </a:r>
-            <a:r>
-              <a:rPr lang="en-US" altLang="ko-KR" sz="800" dirty="0"/>
-              <a:t>.</a:t>
-            </a:r>
-          </a:p>
-          <a:p>
-            <a:pPr>
-              <a:spcAft>
-                <a:spcPts val="300"/>
-              </a:spcAft>
-            </a:pPr>
-            <a:r>
-              <a:rPr lang="ko-KR" altLang="en-US" sz="800" b="1" dirty="0">
-                <a:latin typeface="맑은 고딕"/>
-                <a:ea typeface="맑은 고딕"/>
-              </a:rPr>
-              <a:t>정렬 키 축</a:t>
-            </a:r>
-            <a:r>
-              <a:rPr lang="ko-KR" altLang="en-US" sz="800" dirty="0">
+              <a:rPr lang="en-US" altLang="ko-KR" sz="900" b="1" dirty="0">
+                <a:solidFill>
+                  <a:srgbClr val="1E2761"/>
+                </a:solidFill>
+                <a:latin typeface="맑은 고딕"/>
+                <a:ea typeface="맑은 고딕"/>
+              </a:rPr>
+              <a:t>④</a:t>
+            </a:r>
+            <a:r>
+              <a:rPr sz="900" b="1" dirty="0">
+                <a:solidFill>
+                  <a:srgbClr val="1E2761"/>
+                </a:solidFill>
                 <a:latin typeface="맑은 고딕"/>
                 <a:ea typeface="맑은 고딕"/>
               </a:rPr>
               <a:t> </a:t>
             </a:r>
             <a:r>
-              <a:rPr lang="en-US" altLang="ko-KR" sz="800" dirty="0">
-                <a:latin typeface="맑은 고딕"/>
-                <a:ea typeface="맑은 고딕"/>
-              </a:rPr>
-              <a:t>-</a:t>
-            </a:r>
-            <a:r>
-              <a:rPr lang="ko-KR" altLang="en-US" sz="800" dirty="0">
-                <a:latin typeface="맑은 고딕"/>
-                <a:ea typeface="맑은 고딕"/>
-              </a:rPr>
-              <a:t> </a:t>
-            </a:r>
-            <a:r>
-              <a:rPr lang="ko-KR" altLang="en-US" sz="800" dirty="0" err="1">
-                <a:latin typeface="맑은 고딕"/>
-                <a:ea typeface="맑은 고딕"/>
-              </a:rPr>
-              <a:t>항등</a:t>
-            </a:r>
-            <a:r>
-              <a:rPr lang="en-US" altLang="ko-KR" sz="800" dirty="0">
-                <a:latin typeface="맑은 고딕"/>
-                <a:ea typeface="맑은 고딕"/>
-              </a:rPr>
-              <a:t>(</a:t>
-            </a:r>
-            <a:r>
-              <a:rPr lang="ko-KR" altLang="en-US" sz="800" dirty="0">
-                <a:latin typeface="맑은 고딕"/>
-                <a:ea typeface="맑은 고딕"/>
-              </a:rPr>
-              <a:t>오름차순</a:t>
-            </a:r>
-            <a:r>
-              <a:rPr lang="en-US" altLang="ko-KR" sz="800" dirty="0">
-                <a:latin typeface="맑은 고딕"/>
-                <a:ea typeface="맑은 고딕"/>
-              </a:rPr>
-              <a:t>) /</a:t>
-            </a:r>
-            <a:r>
-              <a:rPr lang="ko-KR" altLang="en-US" sz="800" dirty="0">
-                <a:latin typeface="맑은 고딕"/>
-                <a:ea typeface="맑은 고딕"/>
-              </a:rPr>
-              <a:t> 주기</a:t>
-            </a:r>
-            <a:r>
-              <a:rPr lang="en-US" altLang="ko-KR" sz="800" dirty="0">
-                <a:latin typeface="맑은 고딕"/>
-                <a:ea typeface="맑은 고딕"/>
-              </a:rPr>
-              <a:t>(mod</a:t>
-            </a:r>
-            <a:r>
-              <a:rPr lang="ko-KR" altLang="en-US" sz="800" dirty="0">
-                <a:latin typeface="맑은 고딕"/>
-                <a:ea typeface="맑은 고딕"/>
-              </a:rPr>
-              <a:t> 기반</a:t>
-            </a:r>
-            <a:r>
-              <a:rPr lang="en-US" altLang="ko-KR" sz="800" dirty="0">
-                <a:latin typeface="맑은 고딕"/>
-                <a:ea typeface="맑은 고딕"/>
-              </a:rPr>
-              <a:t>)</a:t>
-            </a:r>
-          </a:p>
-          <a:p>
-            <a:pPr>
-              <a:spcAft>
-                <a:spcPts val="300"/>
-              </a:spcAft>
-            </a:pPr>
-            <a:r>
-              <a:rPr lang="ko-KR" altLang="en-US" sz="800" b="1" dirty="0">
-                <a:latin typeface="맑은 고딕"/>
-                <a:ea typeface="맑은 고딕"/>
-              </a:rPr>
-              <a:t>매핑 축     </a:t>
-            </a:r>
-            <a:r>
-              <a:rPr lang="en-US" altLang="ko-KR" sz="800" dirty="0">
-                <a:latin typeface="맑은 고딕"/>
-                <a:ea typeface="맑은 고딕"/>
-              </a:rPr>
-              <a:t>-</a:t>
-            </a:r>
-            <a:r>
-              <a:rPr lang="ko-KR" altLang="en-US" sz="800" dirty="0">
-                <a:latin typeface="맑은 고딕"/>
-                <a:ea typeface="맑은 고딕"/>
-              </a:rPr>
-              <a:t> 단조</a:t>
-            </a:r>
-            <a:r>
-              <a:rPr lang="en-US" altLang="ko-KR" sz="800" dirty="0">
-                <a:latin typeface="맑은 고딕"/>
-                <a:ea typeface="맑은 고딕"/>
-              </a:rPr>
-              <a:t>(</a:t>
-            </a:r>
-            <a:r>
-              <a:rPr lang="ko-KR" altLang="en-US" sz="800" dirty="0">
-                <a:latin typeface="맑은 고딕"/>
-                <a:ea typeface="맑은 고딕"/>
-              </a:rPr>
-              <a:t>순서대로</a:t>
-            </a:r>
-            <a:r>
-              <a:rPr lang="en-US" altLang="ko-KR" sz="800" dirty="0">
-                <a:latin typeface="맑은 고딕"/>
-                <a:ea typeface="맑은 고딕"/>
-              </a:rPr>
-              <a:t>)</a:t>
-            </a:r>
-            <a:r>
-              <a:rPr lang="ko-KR" altLang="en-US" sz="800" dirty="0">
-                <a:latin typeface="맑은 고딕"/>
-                <a:ea typeface="맑은 고딕"/>
-              </a:rPr>
-              <a:t> </a:t>
-            </a:r>
-            <a:r>
-              <a:rPr lang="en-US" altLang="ko-KR" sz="800" dirty="0">
-                <a:latin typeface="맑은 고딕"/>
-                <a:ea typeface="맑은 고딕"/>
-              </a:rPr>
-              <a:t>/</a:t>
-            </a:r>
-            <a:r>
-              <a:rPr lang="ko-KR" altLang="en-US" sz="800" dirty="0">
-                <a:latin typeface="맑은 고딕"/>
-                <a:ea typeface="맑은 고딕"/>
-              </a:rPr>
-              <a:t> </a:t>
-            </a:r>
-            <a:r>
-              <a:rPr lang="ko-KR" altLang="en-US" sz="800" dirty="0" err="1">
-                <a:latin typeface="맑은 고딕"/>
-                <a:ea typeface="맑은 고딕"/>
-              </a:rPr>
-              <a:t>비단조</a:t>
-            </a:r>
-            <a:r>
-              <a:rPr lang="en-US" altLang="ko-KR" sz="800" dirty="0">
-                <a:latin typeface="맑은 고딕"/>
-                <a:ea typeface="맑은 고딕"/>
-              </a:rPr>
-              <a:t>(</a:t>
-            </a:r>
-            <a:r>
-              <a:rPr lang="ko-KR" altLang="en-US" sz="800" dirty="0">
-                <a:latin typeface="맑은 고딕"/>
-                <a:ea typeface="맑은 고딕"/>
-              </a:rPr>
-              <a:t>교번</a:t>
-            </a:r>
-            <a:r>
-              <a:rPr lang="en-US" altLang="ko-KR" sz="800" dirty="0">
-                <a:latin typeface="맑은 고딕"/>
-                <a:ea typeface="맑은 고딕"/>
-              </a:rPr>
-              <a:t>)</a:t>
-            </a:r>
-          </a:p>
-          <a:p>
-            <a:pPr>
-              <a:spcAft>
-                <a:spcPts val="300"/>
-              </a:spcAft>
-            </a:pPr>
+              <a:rPr lang="ko-KR" altLang="en-US" sz="900" b="1" dirty="0">
+                <a:solidFill>
+                  <a:srgbClr val="1E2761"/>
+                </a:solidFill>
+                <a:latin typeface="맑은 고딕"/>
+                <a:ea typeface="맑은 고딕"/>
+              </a:rPr>
+              <a:t>실험설계</a:t>
+            </a:r>
             <a:endParaRPr lang="en-US" altLang="ko-KR" sz="900" b="1" dirty="0">
               <a:solidFill>
                 <a:srgbClr val="1E2761"/>
@@ -5341,12 +5115,241 @@
             </a:endParaRPr>
           </a:p>
           <a:p>
+            <a:pPr>
+              <a:spcAft>
+                <a:spcPts val="300"/>
+              </a:spcAft>
+            </a:pPr>
+            <a:r>
+              <a:rPr lang="ko-KR" altLang="en-US" sz="750" dirty="0"/>
+              <a:t>서로 독립적인 두 축으로 정렬한다</a:t>
+            </a:r>
+            <a:r>
+              <a:rPr lang="en-US" altLang="ko-KR" sz="750" dirty="0"/>
+              <a:t>.</a:t>
+            </a:r>
+          </a:p>
+          <a:p>
+            <a:pPr>
+              <a:spcAft>
+                <a:spcPts val="300"/>
+              </a:spcAft>
+            </a:pPr>
+            <a:r>
+              <a:rPr lang="ko-KR" altLang="en-US" sz="750" b="1" dirty="0">
+                <a:latin typeface="맑은 고딕"/>
+                <a:ea typeface="맑은 고딕"/>
+              </a:rPr>
+              <a:t>정렬 키 축</a:t>
+            </a:r>
+            <a:r>
+              <a:rPr lang="ko-KR" altLang="en-US" sz="750" dirty="0">
+                <a:latin typeface="맑은 고딕"/>
+                <a:ea typeface="맑은 고딕"/>
+              </a:rPr>
+              <a:t> </a:t>
+            </a:r>
+            <a:r>
+              <a:rPr lang="en-US" altLang="ko-KR" sz="750" dirty="0">
+                <a:latin typeface="맑은 고딕"/>
+                <a:ea typeface="맑은 고딕"/>
+              </a:rPr>
+              <a:t>-</a:t>
+            </a:r>
+            <a:r>
+              <a:rPr lang="ko-KR" altLang="en-US" sz="750" dirty="0">
+                <a:latin typeface="맑은 고딕"/>
+                <a:ea typeface="맑은 고딕"/>
+              </a:rPr>
+              <a:t> </a:t>
+            </a:r>
+            <a:r>
+              <a:rPr lang="ko-KR" altLang="en-US" sz="750" dirty="0" err="1">
+                <a:latin typeface="맑은 고딕"/>
+                <a:ea typeface="맑은 고딕"/>
+              </a:rPr>
+              <a:t>항등</a:t>
+            </a:r>
+            <a:r>
+              <a:rPr lang="en-US" altLang="ko-KR" sz="750" dirty="0">
+                <a:latin typeface="맑은 고딕"/>
+                <a:ea typeface="맑은 고딕"/>
+              </a:rPr>
+              <a:t>(</a:t>
+            </a:r>
+            <a:r>
+              <a:rPr lang="ko-KR" altLang="en-US" sz="750" dirty="0">
+                <a:latin typeface="맑은 고딕"/>
+                <a:ea typeface="맑은 고딕"/>
+              </a:rPr>
+              <a:t>오름차순</a:t>
+            </a:r>
+            <a:r>
+              <a:rPr lang="en-US" altLang="ko-KR" sz="750" dirty="0">
+                <a:latin typeface="맑은 고딕"/>
+                <a:ea typeface="맑은 고딕"/>
+              </a:rPr>
+              <a:t>) /</a:t>
+            </a:r>
+            <a:r>
+              <a:rPr lang="ko-KR" altLang="en-US" sz="750" dirty="0">
+                <a:latin typeface="맑은 고딕"/>
+                <a:ea typeface="맑은 고딕"/>
+              </a:rPr>
+              <a:t> 주기</a:t>
+            </a:r>
+            <a:r>
+              <a:rPr lang="en-US" altLang="ko-KR" sz="750" dirty="0">
+                <a:latin typeface="맑은 고딕"/>
+                <a:ea typeface="맑은 고딕"/>
+              </a:rPr>
+              <a:t>(mod</a:t>
+            </a:r>
+            <a:r>
+              <a:rPr lang="ko-KR" altLang="en-US" sz="750" dirty="0">
+                <a:latin typeface="맑은 고딕"/>
+                <a:ea typeface="맑은 고딕"/>
+              </a:rPr>
+              <a:t> 기반</a:t>
+            </a:r>
+            <a:r>
+              <a:rPr lang="en-US" altLang="ko-KR" sz="750" dirty="0">
+                <a:latin typeface="맑은 고딕"/>
+                <a:ea typeface="맑은 고딕"/>
+              </a:rPr>
+              <a:t>)</a:t>
+            </a:r>
+          </a:p>
+          <a:p>
+            <a:pPr>
+              <a:spcAft>
+                <a:spcPts val="300"/>
+              </a:spcAft>
+            </a:pPr>
+            <a:r>
+              <a:rPr lang="ko-KR" altLang="en-US" sz="750" b="1" dirty="0">
+                <a:latin typeface="맑은 고딕"/>
+                <a:ea typeface="맑은 고딕"/>
+              </a:rPr>
+              <a:t>매핑 축     </a:t>
+            </a:r>
+            <a:r>
+              <a:rPr lang="en-US" altLang="ko-KR" sz="750" dirty="0">
+                <a:latin typeface="맑은 고딕"/>
+                <a:ea typeface="맑은 고딕"/>
+              </a:rPr>
+              <a:t>-</a:t>
+            </a:r>
+            <a:r>
+              <a:rPr lang="ko-KR" altLang="en-US" sz="750" dirty="0">
+                <a:latin typeface="맑은 고딕"/>
+                <a:ea typeface="맑은 고딕"/>
+              </a:rPr>
+              <a:t> 단조</a:t>
+            </a:r>
+            <a:r>
+              <a:rPr lang="en-US" altLang="ko-KR" sz="750" dirty="0">
+                <a:latin typeface="맑은 고딕"/>
+                <a:ea typeface="맑은 고딕"/>
+              </a:rPr>
+              <a:t>(</a:t>
+            </a:r>
+            <a:r>
+              <a:rPr lang="ko-KR" altLang="en-US" sz="750" dirty="0">
+                <a:latin typeface="맑은 고딕"/>
+                <a:ea typeface="맑은 고딕"/>
+              </a:rPr>
+              <a:t>순서대로</a:t>
+            </a:r>
+            <a:r>
+              <a:rPr lang="en-US" altLang="ko-KR" sz="750" dirty="0">
+                <a:latin typeface="맑은 고딕"/>
+                <a:ea typeface="맑은 고딕"/>
+              </a:rPr>
+              <a:t>)</a:t>
+            </a:r>
+            <a:r>
+              <a:rPr lang="ko-KR" altLang="en-US" sz="750" dirty="0">
+                <a:latin typeface="맑은 고딕"/>
+                <a:ea typeface="맑은 고딕"/>
+              </a:rPr>
+              <a:t> </a:t>
+            </a:r>
+            <a:r>
+              <a:rPr lang="en-US" altLang="ko-KR" sz="750" dirty="0">
+                <a:latin typeface="맑은 고딕"/>
+                <a:ea typeface="맑은 고딕"/>
+              </a:rPr>
+              <a:t>/</a:t>
+            </a:r>
+            <a:r>
+              <a:rPr lang="ko-KR" altLang="en-US" sz="750" dirty="0">
+                <a:latin typeface="맑은 고딕"/>
+                <a:ea typeface="맑은 고딕"/>
+              </a:rPr>
+              <a:t> </a:t>
+            </a:r>
+            <a:r>
+              <a:rPr lang="ko-KR" altLang="en-US" sz="750" dirty="0" err="1">
+                <a:latin typeface="맑은 고딕"/>
+                <a:ea typeface="맑은 고딕"/>
+              </a:rPr>
+              <a:t>비단조</a:t>
+            </a:r>
+            <a:r>
+              <a:rPr lang="en-US" altLang="ko-KR" sz="750" dirty="0">
+                <a:latin typeface="맑은 고딕"/>
+                <a:ea typeface="맑은 고딕"/>
+              </a:rPr>
+              <a:t>(</a:t>
+            </a:r>
+            <a:r>
+              <a:rPr lang="ko-KR" altLang="en-US" sz="750" dirty="0">
+                <a:latin typeface="맑은 고딕"/>
+                <a:ea typeface="맑은 고딕"/>
+              </a:rPr>
+              <a:t>교번</a:t>
+            </a:r>
+            <a:r>
+              <a:rPr lang="en-US" altLang="ko-KR" sz="750" dirty="0">
+                <a:latin typeface="맑은 고딕"/>
+                <a:ea typeface="맑은 고딕"/>
+              </a:rPr>
+              <a:t>)</a:t>
+            </a:r>
+          </a:p>
+          <a:p>
+            <a:pPr>
+              <a:spcAft>
+                <a:spcPts val="300"/>
+              </a:spcAft>
+            </a:pPr>
+            <a:endParaRPr lang="en-US" altLang="ko-KR" sz="750" dirty="0">
+              <a:latin typeface="맑은 고딕"/>
+              <a:ea typeface="맑은 고딕"/>
+            </a:endParaRPr>
+          </a:p>
+          <a:p>
+            <a:pPr>
+              <a:spcAft>
+                <a:spcPts val="300"/>
+              </a:spcAft>
+            </a:pPr>
+            <a:endParaRPr lang="en-US" altLang="ko-KR" sz="750" b="1" dirty="0">
+              <a:solidFill>
+                <a:srgbClr val="1E2761"/>
+              </a:solidFill>
+              <a:latin typeface="맑은 고딕"/>
+              <a:ea typeface="맑은 고딕"/>
+            </a:endParaRPr>
+          </a:p>
+          <a:p>
             <a:pPr algn="l">
               <a:spcAft>
                 <a:spcPts val="300"/>
               </a:spcAft>
             </a:pPr>
-            <a:endParaRPr lang="en-US" altLang="ko-KR" dirty="0"/>
+            <a:endParaRPr lang="en-US" altLang="ko-KR" sz="750" dirty="0"/>
           </a:p>
           <a:p>
             <a:pPr algn="l">
@@ -5387,9 +5390,37 @@
                 <a:spcPts val="300"/>
               </a:spcAft>
             </a:pPr>
-            <a:endParaRPr lang="en-US" sz="900" b="1" dirty="0">
+            <a:r>
+              <a:rPr lang="ko-KR" altLang="ko-KR" sz="900" b="1" dirty="0">
+                <a:solidFill>
+                  <a:srgbClr val="1E2760"/>
+                </a:solidFill>
+              </a:rPr>
+              <a:t>⑤</a:t>
+            </a:r>
+            <a:r>
+              <a:rPr sz="900" b="1" dirty="0">
+                <a:solidFill>
+                  <a:srgbClr val="1E2761"/>
+                </a:solidFill>
+                <a:latin typeface="맑은 고딕"/>
+                <a:ea typeface="맑은 고딕"/>
+              </a:rPr>
+              <a:t> </a:t>
+            </a:r>
+            <a:r>
+              <a:rPr lang="ko-KR" altLang="en-US" sz="900" b="1" dirty="0">
+                <a:solidFill>
+                  <a:srgbClr val="1E2761"/>
+                </a:solidFill>
+                <a:latin typeface="맑은 고딕"/>
+                <a:ea typeface="맑은 고딕"/>
+              </a:rPr>
+              <a:t>연구방법</a:t>
+            </a:r>
+            <a:endParaRPr lang="en-US" altLang="ko-KR" sz="900" b="1" dirty="0">
               <a:solidFill>
-                <a:srgbClr val="1E2761"/>
+                <a:srgbClr val="1E2760"/>
               </a:solidFill>
               <a:latin typeface="맑은 고딕"/>
               <a:ea typeface="맑은 고딕"/>
@@ -5402,66 +5433,448 @@
               </a:spcAft>
             </a:pPr>
             <a:r>
-              <a:rPr sz="900" b="1" dirty="0">
-                <a:solidFill>
-                  <a:srgbClr val="1E2761"/>
-                </a:solidFill>
-                <a:latin typeface="맑은 고딕"/>
-                <a:ea typeface="맑은 고딕"/>
-              </a:rPr>
-              <a:t>④ </a:t>
-            </a:r>
-            <a:r>
-              <a:rPr sz="900" b="1" dirty="0" err="1">
-                <a:solidFill>
-                  <a:srgbClr val="1E2761"/>
-                </a:solidFill>
-                <a:latin typeface="맑은 고딕"/>
-                <a:ea typeface="맑은 고딕"/>
-              </a:rPr>
-              <a:t>기대효과</a:t>
-            </a:r>
-            <a:r>
-              <a:rPr sz="900" b="1" dirty="0">
-                <a:solidFill>
-                  <a:srgbClr val="1E2761"/>
-                </a:solidFill>
-                <a:latin typeface="맑은 고딕"/>
-                <a:ea typeface="맑은 고딕"/>
-              </a:rPr>
-              <a:t> · </a:t>
-            </a:r>
-            <a:r>
-              <a:rPr sz="900" b="1" dirty="0" err="1">
-                <a:solidFill>
-                  <a:srgbClr val="1E2761"/>
-                </a:solidFill>
-                <a:latin typeface="맑은 고딕"/>
-                <a:ea typeface="맑은 고딕"/>
-              </a:rPr>
-              <a:t>예상</a:t>
-            </a:r>
-            <a:r>
-              <a:rPr sz="900" b="1" dirty="0">
-                <a:solidFill>
-                  <a:srgbClr val="1E2761"/>
-                </a:solidFill>
-                <a:latin typeface="맑은 고딕"/>
-                <a:ea typeface="맑은 고딕"/>
-              </a:rPr>
+              <a:rPr lang="en-US" altLang="ko-KR" sz="750" dirty="0">
+                <a:latin typeface="맑은 고딕"/>
+                <a:ea typeface="맑은 고딕"/>
+              </a:rPr>
+              <a:t>1) Grokking </a:t>
+            </a:r>
+            <a:r>
+              <a:rPr lang="ko-KR" altLang="en-US" sz="750" dirty="0">
+                <a:latin typeface="맑은 고딕"/>
+                <a:ea typeface="맑은 고딕"/>
+              </a:rPr>
+              <a:t>여부 확인 </a:t>
+            </a:r>
+            <a:r>
+              <a:rPr lang="en-US" altLang="ko-KR" sz="750" dirty="0">
+                <a:latin typeface="맑은 고딕"/>
+                <a:ea typeface="맑은 고딕"/>
+              </a:rPr>
+              <a:t>- </a:t>
+            </a:r>
+            <a:r>
+              <a:rPr lang="ko-KR" altLang="en-US" sz="750" dirty="0">
+                <a:latin typeface="맑은 고딕"/>
+                <a:ea typeface="맑은 고딕"/>
+              </a:rPr>
+              <a:t>우선 수열 입력에 대해 </a:t>
+            </a:r>
+            <a:r>
+              <a:rPr lang="en-US" altLang="ko-KR" sz="750" dirty="0">
+                <a:latin typeface="맑은 고딕"/>
+                <a:ea typeface="맑은 고딕"/>
+              </a:rPr>
+              <a:t>grokking</a:t>
+            </a:r>
+            <a:r>
+              <a:rPr lang="ko-KR" altLang="en-US" sz="750" dirty="0">
+                <a:latin typeface="맑은 고딕"/>
+                <a:ea typeface="맑은 고딕"/>
+              </a:rPr>
+              <a:t>이 일어나는지 확인할 필요가 있다</a:t>
+            </a:r>
+            <a:r>
+              <a:rPr lang="en-US" altLang="ko-KR" sz="750" dirty="0">
+                <a:latin typeface="맑은 고딕"/>
+                <a:ea typeface="맑은 고딕"/>
+              </a:rPr>
+              <a:t>. </a:t>
+            </a:r>
+            <a:r>
+              <a:rPr lang="ko-KR" altLang="en-US" sz="750" dirty="0">
+                <a:latin typeface="맑은 고딕"/>
+                <a:ea typeface="맑은 고딕"/>
+              </a:rPr>
+              <a:t>이를 위해 주어진 수열의 최댓값</a:t>
+            </a:r>
+            <a:r>
+              <a:rPr lang="en-US" altLang="ko-KR" sz="750" dirty="0">
+                <a:latin typeface="맑은 고딕"/>
+                <a:ea typeface="맑은 고딕"/>
+              </a:rPr>
+              <a:t>, </a:t>
+            </a:r>
+            <a:r>
+              <a:rPr lang="ko-KR" altLang="en-US" sz="750" dirty="0">
+                <a:latin typeface="맑은 고딕"/>
+                <a:ea typeface="맑은 고딕"/>
+              </a:rPr>
+              <a:t>최솟값</a:t>
+            </a:r>
+            <a:r>
+              <a:rPr lang="en-US" altLang="ko-KR" sz="750" dirty="0">
+                <a:latin typeface="맑은 고딕"/>
+                <a:ea typeface="맑은 고딕"/>
+              </a:rPr>
+              <a:t>, </a:t>
+            </a:r>
+            <a:r>
+              <a:rPr lang="ko-KR" altLang="en-US" sz="750" dirty="0">
+                <a:latin typeface="맑은 고딕"/>
+                <a:ea typeface="맑은 고딕"/>
+              </a:rPr>
+              <a:t>중앙값을 출력하는 </a:t>
+            </a:r>
+            <a:r>
+              <a:rPr lang="en-US" altLang="ko-KR" sz="750" dirty="0">
+                <a:latin typeface="맑은 고딕"/>
+                <a:ea typeface="맑은 고딕"/>
+              </a:rPr>
+              <a:t>transformer</a:t>
+            </a:r>
+            <a:r>
+              <a:rPr lang="ko-KR" altLang="en-US" sz="750" dirty="0">
+                <a:latin typeface="맑은 고딕"/>
+                <a:ea typeface="맑은 고딕"/>
+              </a:rPr>
+              <a:t>에서 </a:t>
+            </a:r>
+            <a:r>
+              <a:rPr lang="en-US" altLang="ko-KR" sz="750" dirty="0">
+                <a:latin typeface="맑은 고딕"/>
+                <a:ea typeface="맑은 고딕"/>
+              </a:rPr>
+              <a:t>grokking</a:t>
+            </a:r>
+            <a:r>
+              <a:rPr lang="ko-KR" altLang="en-US" sz="750" dirty="0">
+                <a:latin typeface="맑은 고딕"/>
+                <a:ea typeface="맑은 고딕"/>
+              </a:rPr>
+              <a:t>이 발생하는지 관찰한다</a:t>
+            </a:r>
+            <a:r>
+              <a:rPr lang="en-US" altLang="ko-KR" sz="750" dirty="0">
+                <a:latin typeface="맑은 고딕"/>
+                <a:ea typeface="맑은 고딕"/>
+              </a:rPr>
+              <a:t>.</a:t>
+            </a:r>
+          </a:p>
+          <a:p>
+            <a:pPr>
+              <a:spcAft>
+                <a:spcPts val="300"/>
+              </a:spcAft>
+            </a:pPr>
+            <a:r>
+              <a:rPr lang="en-US" altLang="ko-KR" sz="750" dirty="0">
+                <a:latin typeface="맑은 고딕"/>
+                <a:ea typeface="맑은 고딕"/>
+              </a:rPr>
+              <a:t>2) </a:t>
+            </a:r>
+            <a:r>
+              <a:rPr lang="ko-KR" altLang="en-US" sz="750" dirty="0">
+                <a:latin typeface="맑은 고딕"/>
+                <a:ea typeface="맑은 고딕"/>
+              </a:rPr>
+              <a:t>학습 곡선 분석 </a:t>
+            </a:r>
+            <a:r>
+              <a:rPr lang="en-US" altLang="ko-KR" sz="750" dirty="0">
+                <a:latin typeface="맑은 고딕"/>
+                <a:ea typeface="맑은 고딕"/>
+              </a:rPr>
+              <a:t>- </a:t>
+            </a:r>
+            <a:r>
+              <a:rPr lang="ko-KR" altLang="en-US" sz="750" dirty="0">
+                <a:latin typeface="맑은 고딕"/>
+                <a:ea typeface="맑은 고딕"/>
+              </a:rPr>
+              <a:t>각 정렬 기준에 대해 소규모 </a:t>
+            </a:r>
+            <a:r>
+              <a:rPr lang="en" sz="750" dirty="0">
+                <a:latin typeface="맑은 고딕"/>
+                <a:ea typeface="맑은 고딕"/>
+              </a:rPr>
+              <a:t>Transformer</a:t>
+            </a:r>
+            <a:r>
+              <a:rPr lang="ko-KR" altLang="en-US" sz="750" dirty="0" err="1">
+                <a:latin typeface="맑은 고딕"/>
+                <a:ea typeface="맑은 고딕"/>
+              </a:rPr>
+              <a:t>를</a:t>
+            </a:r>
+            <a:r>
+              <a:rPr lang="ko-KR" altLang="en-US" sz="750" dirty="0">
+                <a:latin typeface="맑은 고딕"/>
+                <a:ea typeface="맑은 고딕"/>
+              </a:rPr>
+              <a:t> 동일 조건에서 훈련하고</a:t>
+            </a:r>
+            <a:r>
+              <a:rPr lang="en-US" altLang="ko-KR" sz="750" dirty="0">
+                <a:latin typeface="맑은 고딕"/>
+                <a:ea typeface="맑은 고딕"/>
+              </a:rPr>
+              <a:t>, </a:t>
+            </a:r>
+            <a:r>
+              <a:rPr lang="ko-KR" altLang="en-US" sz="750" dirty="0">
+                <a:latin typeface="맑은 고딕"/>
+                <a:ea typeface="맑은 고딕"/>
+              </a:rPr>
+              <a:t>훈련 정확도가 포화되는 시점과 검증 정확도가 급상승하는 시점 사이의 간격인 </a:t>
+            </a:r>
+            <a:r>
+              <a:rPr lang="en" sz="750" dirty="0">
+                <a:latin typeface="맑은 고딕"/>
+                <a:ea typeface="맑은 고딕"/>
+              </a:rPr>
+              <a:t>grokking gap</a:t>
+            </a:r>
+            <a:r>
+              <a:rPr lang="ko-KR" altLang="en-US" sz="750" dirty="0">
+                <a:latin typeface="맑은 고딕"/>
+                <a:ea typeface="맑은 고딕"/>
+              </a:rPr>
+              <a:t>을 측정한다</a:t>
+            </a:r>
+            <a:r>
+              <a:rPr lang="en-US" altLang="ko-KR" sz="750" dirty="0">
+                <a:latin typeface="맑은 고딕"/>
+                <a:ea typeface="맑은 고딕"/>
+              </a:rPr>
+              <a:t>.</a:t>
+            </a:r>
+          </a:p>
+          <a:p>
+            <a:pPr>
+              <a:spcAft>
+                <a:spcPts val="300"/>
+              </a:spcAft>
+            </a:pPr>
+            <a:r>
+              <a:rPr lang="en-US" altLang="ko-KR" sz="750" dirty="0">
+                <a:latin typeface="맑은 고딕"/>
+                <a:ea typeface="맑은 고딕"/>
+              </a:rPr>
+              <a:t>3) </a:t>
+            </a:r>
+            <a:r>
+              <a:rPr lang="ko-KR" altLang="en-US" sz="750" dirty="0">
+                <a:latin typeface="맑은 고딕"/>
+                <a:ea typeface="맑은 고딕"/>
+              </a:rPr>
+              <a:t>내부 표현 분석 </a:t>
+            </a:r>
+            <a:r>
+              <a:rPr lang="en-US" altLang="ko-KR" sz="750" dirty="0">
+                <a:latin typeface="맑은 고딕"/>
+                <a:ea typeface="맑은 고딕"/>
+              </a:rPr>
+              <a:t>- </a:t>
+            </a:r>
+            <a:r>
+              <a:rPr lang="en" sz="750" dirty="0">
+                <a:latin typeface="맑은 고딕"/>
+                <a:ea typeface="맑은 고딕"/>
+              </a:rPr>
+              <a:t>Grokking</a:t>
+            </a:r>
+            <a:r>
+              <a:rPr lang="ko-KR" altLang="en-US" sz="750" dirty="0">
+                <a:latin typeface="맑은 고딕"/>
+                <a:ea typeface="맑은 고딕"/>
+              </a:rPr>
+              <a:t>이 완료된 모델의 </a:t>
+            </a:r>
+            <a:r>
+              <a:rPr lang="en" sz="750" dirty="0">
+                <a:latin typeface="맑은 고딕"/>
+                <a:ea typeface="맑은 고딕"/>
+              </a:rPr>
+              <a:t>embedding </a:t>
+            </a:r>
+            <a:r>
+              <a:rPr lang="ko-KR" altLang="en-US" sz="750" dirty="0">
+                <a:latin typeface="맑은 고딕"/>
+                <a:ea typeface="맑은 고딕"/>
+              </a:rPr>
+              <a:t>행렬에 차원 축소 기법을 적용하여 표현에 필요한 유효 차원 수를 측정하고</a:t>
+            </a:r>
+            <a:r>
+              <a:rPr lang="en-US" altLang="ko-KR" sz="750" dirty="0">
+                <a:latin typeface="맑은 고딕"/>
+                <a:ea typeface="맑은 고딕"/>
+              </a:rPr>
+              <a:t>, </a:t>
+            </a:r>
+            <a:r>
+              <a:rPr lang="ko-KR" altLang="en-US" sz="750" dirty="0">
+                <a:latin typeface="맑은 고딕"/>
+                <a:ea typeface="맑은 고딕"/>
+              </a:rPr>
+              <a:t>값의 크기 순 배열 구조</a:t>
+            </a:r>
+            <a:r>
+              <a:rPr lang="en-US" altLang="ko-KR" sz="750" dirty="0">
+                <a:latin typeface="맑은 고딕"/>
+                <a:ea typeface="맑은 고딕"/>
+              </a:rPr>
+              <a:t>, </a:t>
+            </a:r>
+            <a:r>
+              <a:rPr lang="ko-KR" altLang="en-US" sz="750" dirty="0">
+                <a:latin typeface="맑은 고딕"/>
+                <a:ea typeface="맑은 고딕"/>
+              </a:rPr>
+              <a:t>잉여류별 군집 구조</a:t>
+            </a:r>
+            <a:r>
+              <a:rPr lang="en-US" altLang="ko-KR" sz="750" dirty="0">
+                <a:latin typeface="맑은 고딕"/>
+                <a:ea typeface="맑은 고딕"/>
+              </a:rPr>
+              <a:t>, </a:t>
+            </a:r>
+            <a:r>
+              <a:rPr lang="ko-KR" altLang="en-US" sz="750" dirty="0">
+                <a:latin typeface="맑은 고딕"/>
+                <a:ea typeface="맑은 고딕"/>
+              </a:rPr>
+              <a:t>주기적 구조가 실제로 형성되는지 확인한다</a:t>
+            </a:r>
+            <a:r>
+              <a:rPr lang="en-US" altLang="ko-KR" sz="750" dirty="0">
+                <a:latin typeface="맑은 고딕"/>
+                <a:ea typeface="맑은 고딕"/>
+              </a:rPr>
+              <a:t>.</a:t>
+            </a:r>
+            <a:endParaRPr lang="en-US" altLang="ko-KR" sz="500" dirty="0">
+              <a:latin typeface="맑은 고딕"/>
+              <a:ea typeface="맑은 고딕"/>
+            </a:endParaRPr>
+          </a:p>
+          <a:p>
+            <a:pPr>
+              <a:spcAft>
+                <a:spcPts val="300"/>
+              </a:spcAft>
+            </a:pPr>
+            <a:endParaRPr lang="en-US" altLang="ko-KR" sz="500" dirty="0">
+              <a:latin typeface="맑은 고딕"/>
+              <a:ea typeface="맑은 고딕"/>
+            </a:endParaRPr>
+          </a:p>
+          <a:p>
+            <a:pPr>
+              <a:spcAft>
+                <a:spcPts val="300"/>
+              </a:spcAft>
+            </a:pPr>
+            <a:endParaRPr lang="en-US" altLang="ko-KR" sz="500" dirty="0">
+              <a:latin typeface="맑은 고딕"/>
+              <a:ea typeface="맑은 고딕"/>
+            </a:endParaRPr>
+          </a:p>
+          <a:p>
+            <a:pPr>
+              <a:spcAft>
+                <a:spcPts val="300"/>
+              </a:spcAft>
+            </a:pPr>
+            <a:endParaRPr lang="en-US" altLang="ko-KR" sz="500" dirty="0">
+              <a:latin typeface="맑은 고딕"/>
+              <a:ea typeface="맑은 고딕"/>
+            </a:endParaRPr>
+          </a:p>
+          <a:p>
+            <a:pPr>
+              <a:spcAft>
+                <a:spcPts val="300"/>
+              </a:spcAft>
+            </a:pPr>
+            <a:endParaRPr lang="en-US" altLang="ko-KR" sz="750" dirty="0">
+              <a:latin typeface="맑은 고딕"/>
+              <a:ea typeface="맑은 고딕"/>
+            </a:endParaRPr>
+          </a:p>
+          <a:p>
+            <a:pPr>
+              <a:spcAft>
+                <a:spcPts val="300"/>
+              </a:spcAft>
+            </a:pPr>
+            <a:endParaRPr lang="en-US" altLang="ko-KR" sz="750" dirty="0">
+              <a:latin typeface="맑은 고딕"/>
+              <a:ea typeface="맑은 고딕"/>
+            </a:endParaRPr>
+          </a:p>
+          <a:p>
+            <a:pPr>
+              <a:spcAft>
+                <a:spcPts val="300"/>
+              </a:spcAft>
+            </a:pPr>
+            <a:endParaRPr lang="en-US" altLang="ko-KR" sz="750" dirty="0">
+              <a:latin typeface="맑은 고딕"/>
+              <a:ea typeface="맑은 고딕"/>
+            </a:endParaRPr>
+          </a:p>
+          <a:p>
+            <a:pPr>
+              <a:spcAft>
+                <a:spcPts val="300"/>
+              </a:spcAft>
+            </a:pPr>
+            <a:endParaRPr lang="en-US" altLang="ko-KR" sz="750" dirty="0">
+              <a:latin typeface="맑은 고딕"/>
+              <a:ea typeface="맑은 고딕"/>
+            </a:endParaRPr>
+          </a:p>
+          <a:p>
+            <a:pPr>
+              <a:spcAft>
+                <a:spcPts val="300"/>
+              </a:spcAft>
+            </a:pPr>
+            <a:endParaRPr lang="en-US" altLang="ko-KR" sz="300" dirty="0">
+              <a:latin typeface="맑은 고딕"/>
+              <a:ea typeface="맑은 고딕"/>
+            </a:endParaRPr>
+          </a:p>
+          <a:p>
+            <a:pPr algn="r">
+              <a:spcAft>
+                <a:spcPts val="300"/>
+              </a:spcAft>
+            </a:pPr>
+            <a:r>
+              <a:rPr lang="en" altLang="ko-KR" sz="550" dirty="0"/>
+              <a:t>Liu et al, "Towards Understanding Grokking: An Effective Theory of</a:t>
+            </a:r>
+            <a:r>
+              <a:rPr lang="ko-KR" altLang="en-US" sz="550" dirty="0"/>
               <a:t> </a:t>
             </a:r>
             <a:r>
-              <a:rPr sz="900" b="1" dirty="0" err="1">
-                <a:solidFill>
-                  <a:srgbClr val="1E2761"/>
-                </a:solidFill>
-                <a:latin typeface="맑은 고딕"/>
-                <a:ea typeface="맑은 고딕"/>
-              </a:rPr>
-              <a:t>결과</a:t>
-            </a:r>
-            <a:endParaRPr sz="600" b="0" dirty="0">
+              <a:rPr lang="en" altLang="ko-KR" sz="550" dirty="0"/>
+              <a:t>Representation Learning”</a:t>
+            </a:r>
+            <a:r>
+              <a:rPr lang="ko-KR" altLang="en-US" sz="550" dirty="0"/>
+              <a:t> </a:t>
+            </a:r>
+            <a:r>
+              <a:rPr lang="en-US" altLang="ko-KR" sz="550" dirty="0"/>
+              <a:t>(</a:t>
+            </a:r>
+            <a:r>
+              <a:rPr lang="en" altLang="ko-KR" sz="550" dirty="0"/>
+              <a:t>2022</a:t>
+            </a:r>
+            <a:r>
+              <a:rPr lang="en-US" altLang="ko-KR" sz="550" dirty="0"/>
+              <a:t>)</a:t>
+            </a:r>
+            <a:endParaRPr lang="en-US" altLang="ko-KR" sz="550" dirty="0">
               <a:solidFill>
                 <a:srgbClr val="555F6E"/>
               </a:solidFill>
@@ -5493,20 +5906,3186 @@
         </p:blipFill>
         <p:spPr>
           <a:xfrm>
-            <a:off x="549229" y="4347389"/>
-            <a:ext cx="2696301" cy="1221513"/>
+            <a:off x="673553" y="4375446"/>
+            <a:ext cx="2342351" cy="1061162"/>
           </a:xfrm>
           <a:prstGeom prst="rect">
             <a:avLst/>
           </a:prstGeom>
         </p:spPr>
       </p:pic>
+      <p:grpSp>
+        <p:nvGrpSpPr>
+          <p:cNvPr id="82" name="그룹 81">
+            <a:extLst>
+              <a:ext uri="{FF2B5EF4-FFF2-40B4-BE49-F238E27FC236}">
+                <a16:creationId xmlns:a16="http://schemas.microsoft.com/office/drawing/2014/main" id="{171619D2-161A-101A-4108-BFD047F28FA5}"/>
+              </a:ext>
+            </a:extLst>
+          </p:cNvPr>
+          <p:cNvGrpSpPr/>
+          <p:nvPr/>
+        </p:nvGrpSpPr>
+        <p:grpSpPr>
+          <a:xfrm>
+            <a:off x="3250988" y="4927721"/>
+            <a:ext cx="3445960" cy="1014932"/>
+            <a:chOff x="3245530" y="4163296"/>
+            <a:chExt cx="3445960" cy="1014932"/>
+          </a:xfrm>
+        </p:grpSpPr>
+        <p:sp>
+          <p:nvSpPr>
+            <p:cNvPr id="56" name="TextBox 55">
+              <a:extLst>
+                <a:ext uri="{FF2B5EF4-FFF2-40B4-BE49-F238E27FC236}">
+                  <a16:creationId xmlns:a16="http://schemas.microsoft.com/office/drawing/2014/main" id="{E7E26A74-E939-1C8E-9048-6115BBF41870}"/>
+                </a:ext>
+              </a:extLst>
+            </p:cNvPr>
+            <p:cNvSpPr txBox="1"/>
+            <p:nvPr/>
+          </p:nvSpPr>
+          <p:spPr>
+            <a:xfrm>
+              <a:off x="4546617" y="4993562"/>
+              <a:ext cx="152400" cy="184666"/>
+            </a:xfrm>
+            <a:prstGeom prst="rect">
+              <a:avLst/>
+            </a:prstGeom>
+            <a:noFill/>
+          </p:spPr>
+          <p:txBody>
+            <a:bodyPr wrap="square" anchor="t">
+              <a:spAutoFit/>
+            </a:bodyPr>
+            <a:lstStyle/>
+            <a:p>
+              <a:pPr algn="ctr"/>
+              <a:r>
+                <a:rPr sz="600" b="0">
+                  <a:solidFill>
+                    <a:srgbClr val="777777"/>
+                  </a:solidFill>
+                  <a:latin typeface="맑은 고딕"/>
+                  <a:ea typeface="맑은 고딕"/>
+                </a:rPr>
+                <a:t>0</a:t>
+              </a:r>
+            </a:p>
+          </p:txBody>
+        </p:sp>
+        <p:sp>
+          <p:nvSpPr>
+            <p:cNvPr id="57" name="TextBox 56">
+              <a:extLst>
+                <a:ext uri="{FF2B5EF4-FFF2-40B4-BE49-F238E27FC236}">
+                  <a16:creationId xmlns:a16="http://schemas.microsoft.com/office/drawing/2014/main" id="{2F5E1BC5-5795-2356-5872-90FAC30D9585}"/>
+                </a:ext>
+              </a:extLst>
+            </p:cNvPr>
+            <p:cNvSpPr txBox="1"/>
+            <p:nvPr/>
+          </p:nvSpPr>
+          <p:spPr>
+            <a:xfrm>
+              <a:off x="4723402" y="4993562"/>
+              <a:ext cx="152400" cy="184666"/>
+            </a:xfrm>
+            <a:prstGeom prst="rect">
+              <a:avLst/>
+            </a:prstGeom>
+            <a:noFill/>
+          </p:spPr>
+          <p:txBody>
+            <a:bodyPr wrap="square" anchor="t">
+              <a:spAutoFit/>
+            </a:bodyPr>
+            <a:lstStyle/>
+            <a:p>
+              <a:pPr algn="ctr"/>
+              <a:r>
+                <a:rPr sz="600" b="0">
+                  <a:solidFill>
+                    <a:srgbClr val="777777"/>
+                  </a:solidFill>
+                  <a:latin typeface="맑은 고딕"/>
+                  <a:ea typeface="맑은 고딕"/>
+                </a:rPr>
+                <a:t>1</a:t>
+              </a:r>
+            </a:p>
+          </p:txBody>
+        </p:sp>
+        <p:sp>
+          <p:nvSpPr>
+            <p:cNvPr id="58" name="TextBox 57">
+              <a:extLst>
+                <a:ext uri="{FF2B5EF4-FFF2-40B4-BE49-F238E27FC236}">
+                  <a16:creationId xmlns:a16="http://schemas.microsoft.com/office/drawing/2014/main" id="{CFBCF0E5-B5C2-67D1-8D32-30608C47DBB1}"/>
+                </a:ext>
+              </a:extLst>
+            </p:cNvPr>
+            <p:cNvSpPr txBox="1"/>
+            <p:nvPr/>
+          </p:nvSpPr>
+          <p:spPr>
+            <a:xfrm>
+              <a:off x="4900185" y="4993562"/>
+              <a:ext cx="152400" cy="184666"/>
+            </a:xfrm>
+            <a:prstGeom prst="rect">
+              <a:avLst/>
+            </a:prstGeom>
+            <a:noFill/>
+          </p:spPr>
+          <p:txBody>
+            <a:bodyPr wrap="square" anchor="t">
+              <a:spAutoFit/>
+            </a:bodyPr>
+            <a:lstStyle/>
+            <a:p>
+              <a:pPr algn="ctr"/>
+              <a:r>
+                <a:rPr sz="600" b="0">
+                  <a:solidFill>
+                    <a:srgbClr val="777777"/>
+                  </a:solidFill>
+                  <a:latin typeface="맑은 고딕"/>
+                  <a:ea typeface="맑은 고딕"/>
+                </a:rPr>
+                <a:t>1</a:t>
+              </a:r>
+            </a:p>
+          </p:txBody>
+        </p:sp>
+        <p:sp>
+          <p:nvSpPr>
+            <p:cNvPr id="59" name="TextBox 58">
+              <a:extLst>
+                <a:ext uri="{FF2B5EF4-FFF2-40B4-BE49-F238E27FC236}">
+                  <a16:creationId xmlns:a16="http://schemas.microsoft.com/office/drawing/2014/main" id="{5C29ADD5-A220-15C3-32B1-C169F3A90F21}"/>
+                </a:ext>
+              </a:extLst>
+            </p:cNvPr>
+            <p:cNvSpPr txBox="1"/>
+            <p:nvPr/>
+          </p:nvSpPr>
+          <p:spPr>
+            <a:xfrm>
+              <a:off x="5076969" y="4993562"/>
+              <a:ext cx="152400" cy="184666"/>
+            </a:xfrm>
+            <a:prstGeom prst="rect">
+              <a:avLst/>
+            </a:prstGeom>
+            <a:noFill/>
+          </p:spPr>
+          <p:txBody>
+            <a:bodyPr wrap="square" anchor="t">
+              <a:spAutoFit/>
+            </a:bodyPr>
+            <a:lstStyle/>
+            <a:p>
+              <a:pPr algn="ctr"/>
+              <a:r>
+                <a:rPr sz="600" b="0">
+                  <a:solidFill>
+                    <a:srgbClr val="777777"/>
+                  </a:solidFill>
+                  <a:latin typeface="맑은 고딕"/>
+                  <a:ea typeface="맑은 고딕"/>
+                </a:rPr>
+                <a:t>1</a:t>
+              </a:r>
+            </a:p>
+          </p:txBody>
+        </p:sp>
+        <p:sp>
+          <p:nvSpPr>
+            <p:cNvPr id="60" name="TextBox 59">
+              <a:extLst>
+                <a:ext uri="{FF2B5EF4-FFF2-40B4-BE49-F238E27FC236}">
+                  <a16:creationId xmlns:a16="http://schemas.microsoft.com/office/drawing/2014/main" id="{3C9C66B9-F41B-A24F-B5CA-81CE8CC2E165}"/>
+                </a:ext>
+              </a:extLst>
+            </p:cNvPr>
+            <p:cNvSpPr txBox="1"/>
+            <p:nvPr/>
+          </p:nvSpPr>
+          <p:spPr>
+            <a:xfrm>
+              <a:off x="5253753" y="4993562"/>
+              <a:ext cx="152400" cy="184666"/>
+            </a:xfrm>
+            <a:prstGeom prst="rect">
+              <a:avLst/>
+            </a:prstGeom>
+            <a:noFill/>
+          </p:spPr>
+          <p:txBody>
+            <a:bodyPr wrap="square" anchor="t">
+              <a:spAutoFit/>
+            </a:bodyPr>
+            <a:lstStyle/>
+            <a:p>
+              <a:pPr algn="ctr"/>
+              <a:r>
+                <a:rPr sz="600" b="0" dirty="0">
+                  <a:solidFill>
+                    <a:srgbClr val="777777"/>
+                  </a:solidFill>
+                  <a:latin typeface="맑은 고딕"/>
+                  <a:ea typeface="맑은 고딕"/>
+                </a:rPr>
+                <a:t>2</a:t>
+              </a:r>
+            </a:p>
+          </p:txBody>
+        </p:sp>
+        <p:grpSp>
+          <p:nvGrpSpPr>
+            <p:cNvPr id="81" name="그룹 80">
+              <a:extLst>
+                <a:ext uri="{FF2B5EF4-FFF2-40B4-BE49-F238E27FC236}">
+                  <a16:creationId xmlns:a16="http://schemas.microsoft.com/office/drawing/2014/main" id="{AEC1D905-755D-8F55-9CE2-46BC766D8A10}"/>
+                </a:ext>
+              </a:extLst>
+            </p:cNvPr>
+            <p:cNvGrpSpPr/>
+            <p:nvPr/>
+          </p:nvGrpSpPr>
+          <p:grpSpPr>
+            <a:xfrm>
+              <a:off x="3245530" y="4163296"/>
+              <a:ext cx="3445960" cy="860157"/>
+              <a:chOff x="3245530" y="4163296"/>
+              <a:chExt cx="3445960" cy="860157"/>
+            </a:xfrm>
+          </p:grpSpPr>
+          <p:sp>
+            <p:nvSpPr>
+              <p:cNvPr id="36" name="TextBox 35">
+                <a:extLst>
+                  <a:ext uri="{FF2B5EF4-FFF2-40B4-BE49-F238E27FC236}">
+                    <a16:creationId xmlns:a16="http://schemas.microsoft.com/office/drawing/2014/main" id="{4254F8B2-E2DB-2D57-7824-BB0EDD71D88C}"/>
+                  </a:ext>
+                </a:extLst>
+              </p:cNvPr>
+              <p:cNvSpPr txBox="1"/>
+              <p:nvPr/>
+            </p:nvSpPr>
+            <p:spPr>
+              <a:xfrm>
+                <a:off x="4363884" y="4163296"/>
+                <a:ext cx="1219200" cy="169277"/>
+              </a:xfrm>
+              <a:prstGeom prst="rect">
+                <a:avLst/>
+              </a:prstGeom>
+              <a:noFill/>
+            </p:spPr>
+            <p:txBody>
+              <a:bodyPr wrap="square" anchor="t">
+                <a:spAutoFit/>
+              </a:bodyPr>
+              <a:lstStyle/>
+              <a:p>
+                <a:pPr algn="ctr"/>
+                <a:r>
+                  <a:rPr sz="500" b="1" dirty="0" err="1">
+                    <a:solidFill>
+                      <a:srgbClr val="333333"/>
+                    </a:solidFill>
+                    <a:latin typeface="맑은 고딕"/>
+                    <a:ea typeface="맑은 고딕"/>
+                  </a:rPr>
+                  <a:t>입력</a:t>
+                </a:r>
+                <a:r>
+                  <a:rPr sz="500" b="1" dirty="0">
+                    <a:solidFill>
+                      <a:srgbClr val="333333"/>
+                    </a:solidFill>
+                    <a:latin typeface="맑은 고딕"/>
+                    <a:ea typeface="맑은 고딕"/>
+                  </a:rPr>
+                  <a:t> </a:t>
+                </a:r>
+                <a:r>
+                  <a:rPr sz="500" b="1" dirty="0" err="1">
+                    <a:solidFill>
+                      <a:srgbClr val="333333"/>
+                    </a:solidFill>
+                    <a:latin typeface="맑은 고딕"/>
+                    <a:ea typeface="맑은 고딕"/>
+                  </a:rPr>
+                  <a:t>수열</a:t>
+                </a:r>
+                <a:r>
+                  <a:rPr sz="500" b="1" dirty="0">
+                    <a:solidFill>
+                      <a:srgbClr val="333333"/>
+                    </a:solidFill>
+                    <a:latin typeface="맑은 고딕"/>
+                    <a:ea typeface="맑은 고딕"/>
+                  </a:rPr>
+                  <a:t> (</a:t>
+                </a:r>
+                <a:r>
+                  <a:rPr lang="ko-KR" altLang="en-US" sz="500" b="1" dirty="0">
+                    <a:solidFill>
+                      <a:srgbClr val="333333"/>
+                    </a:solidFill>
+                    <a:latin typeface="맑은 고딕"/>
+                    <a:ea typeface="맑은 고딕"/>
+                  </a:rPr>
+                  <a:t>순서 랜덤</a:t>
+                </a:r>
+                <a:r>
+                  <a:rPr sz="500" b="1" dirty="0">
+                    <a:solidFill>
+                      <a:srgbClr val="333333"/>
+                    </a:solidFill>
+                    <a:latin typeface="맑은 고딕"/>
+                    <a:ea typeface="맑은 고딕"/>
+                  </a:rPr>
+                  <a:t>)</a:t>
+                </a:r>
+              </a:p>
+            </p:txBody>
+          </p:sp>
+          <p:sp>
+            <p:nvSpPr>
+              <p:cNvPr id="37" name="Rectangle 3">
+                <a:extLst>
+                  <a:ext uri="{FF2B5EF4-FFF2-40B4-BE49-F238E27FC236}">
+                    <a16:creationId xmlns:a16="http://schemas.microsoft.com/office/drawing/2014/main" id="{9A6E1F78-0EE2-49E3-E983-72A57441E4EA}"/>
+                  </a:ext>
+                </a:extLst>
+              </p:cNvPr>
+              <p:cNvSpPr/>
+              <p:nvPr/>
+            </p:nvSpPr>
+            <p:spPr>
+              <a:xfrm>
+                <a:off x="4546617" y="4333058"/>
+                <a:ext cx="152400" cy="152400"/>
+              </a:xfrm>
+              <a:prstGeom prst="rect">
+                <a:avLst/>
+              </a:prstGeom>
+              <a:solidFill>
+                <a:srgbClr val="FFFFFF"/>
+              </a:solidFill>
+              <a:ln w="4233">
+                <a:solidFill>
+                  <a:srgbClr val="333333"/>
+                </a:solidFill>
+              </a:ln>
+              <a:effectLst/>
+            </p:spPr>
+            <p:style>
+              <a:lnRef idx="1">
+                <a:schemeClr val="accent1"/>
+              </a:lnRef>
+              <a:fillRef idx="3">
+                <a:schemeClr val="accent1"/>
+              </a:fillRef>
+              <a:effectRef idx="2">
+                <a:schemeClr val="accent1"/>
+              </a:effectRef>
+              <a:fontRef idx="minor">
+                <a:schemeClr val="lt1"/>
+              </a:fontRef>
+            </p:style>
+            <p:txBody>
+              <a:bodyPr wrap="square" lIns="12192" tIns="6096" rIns="12192" bIns="6096" rtlCol="0" anchor="ctr"/>
+              <a:lstStyle/>
+              <a:p>
+                <a:pPr algn="ctr"/>
+                <a:r>
+                  <a:rPr sz="600" b="1">
+                    <a:solidFill>
+                      <a:srgbClr val="333333"/>
+                    </a:solidFill>
+                    <a:latin typeface="맑은 고딕"/>
+                    <a:ea typeface="맑은 고딕"/>
+                  </a:rPr>
+                  <a:t>3</a:t>
+                </a:r>
+              </a:p>
+            </p:txBody>
+          </p:sp>
+          <p:sp>
+            <p:nvSpPr>
+              <p:cNvPr id="38" name="Rectangle 4">
+                <a:extLst>
+                  <a:ext uri="{FF2B5EF4-FFF2-40B4-BE49-F238E27FC236}">
+                    <a16:creationId xmlns:a16="http://schemas.microsoft.com/office/drawing/2014/main" id="{396DE008-8E8B-F9E0-A20F-E8ABC14E70E2}"/>
+                  </a:ext>
+                </a:extLst>
+              </p:cNvPr>
+              <p:cNvSpPr/>
+              <p:nvPr/>
+            </p:nvSpPr>
+            <p:spPr>
+              <a:xfrm>
+                <a:off x="4723402" y="4333058"/>
+                <a:ext cx="152400" cy="152400"/>
+              </a:xfrm>
+              <a:prstGeom prst="rect">
+                <a:avLst/>
+              </a:prstGeom>
+              <a:solidFill>
+                <a:srgbClr val="FFFFFF"/>
+              </a:solidFill>
+              <a:ln w="4233">
+                <a:solidFill>
+                  <a:srgbClr val="333333"/>
+                </a:solidFill>
+              </a:ln>
+              <a:effectLst/>
+            </p:spPr>
+            <p:style>
+              <a:lnRef idx="1">
+                <a:schemeClr val="accent1"/>
+              </a:lnRef>
+              <a:fillRef idx="3">
+                <a:schemeClr val="accent1"/>
+              </a:fillRef>
+              <a:effectRef idx="2">
+                <a:schemeClr val="accent1"/>
+              </a:effectRef>
+              <a:fontRef idx="minor">
+                <a:schemeClr val="lt1"/>
+              </a:fontRef>
+            </p:style>
+            <p:txBody>
+              <a:bodyPr wrap="square" lIns="12192" tIns="6096" rIns="12192" bIns="6096" rtlCol="0" anchor="ctr"/>
+              <a:lstStyle/>
+              <a:p>
+                <a:pPr algn="ctr"/>
+                <a:r>
+                  <a:rPr sz="600" b="1">
+                    <a:solidFill>
+                      <a:srgbClr val="333333"/>
+                    </a:solidFill>
+                    <a:latin typeface="맑은 고딕"/>
+                    <a:ea typeface="맑은 고딕"/>
+                  </a:rPr>
+                  <a:t>1</a:t>
+                </a:r>
+              </a:p>
+            </p:txBody>
+          </p:sp>
+          <p:sp>
+            <p:nvSpPr>
+              <p:cNvPr id="39" name="Rectangle 5">
+                <a:extLst>
+                  <a:ext uri="{FF2B5EF4-FFF2-40B4-BE49-F238E27FC236}">
+                    <a16:creationId xmlns:a16="http://schemas.microsoft.com/office/drawing/2014/main" id="{7CCDB098-877F-BD88-898D-2C1CC8FFB7C9}"/>
+                  </a:ext>
+                </a:extLst>
+              </p:cNvPr>
+              <p:cNvSpPr/>
+              <p:nvPr/>
+            </p:nvSpPr>
+            <p:spPr>
+              <a:xfrm>
+                <a:off x="4900185" y="4333058"/>
+                <a:ext cx="152400" cy="152400"/>
+              </a:xfrm>
+              <a:prstGeom prst="rect">
+                <a:avLst/>
+              </a:prstGeom>
+              <a:solidFill>
+                <a:srgbClr val="FFFFFF"/>
+              </a:solidFill>
+              <a:ln w="4233">
+                <a:solidFill>
+                  <a:srgbClr val="333333"/>
+                </a:solidFill>
+              </a:ln>
+              <a:effectLst/>
+            </p:spPr>
+            <p:style>
+              <a:lnRef idx="1">
+                <a:schemeClr val="accent1"/>
+              </a:lnRef>
+              <a:fillRef idx="3">
+                <a:schemeClr val="accent1"/>
+              </a:fillRef>
+              <a:effectRef idx="2">
+                <a:schemeClr val="accent1"/>
+              </a:effectRef>
+              <a:fontRef idx="minor">
+                <a:schemeClr val="lt1"/>
+              </a:fontRef>
+            </p:style>
+            <p:txBody>
+              <a:bodyPr wrap="square" lIns="12192" tIns="6096" rIns="12192" bIns="6096" rtlCol="0" anchor="ctr"/>
+              <a:lstStyle/>
+              <a:p>
+                <a:pPr algn="ctr"/>
+                <a:r>
+                  <a:rPr sz="600" b="1">
+                    <a:solidFill>
+                      <a:srgbClr val="333333"/>
+                    </a:solidFill>
+                    <a:latin typeface="맑은 고딕"/>
+                    <a:ea typeface="맑은 고딕"/>
+                  </a:rPr>
+                  <a:t>4</a:t>
+                </a:r>
+              </a:p>
+            </p:txBody>
+          </p:sp>
+          <p:sp>
+            <p:nvSpPr>
+              <p:cNvPr id="40" name="Rectangle 6">
+                <a:extLst>
+                  <a:ext uri="{FF2B5EF4-FFF2-40B4-BE49-F238E27FC236}">
+                    <a16:creationId xmlns:a16="http://schemas.microsoft.com/office/drawing/2014/main" id="{AADD7C06-939C-E566-59A7-F75ECB908A28}"/>
+                  </a:ext>
+                </a:extLst>
+              </p:cNvPr>
+              <p:cNvSpPr/>
+              <p:nvPr/>
+            </p:nvSpPr>
+            <p:spPr>
+              <a:xfrm>
+                <a:off x="5076969" y="4333058"/>
+                <a:ext cx="152400" cy="152400"/>
+              </a:xfrm>
+              <a:prstGeom prst="rect">
+                <a:avLst/>
+              </a:prstGeom>
+              <a:solidFill>
+                <a:srgbClr val="FFFFFF"/>
+              </a:solidFill>
+              <a:ln w="4233">
+                <a:solidFill>
+                  <a:srgbClr val="333333"/>
+                </a:solidFill>
+              </a:ln>
+              <a:effectLst/>
+            </p:spPr>
+            <p:style>
+              <a:lnRef idx="1">
+                <a:schemeClr val="accent1"/>
+              </a:lnRef>
+              <a:fillRef idx="3">
+                <a:schemeClr val="accent1"/>
+              </a:fillRef>
+              <a:effectRef idx="2">
+                <a:schemeClr val="accent1"/>
+              </a:effectRef>
+              <a:fontRef idx="minor">
+                <a:schemeClr val="lt1"/>
+              </a:fontRef>
+            </p:style>
+            <p:txBody>
+              <a:bodyPr wrap="square" lIns="12192" tIns="6096" rIns="12192" bIns="6096" rtlCol="0" anchor="ctr"/>
+              <a:lstStyle/>
+              <a:p>
+                <a:pPr algn="ctr"/>
+                <a:r>
+                  <a:rPr sz="600" b="1">
+                    <a:solidFill>
+                      <a:srgbClr val="333333"/>
+                    </a:solidFill>
+                    <a:latin typeface="맑은 고딕"/>
+                    <a:ea typeface="맑은 고딕"/>
+                  </a:rPr>
+                  <a:t>1</a:t>
+                </a:r>
+              </a:p>
+            </p:txBody>
+          </p:sp>
+          <p:sp>
+            <p:nvSpPr>
+              <p:cNvPr id="41" name="Rectangle 7">
+                <a:extLst>
+                  <a:ext uri="{FF2B5EF4-FFF2-40B4-BE49-F238E27FC236}">
+                    <a16:creationId xmlns:a16="http://schemas.microsoft.com/office/drawing/2014/main" id="{5993AA03-CEF1-14EC-5E70-534424E88481}"/>
+                  </a:ext>
+                </a:extLst>
+              </p:cNvPr>
+              <p:cNvSpPr/>
+              <p:nvPr/>
+            </p:nvSpPr>
+            <p:spPr>
+              <a:xfrm>
+                <a:off x="5253753" y="4333058"/>
+                <a:ext cx="152400" cy="152400"/>
+              </a:xfrm>
+              <a:prstGeom prst="rect">
+                <a:avLst/>
+              </a:prstGeom>
+              <a:solidFill>
+                <a:srgbClr val="FFFFFF"/>
+              </a:solidFill>
+              <a:ln w="4233">
+                <a:solidFill>
+                  <a:srgbClr val="333333"/>
+                </a:solidFill>
+              </a:ln>
+              <a:effectLst/>
+            </p:spPr>
+            <p:style>
+              <a:lnRef idx="1">
+                <a:schemeClr val="accent1"/>
+              </a:lnRef>
+              <a:fillRef idx="3">
+                <a:schemeClr val="accent1"/>
+              </a:fillRef>
+              <a:effectRef idx="2">
+                <a:schemeClr val="accent1"/>
+              </a:effectRef>
+              <a:fontRef idx="minor">
+                <a:schemeClr val="lt1"/>
+              </a:fontRef>
+            </p:style>
+            <p:txBody>
+              <a:bodyPr wrap="square" lIns="12192" tIns="6096" rIns="12192" bIns="6096" rtlCol="0" anchor="ctr"/>
+              <a:lstStyle/>
+              <a:p>
+                <a:pPr algn="ctr"/>
+                <a:r>
+                  <a:rPr sz="600" b="1">
+                    <a:solidFill>
+                      <a:srgbClr val="333333"/>
+                    </a:solidFill>
+                    <a:latin typeface="맑은 고딕"/>
+                    <a:ea typeface="맑은 고딕"/>
+                  </a:rPr>
+                  <a:t>5</a:t>
+                </a:r>
+              </a:p>
+            </p:txBody>
+          </p:sp>
+          <p:cxnSp>
+            <p:nvCxnSpPr>
+              <p:cNvPr id="42" name="Connector 8">
+                <a:extLst>
+                  <a:ext uri="{FF2B5EF4-FFF2-40B4-BE49-F238E27FC236}">
+                    <a16:creationId xmlns:a16="http://schemas.microsoft.com/office/drawing/2014/main" id="{15F7A10F-9DD1-CEA6-BB41-D41215BE847C}"/>
+                  </a:ext>
+                </a:extLst>
+              </p:cNvPr>
+              <p:cNvCxnSpPr>
+                <a:cxnSpLocks/>
+              </p:cNvCxnSpPr>
+              <p:nvPr/>
+            </p:nvCxnSpPr>
+            <p:spPr>
+              <a:xfrm flipH="1">
+                <a:off x="3905762" y="4510194"/>
+                <a:ext cx="1068594" cy="188624"/>
+              </a:xfrm>
+              <a:prstGeom prst="line">
+                <a:avLst/>
+              </a:prstGeom>
+              <a:ln w="5291">
+                <a:solidFill>
+                  <a:srgbClr val="777777"/>
+                </a:solidFill>
+                <a:tailEnd type="triangle" w="med" len="med"/>
+              </a:ln>
+              <a:effectLst/>
+            </p:spPr>
+            <p:style>
+              <a:lnRef idx="2">
+                <a:schemeClr val="accent1"/>
+              </a:lnRef>
+              <a:fillRef idx="0">
+                <a:schemeClr val="accent1"/>
+              </a:fillRef>
+              <a:effectRef idx="1">
+                <a:schemeClr val="accent1"/>
+              </a:effectRef>
+              <a:fontRef idx="minor">
+                <a:schemeClr val="tx1"/>
+              </a:fontRef>
+            </p:style>
+          </p:cxnSp>
+          <p:sp>
+            <p:nvSpPr>
+              <p:cNvPr id="43" name="TextBox 42">
+                <a:extLst>
+                  <a:ext uri="{FF2B5EF4-FFF2-40B4-BE49-F238E27FC236}">
+                    <a16:creationId xmlns:a16="http://schemas.microsoft.com/office/drawing/2014/main" id="{E91060F0-77DB-DBC0-3477-BF10644305BB}"/>
+                  </a:ext>
+                </a:extLst>
+              </p:cNvPr>
+              <p:cNvSpPr txBox="1"/>
+              <p:nvPr/>
+            </p:nvSpPr>
+            <p:spPr>
+              <a:xfrm>
+                <a:off x="3245530" y="4706778"/>
+                <a:ext cx="1219200" cy="169277"/>
+              </a:xfrm>
+              <a:prstGeom prst="rect">
+                <a:avLst/>
+              </a:prstGeom>
+              <a:noFill/>
+            </p:spPr>
+            <p:txBody>
+              <a:bodyPr wrap="square" anchor="t">
+                <a:spAutoFit/>
+              </a:bodyPr>
+              <a:lstStyle/>
+              <a:p>
+                <a:pPr algn="ctr"/>
+                <a:r>
+                  <a:rPr sz="500" b="1" dirty="0" err="1">
+                    <a:solidFill>
+                      <a:srgbClr val="333333"/>
+                    </a:solidFill>
+                    <a:latin typeface="맑은 고딕"/>
+                    <a:ea typeface="맑은 고딕"/>
+                  </a:rPr>
+                  <a:t>기준</a:t>
+                </a:r>
+                <a:r>
+                  <a:rPr sz="500" b="1" dirty="0">
+                    <a:solidFill>
+                      <a:srgbClr val="333333"/>
+                    </a:solidFill>
+                    <a:latin typeface="맑은 고딕"/>
+                    <a:ea typeface="맑은 고딕"/>
+                  </a:rPr>
+                  <a:t> A </a:t>
+                </a:r>
+                <a:r>
+                  <a:rPr lang="en-US" altLang="ko-KR" sz="500" b="1" dirty="0">
+                    <a:solidFill>
+                      <a:srgbClr val="333333"/>
+                    </a:solidFill>
+                    <a:latin typeface="맑은 고딕"/>
+                    <a:ea typeface="맑은 고딕"/>
+                  </a:rPr>
+                  <a:t>-</a:t>
+                </a:r>
+                <a:r>
+                  <a:rPr sz="500" b="1" dirty="0">
+                    <a:solidFill>
+                      <a:srgbClr val="333333"/>
+                    </a:solidFill>
+                    <a:latin typeface="맑은 고딕"/>
+                    <a:ea typeface="맑은 고딕"/>
+                  </a:rPr>
+                  <a:t> </a:t>
+                </a:r>
+                <a:r>
+                  <a:rPr sz="500" b="1" dirty="0" err="1">
+                    <a:solidFill>
+                      <a:srgbClr val="333333"/>
+                    </a:solidFill>
+                    <a:latin typeface="맑은 고딕"/>
+                    <a:ea typeface="맑은 고딕"/>
+                  </a:rPr>
+                  <a:t>오름차순</a:t>
+                </a:r>
+                <a:r>
+                  <a:rPr sz="500" b="1" dirty="0">
+                    <a:solidFill>
+                      <a:srgbClr val="333333"/>
+                    </a:solidFill>
+                    <a:latin typeface="맑은 고딕"/>
+                    <a:ea typeface="맑은 고딕"/>
+                  </a:rPr>
+                  <a:t> </a:t>
+                </a:r>
+                <a:r>
+                  <a:rPr sz="500" b="1" dirty="0" err="1">
+                    <a:solidFill>
+                      <a:srgbClr val="333333"/>
+                    </a:solidFill>
+                    <a:latin typeface="맑은 고딕"/>
+                    <a:ea typeface="맑은 고딕"/>
+                  </a:rPr>
+                  <a:t>정렬</a:t>
+                </a:r>
+                <a:endParaRPr sz="500" b="1" dirty="0">
+                  <a:solidFill>
+                    <a:srgbClr val="333333"/>
+                  </a:solidFill>
+                  <a:latin typeface="맑은 고딕"/>
+                  <a:ea typeface="맑은 고딕"/>
+                </a:endParaRPr>
+              </a:p>
+            </p:txBody>
+          </p:sp>
+          <p:sp>
+            <p:nvSpPr>
+              <p:cNvPr id="44" name="Rectangle 10">
+                <a:extLst>
+                  <a:ext uri="{FF2B5EF4-FFF2-40B4-BE49-F238E27FC236}">
+                    <a16:creationId xmlns:a16="http://schemas.microsoft.com/office/drawing/2014/main" id="{6328C051-61EE-3B83-86D9-9064F54AC4B2}"/>
+                  </a:ext>
+                </a:extLst>
+              </p:cNvPr>
+              <p:cNvSpPr/>
+              <p:nvPr/>
+            </p:nvSpPr>
+            <p:spPr>
+              <a:xfrm>
+                <a:off x="3461086" y="4866458"/>
+                <a:ext cx="152400" cy="152400"/>
+              </a:xfrm>
+              <a:prstGeom prst="rect">
+                <a:avLst/>
+              </a:prstGeom>
+              <a:solidFill>
+                <a:srgbClr val="FFFFFF"/>
+              </a:solidFill>
+              <a:ln w="4233">
+                <a:solidFill>
+                  <a:srgbClr val="333333"/>
+                </a:solidFill>
+              </a:ln>
+              <a:effectLst/>
+            </p:spPr>
+            <p:style>
+              <a:lnRef idx="1">
+                <a:schemeClr val="accent1"/>
+              </a:lnRef>
+              <a:fillRef idx="3">
+                <a:schemeClr val="accent1"/>
+              </a:fillRef>
+              <a:effectRef idx="2">
+                <a:schemeClr val="accent1"/>
+              </a:effectRef>
+              <a:fontRef idx="minor">
+                <a:schemeClr val="lt1"/>
+              </a:fontRef>
+            </p:style>
+            <p:txBody>
+              <a:bodyPr wrap="square" lIns="12192" tIns="6096" rIns="12192" bIns="6096" rtlCol="0" anchor="ctr"/>
+              <a:lstStyle/>
+              <a:p>
+                <a:pPr algn="ctr"/>
+                <a:r>
+                  <a:rPr sz="600" b="1">
+                    <a:solidFill>
+                      <a:srgbClr val="333333"/>
+                    </a:solidFill>
+                    <a:latin typeface="맑은 고딕"/>
+                    <a:ea typeface="맑은 고딕"/>
+                  </a:rPr>
+                  <a:t>1</a:t>
+                </a:r>
+              </a:p>
+            </p:txBody>
+          </p:sp>
+          <p:sp>
+            <p:nvSpPr>
+              <p:cNvPr id="45" name="Rectangle 11">
+                <a:extLst>
+                  <a:ext uri="{FF2B5EF4-FFF2-40B4-BE49-F238E27FC236}">
+                    <a16:creationId xmlns:a16="http://schemas.microsoft.com/office/drawing/2014/main" id="{2599D488-F670-9781-AAC4-18D9039DD856}"/>
+                  </a:ext>
+                </a:extLst>
+              </p:cNvPr>
+              <p:cNvSpPr/>
+              <p:nvPr/>
+            </p:nvSpPr>
+            <p:spPr>
+              <a:xfrm>
+                <a:off x="3637870" y="4866458"/>
+                <a:ext cx="152400" cy="152400"/>
+              </a:xfrm>
+              <a:prstGeom prst="rect">
+                <a:avLst/>
+              </a:prstGeom>
+              <a:solidFill>
+                <a:srgbClr val="FFFFFF"/>
+              </a:solidFill>
+              <a:ln w="4233">
+                <a:solidFill>
+                  <a:srgbClr val="333333"/>
+                </a:solidFill>
+              </a:ln>
+              <a:effectLst/>
+            </p:spPr>
+            <p:style>
+              <a:lnRef idx="1">
+                <a:schemeClr val="accent1"/>
+              </a:lnRef>
+              <a:fillRef idx="3">
+                <a:schemeClr val="accent1"/>
+              </a:fillRef>
+              <a:effectRef idx="2">
+                <a:schemeClr val="accent1"/>
+              </a:effectRef>
+              <a:fontRef idx="minor">
+                <a:schemeClr val="lt1"/>
+              </a:fontRef>
+            </p:style>
+            <p:txBody>
+              <a:bodyPr wrap="square" lIns="12192" tIns="6096" rIns="12192" bIns="6096" rtlCol="0" anchor="ctr"/>
+              <a:lstStyle/>
+              <a:p>
+                <a:pPr algn="ctr"/>
+                <a:r>
+                  <a:rPr sz="600" b="1">
+                    <a:solidFill>
+                      <a:srgbClr val="333333"/>
+                    </a:solidFill>
+                    <a:latin typeface="맑은 고딕"/>
+                    <a:ea typeface="맑은 고딕"/>
+                  </a:rPr>
+                  <a:t>1</a:t>
+                </a:r>
+              </a:p>
+            </p:txBody>
+          </p:sp>
+          <p:sp>
+            <p:nvSpPr>
+              <p:cNvPr id="46" name="Rectangle 12">
+                <a:extLst>
+                  <a:ext uri="{FF2B5EF4-FFF2-40B4-BE49-F238E27FC236}">
+                    <a16:creationId xmlns:a16="http://schemas.microsoft.com/office/drawing/2014/main" id="{4C40E51C-67B3-EBEA-3AD3-94CFD50BB310}"/>
+                  </a:ext>
+                </a:extLst>
+              </p:cNvPr>
+              <p:cNvSpPr/>
+              <p:nvPr/>
+            </p:nvSpPr>
+            <p:spPr>
+              <a:xfrm>
+                <a:off x="3814654" y="4866458"/>
+                <a:ext cx="152400" cy="152400"/>
+              </a:xfrm>
+              <a:prstGeom prst="rect">
+                <a:avLst/>
+              </a:prstGeom>
+              <a:solidFill>
+                <a:srgbClr val="FFFFFF"/>
+              </a:solidFill>
+              <a:ln w="4233">
+                <a:solidFill>
+                  <a:srgbClr val="333333"/>
+                </a:solidFill>
+              </a:ln>
+              <a:effectLst/>
+            </p:spPr>
+            <p:style>
+              <a:lnRef idx="1">
+                <a:schemeClr val="accent1"/>
+              </a:lnRef>
+              <a:fillRef idx="3">
+                <a:schemeClr val="accent1"/>
+              </a:fillRef>
+              <a:effectRef idx="2">
+                <a:schemeClr val="accent1"/>
+              </a:effectRef>
+              <a:fontRef idx="minor">
+                <a:schemeClr val="lt1"/>
+              </a:fontRef>
+            </p:style>
+            <p:txBody>
+              <a:bodyPr wrap="square" lIns="12192" tIns="6096" rIns="12192" bIns="6096" rtlCol="0" anchor="ctr"/>
+              <a:lstStyle/>
+              <a:p>
+                <a:pPr algn="ctr"/>
+                <a:r>
+                  <a:rPr sz="600" b="1">
+                    <a:solidFill>
+                      <a:srgbClr val="333333"/>
+                    </a:solidFill>
+                    <a:latin typeface="맑은 고딕"/>
+                    <a:ea typeface="맑은 고딕"/>
+                  </a:rPr>
+                  <a:t>3</a:t>
+                </a:r>
+              </a:p>
+            </p:txBody>
+          </p:sp>
+          <p:sp>
+            <p:nvSpPr>
+              <p:cNvPr id="47" name="Rectangle 13">
+                <a:extLst>
+                  <a:ext uri="{FF2B5EF4-FFF2-40B4-BE49-F238E27FC236}">
+                    <a16:creationId xmlns:a16="http://schemas.microsoft.com/office/drawing/2014/main" id="{7AE4DC3D-49EE-8594-55E3-F5EF922F4994}"/>
+                  </a:ext>
+                </a:extLst>
+              </p:cNvPr>
+              <p:cNvSpPr/>
+              <p:nvPr/>
+            </p:nvSpPr>
+            <p:spPr>
+              <a:xfrm>
+                <a:off x="3991438" y="4866458"/>
+                <a:ext cx="152400" cy="152400"/>
+              </a:xfrm>
+              <a:prstGeom prst="rect">
+                <a:avLst/>
+              </a:prstGeom>
+              <a:solidFill>
+                <a:srgbClr val="FFFFFF"/>
+              </a:solidFill>
+              <a:ln w="4233">
+                <a:solidFill>
+                  <a:srgbClr val="333333"/>
+                </a:solidFill>
+              </a:ln>
+              <a:effectLst/>
+            </p:spPr>
+            <p:style>
+              <a:lnRef idx="1">
+                <a:schemeClr val="accent1"/>
+              </a:lnRef>
+              <a:fillRef idx="3">
+                <a:schemeClr val="accent1"/>
+              </a:fillRef>
+              <a:effectRef idx="2">
+                <a:schemeClr val="accent1"/>
+              </a:effectRef>
+              <a:fontRef idx="minor">
+                <a:schemeClr val="lt1"/>
+              </a:fontRef>
+            </p:style>
+            <p:txBody>
+              <a:bodyPr wrap="square" lIns="12192" tIns="6096" rIns="12192" bIns="6096" rtlCol="0" anchor="ctr"/>
+              <a:lstStyle/>
+              <a:p>
+                <a:pPr algn="ctr"/>
+                <a:r>
+                  <a:rPr sz="600" b="1">
+                    <a:solidFill>
+                      <a:srgbClr val="333333"/>
+                    </a:solidFill>
+                    <a:latin typeface="맑은 고딕"/>
+                    <a:ea typeface="맑은 고딕"/>
+                  </a:rPr>
+                  <a:t>4</a:t>
+                </a:r>
+              </a:p>
+            </p:txBody>
+          </p:sp>
+          <p:sp>
+            <p:nvSpPr>
+              <p:cNvPr id="48" name="Rectangle 14">
+                <a:extLst>
+                  <a:ext uri="{FF2B5EF4-FFF2-40B4-BE49-F238E27FC236}">
+                    <a16:creationId xmlns:a16="http://schemas.microsoft.com/office/drawing/2014/main" id="{AB929C1B-46D5-986F-9C41-7A21F3A28E1F}"/>
+                  </a:ext>
+                </a:extLst>
+              </p:cNvPr>
+              <p:cNvSpPr/>
+              <p:nvPr/>
+            </p:nvSpPr>
+            <p:spPr>
+              <a:xfrm>
+                <a:off x="4168222" y="4866458"/>
+                <a:ext cx="152400" cy="152400"/>
+              </a:xfrm>
+              <a:prstGeom prst="rect">
+                <a:avLst/>
+              </a:prstGeom>
+              <a:solidFill>
+                <a:srgbClr val="FFFFFF"/>
+              </a:solidFill>
+              <a:ln w="4233">
+                <a:solidFill>
+                  <a:srgbClr val="333333"/>
+                </a:solidFill>
+              </a:ln>
+              <a:effectLst/>
+            </p:spPr>
+            <p:style>
+              <a:lnRef idx="1">
+                <a:schemeClr val="accent1"/>
+              </a:lnRef>
+              <a:fillRef idx="3">
+                <a:schemeClr val="accent1"/>
+              </a:fillRef>
+              <a:effectRef idx="2">
+                <a:schemeClr val="accent1"/>
+              </a:effectRef>
+              <a:fontRef idx="minor">
+                <a:schemeClr val="lt1"/>
+              </a:fontRef>
+            </p:style>
+            <p:txBody>
+              <a:bodyPr wrap="square" lIns="12192" tIns="6096" rIns="12192" bIns="6096" rtlCol="0" anchor="ctr"/>
+              <a:lstStyle/>
+              <a:p>
+                <a:pPr algn="ctr"/>
+                <a:r>
+                  <a:rPr sz="600" b="1">
+                    <a:solidFill>
+                      <a:srgbClr val="333333"/>
+                    </a:solidFill>
+                    <a:latin typeface="맑은 고딕"/>
+                    <a:ea typeface="맑은 고딕"/>
+                  </a:rPr>
+                  <a:t>5</a:t>
+                </a:r>
+              </a:p>
+            </p:txBody>
+          </p:sp>
+          <p:cxnSp>
+            <p:nvCxnSpPr>
+              <p:cNvPr id="49" name="Connector 16">
+                <a:extLst>
+                  <a:ext uri="{FF2B5EF4-FFF2-40B4-BE49-F238E27FC236}">
+                    <a16:creationId xmlns:a16="http://schemas.microsoft.com/office/drawing/2014/main" id="{D49AB154-429B-8940-AC55-55C0D4638F47}"/>
+                  </a:ext>
+                </a:extLst>
+              </p:cNvPr>
+              <p:cNvCxnSpPr>
+                <a:cxnSpLocks/>
+              </p:cNvCxnSpPr>
+              <p:nvPr/>
+            </p:nvCxnSpPr>
+            <p:spPr>
+              <a:xfrm>
+                <a:off x="4976385" y="4510194"/>
+                <a:ext cx="0" cy="188624"/>
+              </a:xfrm>
+              <a:prstGeom prst="line">
+                <a:avLst/>
+              </a:prstGeom>
+              <a:ln w="5291">
+                <a:solidFill>
+                  <a:srgbClr val="777777"/>
+                </a:solidFill>
+                <a:tailEnd type="triangle" w="med" len="med"/>
+              </a:ln>
+              <a:effectLst/>
+            </p:spPr>
+            <p:style>
+              <a:lnRef idx="2">
+                <a:schemeClr val="accent1"/>
+              </a:lnRef>
+              <a:fillRef idx="0">
+                <a:schemeClr val="accent1"/>
+              </a:fillRef>
+              <a:effectRef idx="1">
+                <a:schemeClr val="accent1"/>
+              </a:effectRef>
+              <a:fontRef idx="minor">
+                <a:schemeClr val="tx1"/>
+              </a:fontRef>
+            </p:style>
+          </p:cxnSp>
+          <p:sp>
+            <p:nvSpPr>
+              <p:cNvPr id="50" name="TextBox 49">
+                <a:extLst>
+                  <a:ext uri="{FF2B5EF4-FFF2-40B4-BE49-F238E27FC236}">
+                    <a16:creationId xmlns:a16="http://schemas.microsoft.com/office/drawing/2014/main" id="{016A07C4-0B9B-82FA-D664-DD64444B7017}"/>
+                  </a:ext>
+                </a:extLst>
+              </p:cNvPr>
+              <p:cNvSpPr txBox="1"/>
+              <p:nvPr/>
+            </p:nvSpPr>
+            <p:spPr>
+              <a:xfrm>
+                <a:off x="4366786" y="4706778"/>
+                <a:ext cx="1260952" cy="169277"/>
+              </a:xfrm>
+              <a:prstGeom prst="rect">
+                <a:avLst/>
+              </a:prstGeom>
+              <a:noFill/>
+            </p:spPr>
+            <p:txBody>
+              <a:bodyPr wrap="square" anchor="t">
+                <a:spAutoFit/>
+              </a:bodyPr>
+              <a:lstStyle/>
+              <a:p>
+                <a:pPr algn="ctr"/>
+                <a:r>
+                  <a:rPr sz="500" b="1" dirty="0" err="1">
+                    <a:solidFill>
+                      <a:srgbClr val="333333"/>
+                    </a:solidFill>
+                    <a:latin typeface="맑은 고딕"/>
+                    <a:ea typeface="맑은 고딕"/>
+                  </a:rPr>
+                  <a:t>기준</a:t>
+                </a:r>
+                <a:r>
+                  <a:rPr sz="500" b="1" dirty="0">
+                    <a:solidFill>
+                      <a:srgbClr val="333333"/>
+                    </a:solidFill>
+                    <a:latin typeface="맑은 고딕"/>
+                    <a:ea typeface="맑은 고딕"/>
+                  </a:rPr>
+                  <a:t> B </a:t>
+                </a:r>
+                <a:r>
+                  <a:rPr lang="en-US" altLang="ko-KR" sz="500" b="1" dirty="0">
+                    <a:solidFill>
+                      <a:srgbClr val="333333"/>
+                    </a:solidFill>
+                    <a:latin typeface="맑은 고딕"/>
+                    <a:ea typeface="맑은 고딕"/>
+                  </a:rPr>
+                  <a:t>-</a:t>
+                </a:r>
+                <a:r>
+                  <a:rPr sz="500" b="1" dirty="0">
+                    <a:solidFill>
+                      <a:srgbClr val="333333"/>
+                    </a:solidFill>
+                    <a:latin typeface="맑은 고딕"/>
+                    <a:ea typeface="맑은 고딕"/>
+                  </a:rPr>
+                  <a:t> </a:t>
+                </a:r>
+                <a:r>
+                  <a:rPr sz="500" b="1" dirty="0" err="1">
+                    <a:solidFill>
+                      <a:srgbClr val="333333"/>
+                    </a:solidFill>
+                    <a:latin typeface="맑은 고딕"/>
+                    <a:ea typeface="맑은 고딕"/>
+                  </a:rPr>
+                  <a:t>잉여류</a:t>
+                </a:r>
+                <a:r>
+                  <a:rPr sz="500" b="1" dirty="0">
+                    <a:solidFill>
+                      <a:srgbClr val="333333"/>
+                    </a:solidFill>
+                    <a:latin typeface="맑은 고딕"/>
+                    <a:ea typeface="맑은 고딕"/>
+                  </a:rPr>
+                  <a:t> </a:t>
+                </a:r>
+                <a:r>
+                  <a:rPr sz="500" b="1" dirty="0" err="1">
+                    <a:solidFill>
+                      <a:srgbClr val="333333"/>
+                    </a:solidFill>
+                    <a:latin typeface="맑은 고딕"/>
+                    <a:ea typeface="맑은 고딕"/>
+                  </a:rPr>
+                  <a:t>기반</a:t>
+                </a:r>
+                <a:r>
+                  <a:rPr sz="500" b="1" dirty="0">
+                    <a:solidFill>
+                      <a:srgbClr val="333333"/>
+                    </a:solidFill>
+                    <a:latin typeface="맑은 고딕"/>
+                    <a:ea typeface="맑은 고딕"/>
+                  </a:rPr>
+                  <a:t> </a:t>
+                </a:r>
+                <a:r>
+                  <a:rPr sz="500" b="1" dirty="0" err="1">
+                    <a:solidFill>
+                      <a:srgbClr val="333333"/>
+                    </a:solidFill>
+                    <a:latin typeface="맑은 고딕"/>
+                    <a:ea typeface="맑은 고딕"/>
+                  </a:rPr>
+                  <a:t>정렬</a:t>
+                </a:r>
+                <a:r>
+                  <a:rPr sz="500" b="1" dirty="0">
+                    <a:solidFill>
+                      <a:srgbClr val="333333"/>
+                    </a:solidFill>
+                    <a:latin typeface="맑은 고딕"/>
+                    <a:ea typeface="맑은 고딕"/>
+                  </a:rPr>
+                  <a:t> (mod 3)</a:t>
+                </a:r>
+              </a:p>
+            </p:txBody>
+          </p:sp>
+          <p:sp>
+            <p:nvSpPr>
+              <p:cNvPr id="51" name="Rectangle 18">
+                <a:extLst>
+                  <a:ext uri="{FF2B5EF4-FFF2-40B4-BE49-F238E27FC236}">
+                    <a16:creationId xmlns:a16="http://schemas.microsoft.com/office/drawing/2014/main" id="{56ED826F-6F7D-CCB5-76A1-EA49A9AF35F1}"/>
+                  </a:ext>
+                </a:extLst>
+              </p:cNvPr>
+              <p:cNvSpPr/>
+              <p:nvPr/>
+            </p:nvSpPr>
+            <p:spPr>
+              <a:xfrm>
+                <a:off x="4546617" y="4866458"/>
+                <a:ext cx="152400" cy="152400"/>
+              </a:xfrm>
+              <a:prstGeom prst="rect">
+                <a:avLst/>
+              </a:prstGeom>
+              <a:solidFill>
+                <a:srgbClr val="DCE6F1"/>
+              </a:solidFill>
+              <a:ln w="4233">
+                <a:solidFill>
+                  <a:srgbClr val="333333"/>
+                </a:solidFill>
+              </a:ln>
+              <a:effectLst/>
+            </p:spPr>
+            <p:style>
+              <a:lnRef idx="1">
+                <a:schemeClr val="accent1"/>
+              </a:lnRef>
+              <a:fillRef idx="3">
+                <a:schemeClr val="accent1"/>
+              </a:fillRef>
+              <a:effectRef idx="2">
+                <a:schemeClr val="accent1"/>
+              </a:effectRef>
+              <a:fontRef idx="minor">
+                <a:schemeClr val="lt1"/>
+              </a:fontRef>
+            </p:style>
+            <p:txBody>
+              <a:bodyPr wrap="square" lIns="12192" tIns="6096" rIns="12192" bIns="6096" rtlCol="0" anchor="ctr"/>
+              <a:lstStyle/>
+              <a:p>
+                <a:pPr algn="ctr"/>
+                <a:r>
+                  <a:rPr sz="600" b="1">
+                    <a:solidFill>
+                      <a:srgbClr val="333333"/>
+                    </a:solidFill>
+                    <a:latin typeface="맑은 고딕"/>
+                    <a:ea typeface="맑은 고딕"/>
+                  </a:rPr>
+                  <a:t>3</a:t>
+                </a:r>
+              </a:p>
+            </p:txBody>
+          </p:sp>
+          <p:sp>
+            <p:nvSpPr>
+              <p:cNvPr id="52" name="Rectangle 19">
+                <a:extLst>
+                  <a:ext uri="{FF2B5EF4-FFF2-40B4-BE49-F238E27FC236}">
+                    <a16:creationId xmlns:a16="http://schemas.microsoft.com/office/drawing/2014/main" id="{A3D7B0EE-BC96-E9BD-9B79-5468972B9012}"/>
+                  </a:ext>
+                </a:extLst>
+              </p:cNvPr>
+              <p:cNvSpPr/>
+              <p:nvPr/>
+            </p:nvSpPr>
+            <p:spPr>
+              <a:xfrm>
+                <a:off x="4723402" y="4866458"/>
+                <a:ext cx="152400" cy="152400"/>
+              </a:xfrm>
+              <a:prstGeom prst="rect">
+                <a:avLst/>
+              </a:prstGeom>
+              <a:solidFill>
+                <a:srgbClr val="FDEBD0"/>
+              </a:solidFill>
+              <a:ln w="4233">
+                <a:solidFill>
+                  <a:srgbClr val="333333"/>
+                </a:solidFill>
+              </a:ln>
+              <a:effectLst/>
+            </p:spPr>
+            <p:style>
+              <a:lnRef idx="1">
+                <a:schemeClr val="accent1"/>
+              </a:lnRef>
+              <a:fillRef idx="3">
+                <a:schemeClr val="accent1"/>
+              </a:fillRef>
+              <a:effectRef idx="2">
+                <a:schemeClr val="accent1"/>
+              </a:effectRef>
+              <a:fontRef idx="minor">
+                <a:schemeClr val="lt1"/>
+              </a:fontRef>
+            </p:style>
+            <p:txBody>
+              <a:bodyPr wrap="square" lIns="12192" tIns="6096" rIns="12192" bIns="6096" rtlCol="0" anchor="ctr"/>
+              <a:lstStyle/>
+              <a:p>
+                <a:pPr algn="ctr"/>
+                <a:r>
+                  <a:rPr sz="600" b="1">
+                    <a:solidFill>
+                      <a:srgbClr val="333333"/>
+                    </a:solidFill>
+                    <a:latin typeface="맑은 고딕"/>
+                    <a:ea typeface="맑은 고딕"/>
+                  </a:rPr>
+                  <a:t>1</a:t>
+                </a:r>
+              </a:p>
+            </p:txBody>
+          </p:sp>
+          <p:sp>
+            <p:nvSpPr>
+              <p:cNvPr id="53" name="Rectangle 20">
+                <a:extLst>
+                  <a:ext uri="{FF2B5EF4-FFF2-40B4-BE49-F238E27FC236}">
+                    <a16:creationId xmlns:a16="http://schemas.microsoft.com/office/drawing/2014/main" id="{726D7316-B0E0-776E-1C02-E564BC9AC693}"/>
+                  </a:ext>
+                </a:extLst>
+              </p:cNvPr>
+              <p:cNvSpPr/>
+              <p:nvPr/>
+            </p:nvSpPr>
+            <p:spPr>
+              <a:xfrm>
+                <a:off x="4900185" y="4866458"/>
+                <a:ext cx="152400" cy="152400"/>
+              </a:xfrm>
+              <a:prstGeom prst="rect">
+                <a:avLst/>
+              </a:prstGeom>
+              <a:solidFill>
+                <a:srgbClr val="FDEBD0"/>
+              </a:solidFill>
+              <a:ln w="4233">
+                <a:solidFill>
+                  <a:srgbClr val="333333"/>
+                </a:solidFill>
+              </a:ln>
+              <a:effectLst/>
+            </p:spPr>
+            <p:style>
+              <a:lnRef idx="1">
+                <a:schemeClr val="accent1"/>
+              </a:lnRef>
+              <a:fillRef idx="3">
+                <a:schemeClr val="accent1"/>
+              </a:fillRef>
+              <a:effectRef idx="2">
+                <a:schemeClr val="accent1"/>
+              </a:effectRef>
+              <a:fontRef idx="minor">
+                <a:schemeClr val="lt1"/>
+              </a:fontRef>
+            </p:style>
+            <p:txBody>
+              <a:bodyPr wrap="square" lIns="12192" tIns="6096" rIns="12192" bIns="6096" rtlCol="0" anchor="ctr"/>
+              <a:lstStyle/>
+              <a:p>
+                <a:pPr algn="ctr"/>
+                <a:r>
+                  <a:rPr sz="600" b="1">
+                    <a:solidFill>
+                      <a:srgbClr val="333333"/>
+                    </a:solidFill>
+                    <a:latin typeface="맑은 고딕"/>
+                    <a:ea typeface="맑은 고딕"/>
+                  </a:rPr>
+                  <a:t>1</a:t>
+                </a:r>
+              </a:p>
+            </p:txBody>
+          </p:sp>
+          <p:sp>
+            <p:nvSpPr>
+              <p:cNvPr id="54" name="Rectangle 21">
+                <a:extLst>
+                  <a:ext uri="{FF2B5EF4-FFF2-40B4-BE49-F238E27FC236}">
+                    <a16:creationId xmlns:a16="http://schemas.microsoft.com/office/drawing/2014/main" id="{6CADFB5C-D6BF-0406-B0B4-A5A45A4F9CA5}"/>
+                  </a:ext>
+                </a:extLst>
+              </p:cNvPr>
+              <p:cNvSpPr/>
+              <p:nvPr/>
+            </p:nvSpPr>
+            <p:spPr>
+              <a:xfrm>
+                <a:off x="5076969" y="4866458"/>
+                <a:ext cx="152400" cy="152400"/>
+              </a:xfrm>
+              <a:prstGeom prst="rect">
+                <a:avLst/>
+              </a:prstGeom>
+              <a:solidFill>
+                <a:srgbClr val="FDEBD0"/>
+              </a:solidFill>
+              <a:ln w="4233">
+                <a:solidFill>
+                  <a:srgbClr val="333333"/>
+                </a:solidFill>
+              </a:ln>
+              <a:effectLst/>
+            </p:spPr>
+            <p:style>
+              <a:lnRef idx="1">
+                <a:schemeClr val="accent1"/>
+              </a:lnRef>
+              <a:fillRef idx="3">
+                <a:schemeClr val="accent1"/>
+              </a:fillRef>
+              <a:effectRef idx="2">
+                <a:schemeClr val="accent1"/>
+              </a:effectRef>
+              <a:fontRef idx="minor">
+                <a:schemeClr val="lt1"/>
+              </a:fontRef>
+            </p:style>
+            <p:txBody>
+              <a:bodyPr wrap="square" lIns="12192" tIns="6096" rIns="12192" bIns="6096" rtlCol="0" anchor="ctr"/>
+              <a:lstStyle/>
+              <a:p>
+                <a:pPr algn="ctr"/>
+                <a:r>
+                  <a:rPr sz="600" b="1">
+                    <a:solidFill>
+                      <a:srgbClr val="333333"/>
+                    </a:solidFill>
+                    <a:latin typeface="맑은 고딕"/>
+                    <a:ea typeface="맑은 고딕"/>
+                  </a:rPr>
+                  <a:t>4</a:t>
+                </a:r>
+              </a:p>
+            </p:txBody>
+          </p:sp>
+          <p:sp>
+            <p:nvSpPr>
+              <p:cNvPr id="55" name="Rectangle 22">
+                <a:extLst>
+                  <a:ext uri="{FF2B5EF4-FFF2-40B4-BE49-F238E27FC236}">
+                    <a16:creationId xmlns:a16="http://schemas.microsoft.com/office/drawing/2014/main" id="{6C060DD7-BF7B-AE5C-9349-282865EB0729}"/>
+                  </a:ext>
+                </a:extLst>
+              </p:cNvPr>
+              <p:cNvSpPr/>
+              <p:nvPr/>
+            </p:nvSpPr>
+            <p:spPr>
+              <a:xfrm>
+                <a:off x="5253753" y="4866458"/>
+                <a:ext cx="152400" cy="152400"/>
+              </a:xfrm>
+              <a:prstGeom prst="rect">
+                <a:avLst/>
+              </a:prstGeom>
+              <a:solidFill>
+                <a:srgbClr val="D5F5E3"/>
+              </a:solidFill>
+              <a:ln w="4233">
+                <a:solidFill>
+                  <a:srgbClr val="333333"/>
+                </a:solidFill>
+              </a:ln>
+              <a:effectLst/>
+            </p:spPr>
+            <p:style>
+              <a:lnRef idx="1">
+                <a:schemeClr val="accent1"/>
+              </a:lnRef>
+              <a:fillRef idx="3">
+                <a:schemeClr val="accent1"/>
+              </a:fillRef>
+              <a:effectRef idx="2">
+                <a:schemeClr val="accent1"/>
+              </a:effectRef>
+              <a:fontRef idx="minor">
+                <a:schemeClr val="lt1"/>
+              </a:fontRef>
+            </p:style>
+            <p:txBody>
+              <a:bodyPr wrap="square" lIns="12192" tIns="6096" rIns="12192" bIns="6096" rtlCol="0" anchor="ctr"/>
+              <a:lstStyle/>
+              <a:p>
+                <a:pPr algn="ctr"/>
+                <a:r>
+                  <a:rPr sz="600" b="1">
+                    <a:solidFill>
+                      <a:srgbClr val="333333"/>
+                    </a:solidFill>
+                    <a:latin typeface="맑은 고딕"/>
+                    <a:ea typeface="맑은 고딕"/>
+                  </a:rPr>
+                  <a:t>5</a:t>
+                </a:r>
+              </a:p>
+            </p:txBody>
+          </p:sp>
+          <p:cxnSp>
+            <p:nvCxnSpPr>
+              <p:cNvPr id="61" name="Connector 29">
+                <a:extLst>
+                  <a:ext uri="{FF2B5EF4-FFF2-40B4-BE49-F238E27FC236}">
+                    <a16:creationId xmlns:a16="http://schemas.microsoft.com/office/drawing/2014/main" id="{8F757A98-29E9-2775-CF92-31C88C45F6D6}"/>
+                  </a:ext>
+                </a:extLst>
+              </p:cNvPr>
+              <p:cNvCxnSpPr>
+                <a:cxnSpLocks/>
+              </p:cNvCxnSpPr>
+              <p:nvPr/>
+            </p:nvCxnSpPr>
+            <p:spPr>
+              <a:xfrm>
+                <a:off x="4974356" y="4510194"/>
+                <a:ext cx="1070622" cy="188624"/>
+              </a:xfrm>
+              <a:prstGeom prst="line">
+                <a:avLst/>
+              </a:prstGeom>
+              <a:ln w="5291">
+                <a:solidFill>
+                  <a:srgbClr val="777777"/>
+                </a:solidFill>
+                <a:tailEnd type="triangle" w="med" len="med"/>
+              </a:ln>
+              <a:effectLst/>
+            </p:spPr>
+            <p:style>
+              <a:lnRef idx="2">
+                <a:schemeClr val="accent1"/>
+              </a:lnRef>
+              <a:fillRef idx="0">
+                <a:schemeClr val="accent1"/>
+              </a:fillRef>
+              <a:effectRef idx="1">
+                <a:schemeClr val="accent1"/>
+              </a:effectRef>
+              <a:fontRef idx="minor">
+                <a:schemeClr val="tx1"/>
+              </a:fontRef>
+            </p:style>
+          </p:cxnSp>
+          <p:sp>
+            <p:nvSpPr>
+              <p:cNvPr id="62" name="TextBox 61">
+                <a:extLst>
+                  <a:ext uri="{FF2B5EF4-FFF2-40B4-BE49-F238E27FC236}">
+                    <a16:creationId xmlns:a16="http://schemas.microsoft.com/office/drawing/2014/main" id="{C68DD229-0A96-AD3D-008C-66A0DEAA3464}"/>
+                  </a:ext>
+                </a:extLst>
+              </p:cNvPr>
+              <p:cNvSpPr txBox="1"/>
+              <p:nvPr/>
+            </p:nvSpPr>
+            <p:spPr>
+              <a:xfrm>
+                <a:off x="5472290" y="4711373"/>
+                <a:ext cx="1219200" cy="169277"/>
+              </a:xfrm>
+              <a:prstGeom prst="rect">
+                <a:avLst/>
+              </a:prstGeom>
+              <a:noFill/>
+            </p:spPr>
+            <p:txBody>
+              <a:bodyPr wrap="square" anchor="t">
+                <a:spAutoFit/>
+              </a:bodyPr>
+              <a:lstStyle/>
+              <a:p>
+                <a:pPr algn="ctr"/>
+                <a:r>
+                  <a:rPr sz="500" b="1" dirty="0" err="1">
+                    <a:solidFill>
+                      <a:srgbClr val="333333"/>
+                    </a:solidFill>
+                    <a:latin typeface="맑은 고딕"/>
+                    <a:ea typeface="맑은 고딕"/>
+                  </a:rPr>
+                  <a:t>기준</a:t>
+                </a:r>
+                <a:r>
+                  <a:rPr sz="500" b="1" dirty="0">
+                    <a:solidFill>
+                      <a:srgbClr val="333333"/>
+                    </a:solidFill>
+                    <a:latin typeface="맑은 고딕"/>
+                    <a:ea typeface="맑은 고딕"/>
+                  </a:rPr>
+                  <a:t> C </a:t>
+                </a:r>
+                <a:r>
+                  <a:rPr lang="en-US" altLang="ko-KR" sz="500" b="1" dirty="0">
+                    <a:solidFill>
+                      <a:srgbClr val="333333"/>
+                    </a:solidFill>
+                    <a:latin typeface="맑은 고딕"/>
+                    <a:ea typeface="맑은 고딕"/>
+                  </a:rPr>
+                  <a:t>-</a:t>
+                </a:r>
+                <a:r>
+                  <a:rPr sz="500" b="1" dirty="0">
+                    <a:solidFill>
+                      <a:srgbClr val="333333"/>
+                    </a:solidFill>
+                    <a:latin typeface="맑은 고딕"/>
+                    <a:ea typeface="맑은 고딕"/>
+                  </a:rPr>
+                  <a:t> </a:t>
+                </a:r>
+                <a:r>
+                  <a:rPr sz="500" b="1" dirty="0" err="1">
+                    <a:solidFill>
+                      <a:srgbClr val="333333"/>
+                    </a:solidFill>
+                    <a:latin typeface="맑은 고딕"/>
+                    <a:ea typeface="맑은 고딕"/>
+                  </a:rPr>
+                  <a:t>최</a:t>
+                </a:r>
+                <a:r>
+                  <a:rPr lang="ko-KR" altLang="en-US" sz="500" b="1" dirty="0">
+                    <a:solidFill>
+                      <a:srgbClr val="333333"/>
+                    </a:solidFill>
+                    <a:latin typeface="맑은 고딕"/>
+                    <a:ea typeface="맑은 고딕"/>
+                  </a:rPr>
+                  <a:t>소</a:t>
+                </a:r>
+                <a:r>
+                  <a:rPr lang="en-US" altLang="ko-KR" sz="500" b="1" dirty="0">
+                    <a:solidFill>
+                      <a:srgbClr val="333333"/>
+                    </a:solidFill>
+                    <a:latin typeface="맑은 고딕"/>
+                    <a:ea typeface="맑은 고딕"/>
+                  </a:rPr>
+                  <a:t>·</a:t>
+                </a:r>
+                <a:r>
+                  <a:rPr lang="ko-KR" altLang="en-US" sz="500" b="1" dirty="0" err="1">
+                    <a:solidFill>
+                      <a:srgbClr val="333333"/>
+                    </a:solidFill>
+                    <a:latin typeface="맑은 고딕"/>
+                    <a:ea typeface="맑은 고딕"/>
+                  </a:rPr>
+                  <a:t>최댓</a:t>
+                </a:r>
+                <a:r>
+                  <a:rPr sz="500" b="1" dirty="0" err="1">
+                    <a:solidFill>
+                      <a:srgbClr val="333333"/>
+                    </a:solidFill>
+                    <a:latin typeface="맑은 고딕"/>
+                    <a:ea typeface="맑은 고딕"/>
+                  </a:rPr>
+                  <a:t>값</a:t>
+                </a:r>
+                <a:r>
+                  <a:rPr sz="500" b="1" dirty="0">
+                    <a:solidFill>
+                      <a:srgbClr val="333333"/>
+                    </a:solidFill>
+                    <a:latin typeface="맑은 고딕"/>
+                    <a:ea typeface="맑은 고딕"/>
+                  </a:rPr>
+                  <a:t> </a:t>
+                </a:r>
+                <a:r>
+                  <a:rPr sz="500" b="1" dirty="0" err="1">
+                    <a:solidFill>
+                      <a:srgbClr val="333333"/>
+                    </a:solidFill>
+                    <a:latin typeface="맑은 고딕"/>
+                    <a:ea typeface="맑은 고딕"/>
+                  </a:rPr>
+                  <a:t>교번</a:t>
+                </a:r>
+                <a:r>
+                  <a:rPr sz="500" b="1" dirty="0">
+                    <a:solidFill>
+                      <a:srgbClr val="333333"/>
+                    </a:solidFill>
+                    <a:latin typeface="맑은 고딕"/>
+                    <a:ea typeface="맑은 고딕"/>
+                  </a:rPr>
+                  <a:t> </a:t>
+                </a:r>
+                <a:r>
+                  <a:rPr sz="500" b="1" dirty="0" err="1">
+                    <a:solidFill>
+                      <a:srgbClr val="333333"/>
+                    </a:solidFill>
+                    <a:latin typeface="맑은 고딕"/>
+                    <a:ea typeface="맑은 고딕"/>
+                  </a:rPr>
+                  <a:t>정렬</a:t>
+                </a:r>
+                <a:endParaRPr sz="500" b="1" dirty="0">
+                  <a:solidFill>
+                    <a:srgbClr val="333333"/>
+                  </a:solidFill>
+                  <a:latin typeface="맑은 고딕"/>
+                  <a:ea typeface="맑은 고딕"/>
+                </a:endParaRPr>
+              </a:p>
+            </p:txBody>
+          </p:sp>
+          <p:sp>
+            <p:nvSpPr>
+              <p:cNvPr id="63" name="Rectangle 31">
+                <a:extLst>
+                  <a:ext uri="{FF2B5EF4-FFF2-40B4-BE49-F238E27FC236}">
+                    <a16:creationId xmlns:a16="http://schemas.microsoft.com/office/drawing/2014/main" id="{E2E41FE1-1CC3-1C2F-A6FA-0C746A2A93DD}"/>
+                  </a:ext>
+                </a:extLst>
+              </p:cNvPr>
+              <p:cNvSpPr/>
+              <p:nvPr/>
+            </p:nvSpPr>
+            <p:spPr>
+              <a:xfrm>
+                <a:off x="5652122" y="4871053"/>
+                <a:ext cx="152400" cy="152400"/>
+              </a:xfrm>
+              <a:prstGeom prst="rect">
+                <a:avLst/>
+              </a:prstGeom>
+              <a:solidFill>
+                <a:srgbClr val="FFFFFF"/>
+              </a:solidFill>
+              <a:ln w="4233">
+                <a:solidFill>
+                  <a:srgbClr val="333333"/>
+                </a:solidFill>
+              </a:ln>
+              <a:effectLst/>
+            </p:spPr>
+            <p:style>
+              <a:lnRef idx="1">
+                <a:schemeClr val="accent1"/>
+              </a:lnRef>
+              <a:fillRef idx="3">
+                <a:schemeClr val="accent1"/>
+              </a:fillRef>
+              <a:effectRef idx="2">
+                <a:schemeClr val="accent1"/>
+              </a:effectRef>
+              <a:fontRef idx="minor">
+                <a:schemeClr val="lt1"/>
+              </a:fontRef>
+            </p:style>
+            <p:txBody>
+              <a:bodyPr wrap="square" lIns="12192" tIns="6096" rIns="12192" bIns="6096" rtlCol="0" anchor="ctr"/>
+              <a:lstStyle/>
+              <a:p>
+                <a:pPr algn="ctr"/>
+                <a:r>
+                  <a:rPr sz="600" b="1">
+                    <a:solidFill>
+                      <a:srgbClr val="333333"/>
+                    </a:solidFill>
+                    <a:latin typeface="맑은 고딕"/>
+                    <a:ea typeface="맑은 고딕"/>
+                  </a:rPr>
+                  <a:t>1</a:t>
+                </a:r>
+              </a:p>
+            </p:txBody>
+          </p:sp>
+          <p:sp>
+            <p:nvSpPr>
+              <p:cNvPr id="64" name="Rectangle 32">
+                <a:extLst>
+                  <a:ext uri="{FF2B5EF4-FFF2-40B4-BE49-F238E27FC236}">
+                    <a16:creationId xmlns:a16="http://schemas.microsoft.com/office/drawing/2014/main" id="{B3820DFB-AC55-DBAE-535F-075B8C28951F}"/>
+                  </a:ext>
+                </a:extLst>
+              </p:cNvPr>
+              <p:cNvSpPr/>
+              <p:nvPr/>
+            </p:nvSpPr>
+            <p:spPr>
+              <a:xfrm>
+                <a:off x="5828906" y="4871053"/>
+                <a:ext cx="152400" cy="152400"/>
+              </a:xfrm>
+              <a:prstGeom prst="rect">
+                <a:avLst/>
+              </a:prstGeom>
+              <a:solidFill>
+                <a:srgbClr val="FFFFFF"/>
+              </a:solidFill>
+              <a:ln w="4233">
+                <a:solidFill>
+                  <a:srgbClr val="333333"/>
+                </a:solidFill>
+              </a:ln>
+              <a:effectLst/>
+            </p:spPr>
+            <p:style>
+              <a:lnRef idx="1">
+                <a:schemeClr val="accent1"/>
+              </a:lnRef>
+              <a:fillRef idx="3">
+                <a:schemeClr val="accent1"/>
+              </a:fillRef>
+              <a:effectRef idx="2">
+                <a:schemeClr val="accent1"/>
+              </a:effectRef>
+              <a:fontRef idx="minor">
+                <a:schemeClr val="lt1"/>
+              </a:fontRef>
+            </p:style>
+            <p:txBody>
+              <a:bodyPr wrap="square" lIns="12192" tIns="6096" rIns="12192" bIns="6096" rtlCol="0" anchor="ctr"/>
+              <a:lstStyle/>
+              <a:p>
+                <a:pPr algn="ctr"/>
+                <a:r>
+                  <a:rPr sz="600" b="1">
+                    <a:solidFill>
+                      <a:srgbClr val="333333"/>
+                    </a:solidFill>
+                    <a:latin typeface="맑은 고딕"/>
+                    <a:ea typeface="맑은 고딕"/>
+                  </a:rPr>
+                  <a:t>5</a:t>
+                </a:r>
+              </a:p>
+            </p:txBody>
+          </p:sp>
+          <p:sp>
+            <p:nvSpPr>
+              <p:cNvPr id="65" name="Rectangle 33">
+                <a:extLst>
+                  <a:ext uri="{FF2B5EF4-FFF2-40B4-BE49-F238E27FC236}">
+                    <a16:creationId xmlns:a16="http://schemas.microsoft.com/office/drawing/2014/main" id="{13950230-D01F-A233-93BA-E8974CF0B7A5}"/>
+                  </a:ext>
+                </a:extLst>
+              </p:cNvPr>
+              <p:cNvSpPr/>
+              <p:nvPr/>
+            </p:nvSpPr>
+            <p:spPr>
+              <a:xfrm>
+                <a:off x="6005690" y="4871053"/>
+                <a:ext cx="152400" cy="152400"/>
+              </a:xfrm>
+              <a:prstGeom prst="rect">
+                <a:avLst/>
+              </a:prstGeom>
+              <a:solidFill>
+                <a:srgbClr val="FFFFFF"/>
+              </a:solidFill>
+              <a:ln w="4233">
+                <a:solidFill>
+                  <a:srgbClr val="333333"/>
+                </a:solidFill>
+              </a:ln>
+              <a:effectLst/>
+            </p:spPr>
+            <p:style>
+              <a:lnRef idx="1">
+                <a:schemeClr val="accent1"/>
+              </a:lnRef>
+              <a:fillRef idx="3">
+                <a:schemeClr val="accent1"/>
+              </a:fillRef>
+              <a:effectRef idx="2">
+                <a:schemeClr val="accent1"/>
+              </a:effectRef>
+              <a:fontRef idx="minor">
+                <a:schemeClr val="lt1"/>
+              </a:fontRef>
+            </p:style>
+            <p:txBody>
+              <a:bodyPr wrap="square" lIns="12192" tIns="6096" rIns="12192" bIns="6096" rtlCol="0" anchor="ctr"/>
+              <a:lstStyle/>
+              <a:p>
+                <a:pPr algn="ctr"/>
+                <a:r>
+                  <a:rPr sz="600" b="1">
+                    <a:solidFill>
+                      <a:srgbClr val="333333"/>
+                    </a:solidFill>
+                    <a:latin typeface="맑은 고딕"/>
+                    <a:ea typeface="맑은 고딕"/>
+                  </a:rPr>
+                  <a:t>1</a:t>
+                </a:r>
+              </a:p>
+            </p:txBody>
+          </p:sp>
+          <p:sp>
+            <p:nvSpPr>
+              <p:cNvPr id="66" name="Rectangle 34">
+                <a:extLst>
+                  <a:ext uri="{FF2B5EF4-FFF2-40B4-BE49-F238E27FC236}">
+                    <a16:creationId xmlns:a16="http://schemas.microsoft.com/office/drawing/2014/main" id="{4ABF18E5-6871-FF54-C8B9-ECAA5A3AE4D5}"/>
+                  </a:ext>
+                </a:extLst>
+              </p:cNvPr>
+              <p:cNvSpPr/>
+              <p:nvPr/>
+            </p:nvSpPr>
+            <p:spPr>
+              <a:xfrm>
+                <a:off x="6182474" y="4871053"/>
+                <a:ext cx="152400" cy="152400"/>
+              </a:xfrm>
+              <a:prstGeom prst="rect">
+                <a:avLst/>
+              </a:prstGeom>
+              <a:solidFill>
+                <a:srgbClr val="FFFFFF"/>
+              </a:solidFill>
+              <a:ln w="4233">
+                <a:solidFill>
+                  <a:srgbClr val="333333"/>
+                </a:solidFill>
+              </a:ln>
+              <a:effectLst/>
+            </p:spPr>
+            <p:style>
+              <a:lnRef idx="1">
+                <a:schemeClr val="accent1"/>
+              </a:lnRef>
+              <a:fillRef idx="3">
+                <a:schemeClr val="accent1"/>
+              </a:fillRef>
+              <a:effectRef idx="2">
+                <a:schemeClr val="accent1"/>
+              </a:effectRef>
+              <a:fontRef idx="minor">
+                <a:schemeClr val="lt1"/>
+              </a:fontRef>
+            </p:style>
+            <p:txBody>
+              <a:bodyPr wrap="square" lIns="12192" tIns="6096" rIns="12192" bIns="6096" rtlCol="0" anchor="ctr"/>
+              <a:lstStyle/>
+              <a:p>
+                <a:pPr algn="ctr"/>
+                <a:r>
+                  <a:rPr sz="600" b="1">
+                    <a:solidFill>
+                      <a:srgbClr val="333333"/>
+                    </a:solidFill>
+                    <a:latin typeface="맑은 고딕"/>
+                    <a:ea typeface="맑은 고딕"/>
+                  </a:rPr>
+                  <a:t>4</a:t>
+                </a:r>
+              </a:p>
+            </p:txBody>
+          </p:sp>
+          <p:sp>
+            <p:nvSpPr>
+              <p:cNvPr id="67" name="Rectangle 35">
+                <a:extLst>
+                  <a:ext uri="{FF2B5EF4-FFF2-40B4-BE49-F238E27FC236}">
+                    <a16:creationId xmlns:a16="http://schemas.microsoft.com/office/drawing/2014/main" id="{B7C2C650-638D-B53A-559F-E9ADE21ED7E5}"/>
+                  </a:ext>
+                </a:extLst>
+              </p:cNvPr>
+              <p:cNvSpPr/>
+              <p:nvPr/>
+            </p:nvSpPr>
+            <p:spPr>
+              <a:xfrm>
+                <a:off x="6359258" y="4871053"/>
+                <a:ext cx="152400" cy="152400"/>
+              </a:xfrm>
+              <a:prstGeom prst="rect">
+                <a:avLst/>
+              </a:prstGeom>
+              <a:solidFill>
+                <a:srgbClr val="FFFFFF"/>
+              </a:solidFill>
+              <a:ln w="4233">
+                <a:solidFill>
+                  <a:srgbClr val="333333"/>
+                </a:solidFill>
+              </a:ln>
+              <a:effectLst/>
+            </p:spPr>
+            <p:style>
+              <a:lnRef idx="1">
+                <a:schemeClr val="accent1"/>
+              </a:lnRef>
+              <a:fillRef idx="3">
+                <a:schemeClr val="accent1"/>
+              </a:fillRef>
+              <a:effectRef idx="2">
+                <a:schemeClr val="accent1"/>
+              </a:effectRef>
+              <a:fontRef idx="minor">
+                <a:schemeClr val="lt1"/>
+              </a:fontRef>
+            </p:style>
+            <p:txBody>
+              <a:bodyPr wrap="square" lIns="12192" tIns="6096" rIns="12192" bIns="6096" rtlCol="0" anchor="ctr"/>
+              <a:lstStyle/>
+              <a:p>
+                <a:pPr algn="ctr"/>
+                <a:r>
+                  <a:rPr sz="600" b="1">
+                    <a:solidFill>
+                      <a:srgbClr val="333333"/>
+                    </a:solidFill>
+                    <a:latin typeface="맑은 고딕"/>
+                    <a:ea typeface="맑은 고딕"/>
+                  </a:rPr>
+                  <a:t>3</a:t>
+                </a:r>
+              </a:p>
+            </p:txBody>
+          </p:sp>
+        </p:grpSp>
+      </p:grpSp>
+      <p:pic>
+        <p:nvPicPr>
+          <p:cNvPr id="21" name="그림 20">
+            <a:extLst>
+              <a:ext uri="{FF2B5EF4-FFF2-40B4-BE49-F238E27FC236}">
+                <a16:creationId xmlns:a16="http://schemas.microsoft.com/office/drawing/2014/main" id="{5A5D5F54-4C9C-B201-47E4-3DEDA43309C0}"/>
+              </a:ext>
+            </a:extLst>
+          </p:cNvPr>
+          <p:cNvPicPr>
+            <a:picLocks noChangeAspect="1"/>
+          </p:cNvPicPr>
+          <p:nvPr/>
+        </p:nvPicPr>
+        <p:blipFill>
+          <a:blip r:embed="rId3"/>
+          <a:srcRect l="1886" r="337"/>
+          <a:stretch>
+            <a:fillRect/>
+          </a:stretch>
+        </p:blipFill>
+        <p:spPr>
+          <a:xfrm>
+            <a:off x="3466544" y="7590325"/>
+            <a:ext cx="3018925" cy="1003375"/>
+          </a:xfrm>
+          <a:prstGeom prst="rect">
+            <a:avLst/>
+          </a:prstGeom>
+        </p:spPr>
+      </p:pic>
+      <p:grpSp>
+        <p:nvGrpSpPr>
+          <p:cNvPr id="80" name="그룹 79">
+            <a:extLst>
+              <a:ext uri="{FF2B5EF4-FFF2-40B4-BE49-F238E27FC236}">
+                <a16:creationId xmlns:a16="http://schemas.microsoft.com/office/drawing/2014/main" id="{0C3F49AA-61AB-6D07-71B6-16F3857336B2}"/>
+              </a:ext>
+            </a:extLst>
+          </p:cNvPr>
+          <p:cNvGrpSpPr/>
+          <p:nvPr/>
+        </p:nvGrpSpPr>
+        <p:grpSpPr>
+          <a:xfrm>
+            <a:off x="543864" y="5720105"/>
+            <a:ext cx="2788920" cy="830997"/>
+            <a:chOff x="3461086" y="7824428"/>
+            <a:chExt cx="3048155" cy="916027"/>
+          </a:xfrm>
+        </p:grpSpPr>
+        <p:sp>
+          <p:nvSpPr>
+            <p:cNvPr id="35" name="Rounded Rectangle 2">
+              <a:extLst>
+                <a:ext uri="{FF2B5EF4-FFF2-40B4-BE49-F238E27FC236}">
+                  <a16:creationId xmlns:a16="http://schemas.microsoft.com/office/drawing/2014/main" id="{6E182890-3A45-9C29-DF8E-3DBFB922D685}"/>
+                </a:ext>
+              </a:extLst>
+            </p:cNvPr>
+            <p:cNvSpPr/>
+            <p:nvPr/>
+          </p:nvSpPr>
+          <p:spPr>
+            <a:xfrm>
+              <a:off x="3461086" y="7824429"/>
+              <a:ext cx="579120" cy="365759"/>
+            </a:xfrm>
+            <a:prstGeom prst="roundRect">
+              <a:avLst>
+                <a:gd name="adj" fmla="val 12000"/>
+              </a:avLst>
+            </a:prstGeom>
+            <a:solidFill>
+              <a:srgbClr val="FFFFFF"/>
+            </a:solidFill>
+            <a:ln w="5291">
+              <a:solidFill>
+                <a:srgbClr val="333333"/>
+              </a:solidFill>
+            </a:ln>
+            <a:effectLst/>
+          </p:spPr>
+          <p:style>
+            <a:lnRef idx="1">
+              <a:schemeClr val="accent1"/>
+            </a:lnRef>
+            <a:fillRef idx="3">
+              <a:schemeClr val="accent1"/>
+            </a:fillRef>
+            <a:effectRef idx="2">
+              <a:schemeClr val="accent1"/>
+            </a:effectRef>
+            <a:fontRef idx="minor">
+              <a:schemeClr val="lt1"/>
+            </a:fontRef>
+          </p:style>
+          <p:txBody>
+            <a:bodyPr wrap="square" lIns="12192" tIns="6096" rIns="12192" bIns="6096" rtlCol="0" anchor="ctr"/>
+            <a:lstStyle/>
+            <a:p>
+              <a:pPr algn="ctr"/>
+              <a:r>
+                <a:rPr sz="416" b="1" dirty="0" err="1">
+                  <a:solidFill>
+                    <a:srgbClr val="333333"/>
+                  </a:solidFill>
+                  <a:latin typeface="맑은 고딕"/>
+                  <a:ea typeface="맑은 고딕"/>
+                </a:rPr>
+                <a:t>입력</a:t>
+              </a:r>
+              <a:r>
+                <a:rPr sz="416" b="1" dirty="0">
+                  <a:solidFill>
+                    <a:srgbClr val="333333"/>
+                  </a:solidFill>
+                  <a:latin typeface="맑은 고딕"/>
+                  <a:ea typeface="맑은 고딕"/>
+                </a:rPr>
+                <a:t> </a:t>
+              </a:r>
+              <a:r>
+                <a:rPr sz="416" b="1" dirty="0" err="1">
+                  <a:solidFill>
+                    <a:srgbClr val="333333"/>
+                  </a:solidFill>
+                  <a:latin typeface="맑은 고딕"/>
+                  <a:ea typeface="맑은 고딕"/>
+                </a:rPr>
+                <a:t>수열</a:t>
+              </a:r>
+              <a:endParaRPr sz="416" b="1" dirty="0">
+                <a:solidFill>
+                  <a:srgbClr val="333333"/>
+                </a:solidFill>
+                <a:latin typeface="맑은 고딕"/>
+                <a:ea typeface="맑은 고딕"/>
+              </a:endParaRPr>
+            </a:p>
+            <a:p>
+              <a:pPr algn="ctr"/>
+              <a:r>
+                <a:rPr sz="400" b="0" dirty="0">
+                  <a:solidFill>
+                    <a:srgbClr val="777777"/>
+                  </a:solidFill>
+                  <a:latin typeface="맑은 고딕"/>
+                  <a:ea typeface="맑은 고딕"/>
+                </a:rPr>
+                <a:t>(3, 1, 4, 1, 5)</a:t>
+              </a:r>
+            </a:p>
+          </p:txBody>
+        </p:sp>
+        <p:sp>
+          <p:nvSpPr>
+            <p:cNvPr id="68" name="Rounded Rectangle 3">
+              <a:extLst>
+                <a:ext uri="{FF2B5EF4-FFF2-40B4-BE49-F238E27FC236}">
+                  <a16:creationId xmlns:a16="http://schemas.microsoft.com/office/drawing/2014/main" id="{34660F42-FDEA-C26B-B5F2-F4F6571BC275}"/>
+                </a:ext>
+              </a:extLst>
+            </p:cNvPr>
+            <p:cNvSpPr/>
+            <p:nvPr/>
+          </p:nvSpPr>
+          <p:spPr>
+            <a:xfrm>
+              <a:off x="4176372" y="7826055"/>
+              <a:ext cx="701040" cy="365759"/>
+            </a:xfrm>
+            <a:prstGeom prst="roundRect">
+              <a:avLst>
+                <a:gd name="adj" fmla="val 12000"/>
+              </a:avLst>
+            </a:prstGeom>
+            <a:solidFill>
+              <a:srgbClr val="F2F2F2"/>
+            </a:solidFill>
+            <a:ln w="5291">
+              <a:solidFill>
+                <a:srgbClr val="333333"/>
+              </a:solidFill>
+            </a:ln>
+            <a:effectLst/>
+          </p:spPr>
+          <p:style>
+            <a:lnRef idx="1">
+              <a:schemeClr val="accent1"/>
+            </a:lnRef>
+            <a:fillRef idx="3">
+              <a:schemeClr val="accent1"/>
+            </a:fillRef>
+            <a:effectRef idx="2">
+              <a:schemeClr val="accent1"/>
+            </a:effectRef>
+            <a:fontRef idx="minor">
+              <a:schemeClr val="lt1"/>
+            </a:fontRef>
+          </p:style>
+          <p:txBody>
+            <a:bodyPr wrap="square" lIns="12192" tIns="6096" rIns="12192" bIns="6096" rtlCol="0" anchor="ctr"/>
+            <a:lstStyle/>
+            <a:p>
+              <a:pPr algn="ctr"/>
+              <a:r>
+                <a:rPr sz="433" b="1" dirty="0">
+                  <a:solidFill>
+                    <a:srgbClr val="333333"/>
+                  </a:solidFill>
+                  <a:latin typeface="맑은 고딕"/>
+                  <a:ea typeface="맑은 고딕"/>
+                </a:rPr>
+                <a:t>Encoder</a:t>
+              </a:r>
+            </a:p>
+            <a:p>
+              <a:pPr algn="ctr"/>
+              <a:r>
+                <a:rPr sz="400" b="0" dirty="0" err="1">
+                  <a:solidFill>
+                    <a:srgbClr val="777777"/>
+                  </a:solidFill>
+                  <a:latin typeface="맑은 고딕"/>
+                  <a:ea typeface="맑은 고딕"/>
+                </a:rPr>
+                <a:t>입력</a:t>
+              </a:r>
+              <a:r>
+                <a:rPr sz="400" b="0" dirty="0">
+                  <a:solidFill>
+                    <a:srgbClr val="777777"/>
+                  </a:solidFill>
+                  <a:latin typeface="맑은 고딕"/>
+                  <a:ea typeface="맑은 고딕"/>
+                </a:rPr>
+                <a:t> </a:t>
+              </a:r>
+              <a:r>
+                <a:rPr sz="400" b="0" dirty="0" err="1">
+                  <a:solidFill>
+                    <a:srgbClr val="777777"/>
+                  </a:solidFill>
+                  <a:latin typeface="맑은 고딕"/>
+                  <a:ea typeface="맑은 고딕"/>
+                </a:rPr>
+                <a:t>전체를</a:t>
+              </a:r>
+              <a:r>
+                <a:rPr sz="400" b="0" dirty="0">
+                  <a:solidFill>
+                    <a:srgbClr val="777777"/>
+                  </a:solidFill>
+                  <a:latin typeface="맑은 고딕"/>
+                  <a:ea typeface="맑은 고딕"/>
+                </a:rPr>
+                <a:t> </a:t>
+              </a:r>
+              <a:r>
+                <a:rPr lang="ko-KR" altLang="en-US" sz="400" b="0" dirty="0" err="1">
+                  <a:solidFill>
+                    <a:srgbClr val="777777"/>
+                  </a:solidFill>
+                  <a:latin typeface="맑은 고딕"/>
+                  <a:ea typeface="맑은 고딕"/>
+                </a:rPr>
+                <a:t>백터로</a:t>
+              </a:r>
+              <a:r>
+                <a:rPr lang="ko-KR" altLang="en-US" sz="400" b="0" dirty="0">
+                  <a:solidFill>
+                    <a:srgbClr val="777777"/>
+                  </a:solidFill>
+                  <a:latin typeface="맑은 고딕"/>
+                  <a:ea typeface="맑은 고딕"/>
+                </a:rPr>
+                <a:t> 변환</a:t>
+              </a:r>
+              <a:endParaRPr sz="400" b="0" dirty="0">
+                <a:solidFill>
+                  <a:srgbClr val="777777"/>
+                </a:solidFill>
+                <a:latin typeface="맑은 고딕"/>
+                <a:ea typeface="맑은 고딕"/>
+              </a:endParaRPr>
+            </a:p>
+          </p:txBody>
+        </p:sp>
+        <p:sp>
+          <p:nvSpPr>
+            <p:cNvPr id="69" name="Rounded Rectangle 4">
+              <a:extLst>
+                <a:ext uri="{FF2B5EF4-FFF2-40B4-BE49-F238E27FC236}">
+                  <a16:creationId xmlns:a16="http://schemas.microsoft.com/office/drawing/2014/main" id="{D5955413-6CC4-7ECE-53FE-7441A5B6DFBE}"/>
+                </a:ext>
+              </a:extLst>
+            </p:cNvPr>
+            <p:cNvSpPr/>
+            <p:nvPr/>
+          </p:nvSpPr>
+          <p:spPr>
+            <a:xfrm>
+              <a:off x="4999332" y="7826053"/>
+              <a:ext cx="792480" cy="365759"/>
+            </a:xfrm>
+            <a:prstGeom prst="roundRect">
+              <a:avLst>
+                <a:gd name="adj" fmla="val 12000"/>
+              </a:avLst>
+            </a:prstGeom>
+            <a:solidFill>
+              <a:srgbClr val="F2F2F2"/>
+            </a:solidFill>
+            <a:ln w="5291">
+              <a:solidFill>
+                <a:srgbClr val="333333"/>
+              </a:solidFill>
+            </a:ln>
+            <a:effectLst/>
+          </p:spPr>
+          <p:style>
+            <a:lnRef idx="1">
+              <a:schemeClr val="accent1"/>
+            </a:lnRef>
+            <a:fillRef idx="3">
+              <a:schemeClr val="accent1"/>
+            </a:fillRef>
+            <a:effectRef idx="2">
+              <a:schemeClr val="accent1"/>
+            </a:effectRef>
+            <a:fontRef idx="minor">
+              <a:schemeClr val="lt1"/>
+            </a:fontRef>
+          </p:style>
+          <p:txBody>
+            <a:bodyPr wrap="square" lIns="12192" tIns="6096" rIns="12192" bIns="6096" rtlCol="0" anchor="ctr"/>
+            <a:lstStyle/>
+            <a:p>
+              <a:pPr algn="ctr"/>
+              <a:r>
+                <a:rPr sz="433" b="1" dirty="0">
+                  <a:solidFill>
+                    <a:srgbClr val="333333"/>
+                  </a:solidFill>
+                  <a:latin typeface="맑은 고딕"/>
+                  <a:ea typeface="맑은 고딕"/>
+                </a:rPr>
+                <a:t>Decoder</a:t>
+              </a:r>
+            </a:p>
+            <a:p>
+              <a:pPr algn="ctr"/>
+              <a:r>
+                <a:rPr sz="400" b="0" dirty="0" err="1">
+                  <a:solidFill>
+                    <a:srgbClr val="777777"/>
+                  </a:solidFill>
+                  <a:latin typeface="맑은 고딕"/>
+                  <a:ea typeface="맑은 고딕"/>
+                </a:rPr>
+                <a:t>출력을</a:t>
+              </a:r>
+              <a:r>
+                <a:rPr sz="400" b="0" dirty="0">
+                  <a:solidFill>
+                    <a:srgbClr val="777777"/>
+                  </a:solidFill>
+                  <a:latin typeface="맑은 고딕"/>
+                  <a:ea typeface="맑은 고딕"/>
+                </a:rPr>
+                <a:t> </a:t>
+              </a:r>
+              <a:r>
+                <a:rPr sz="400" b="0" dirty="0" err="1">
+                  <a:solidFill>
+                    <a:srgbClr val="777777"/>
+                  </a:solidFill>
+                  <a:latin typeface="맑은 고딕"/>
+                  <a:ea typeface="맑은 고딕"/>
+                </a:rPr>
+                <a:t>자기회귀적으로</a:t>
+              </a:r>
+              <a:r>
+                <a:rPr sz="400" b="0" dirty="0">
+                  <a:solidFill>
+                    <a:srgbClr val="777777"/>
+                  </a:solidFill>
+                  <a:latin typeface="맑은 고딕"/>
+                  <a:ea typeface="맑은 고딕"/>
+                </a:rPr>
+                <a:t> </a:t>
+              </a:r>
+              <a:r>
+                <a:rPr sz="400" b="0" dirty="0" err="1">
+                  <a:solidFill>
+                    <a:srgbClr val="777777"/>
+                  </a:solidFill>
+                  <a:latin typeface="맑은 고딕"/>
+                  <a:ea typeface="맑은 고딕"/>
+                </a:rPr>
+                <a:t>생성</a:t>
+              </a:r>
+              <a:endParaRPr sz="400" b="0" dirty="0">
+                <a:solidFill>
+                  <a:srgbClr val="777777"/>
+                </a:solidFill>
+                <a:latin typeface="맑은 고딕"/>
+                <a:ea typeface="맑은 고딕"/>
+              </a:endParaRPr>
+            </a:p>
+          </p:txBody>
+        </p:sp>
+        <p:sp>
+          <p:nvSpPr>
+            <p:cNvPr id="70" name="Rounded Rectangle 5">
+              <a:extLst>
+                <a:ext uri="{FF2B5EF4-FFF2-40B4-BE49-F238E27FC236}">
+                  <a16:creationId xmlns:a16="http://schemas.microsoft.com/office/drawing/2014/main" id="{75464180-EE3A-DB07-7B5D-EB13EDA039D2}"/>
+                </a:ext>
+              </a:extLst>
+            </p:cNvPr>
+            <p:cNvSpPr/>
+            <p:nvPr/>
+          </p:nvSpPr>
+          <p:spPr>
+            <a:xfrm>
+              <a:off x="5930121" y="7824428"/>
+              <a:ext cx="579120" cy="365759"/>
+            </a:xfrm>
+            <a:prstGeom prst="roundRect">
+              <a:avLst>
+                <a:gd name="adj" fmla="val 12000"/>
+              </a:avLst>
+            </a:prstGeom>
+            <a:solidFill>
+              <a:srgbClr val="FFFFFF"/>
+            </a:solidFill>
+            <a:ln w="5291">
+              <a:solidFill>
+                <a:srgbClr val="333333"/>
+              </a:solidFill>
+            </a:ln>
+            <a:effectLst/>
+          </p:spPr>
+          <p:style>
+            <a:lnRef idx="1">
+              <a:schemeClr val="accent1"/>
+            </a:lnRef>
+            <a:fillRef idx="3">
+              <a:schemeClr val="accent1"/>
+            </a:fillRef>
+            <a:effectRef idx="2">
+              <a:schemeClr val="accent1"/>
+            </a:effectRef>
+            <a:fontRef idx="minor">
+              <a:schemeClr val="lt1"/>
+            </a:fontRef>
+          </p:style>
+          <p:txBody>
+            <a:bodyPr wrap="square" lIns="12192" tIns="6096" rIns="12192" bIns="6096" rtlCol="0" anchor="ctr"/>
+            <a:lstStyle/>
+            <a:p>
+              <a:pPr algn="ctr"/>
+              <a:r>
+                <a:rPr sz="416" b="1" dirty="0" err="1">
+                  <a:solidFill>
+                    <a:srgbClr val="333333"/>
+                  </a:solidFill>
+                  <a:latin typeface="맑은 고딕"/>
+                  <a:ea typeface="맑은 고딕"/>
+                </a:rPr>
+                <a:t>출력</a:t>
+              </a:r>
+              <a:r>
+                <a:rPr sz="416" b="1" dirty="0">
+                  <a:solidFill>
+                    <a:srgbClr val="333333"/>
+                  </a:solidFill>
+                  <a:latin typeface="맑은 고딕"/>
+                  <a:ea typeface="맑은 고딕"/>
+                </a:rPr>
+                <a:t> </a:t>
+              </a:r>
+              <a:r>
+                <a:rPr sz="416" b="1" dirty="0" err="1">
+                  <a:solidFill>
+                    <a:srgbClr val="333333"/>
+                  </a:solidFill>
+                  <a:latin typeface="맑은 고딕"/>
+                  <a:ea typeface="맑은 고딕"/>
+                </a:rPr>
+                <a:t>수열</a:t>
+              </a:r>
+              <a:endParaRPr sz="416" b="1" dirty="0">
+                <a:solidFill>
+                  <a:srgbClr val="333333"/>
+                </a:solidFill>
+                <a:latin typeface="맑은 고딕"/>
+                <a:ea typeface="맑은 고딕"/>
+              </a:endParaRPr>
+            </a:p>
+            <a:p>
+              <a:pPr algn="ctr"/>
+              <a:r>
+                <a:rPr sz="400" b="0" dirty="0">
+                  <a:solidFill>
+                    <a:srgbClr val="777777"/>
+                  </a:solidFill>
+                  <a:latin typeface="맑은 고딕"/>
+                  <a:ea typeface="맑은 고딕"/>
+                </a:rPr>
+                <a:t>(1, 1, 3, 4, 5)</a:t>
+              </a:r>
+            </a:p>
+          </p:txBody>
+        </p:sp>
+        <p:cxnSp>
+          <p:nvCxnSpPr>
+            <p:cNvPr id="71" name="Connector 6">
+              <a:extLst>
+                <a:ext uri="{FF2B5EF4-FFF2-40B4-BE49-F238E27FC236}">
+                  <a16:creationId xmlns:a16="http://schemas.microsoft.com/office/drawing/2014/main" id="{C38F41C8-1042-FA12-28F4-2B0F9A3A620F}"/>
+                </a:ext>
+              </a:extLst>
+            </p:cNvPr>
+            <p:cNvCxnSpPr>
+              <a:cxnSpLocks/>
+              <a:stCxn id="35" idx="3"/>
+            </p:cNvCxnSpPr>
+            <p:nvPr/>
+          </p:nvCxnSpPr>
+          <p:spPr>
+            <a:xfrm>
+              <a:off x="4040206" y="8007309"/>
+              <a:ext cx="136166" cy="1626"/>
+            </a:xfrm>
+            <a:prstGeom prst="line">
+              <a:avLst/>
+            </a:prstGeom>
+            <a:ln w="7408">
+              <a:solidFill>
+                <a:srgbClr val="333333"/>
+              </a:solidFill>
+              <a:tailEnd type="triangle" w="med" len="med"/>
+            </a:ln>
+            <a:effectLst/>
+          </p:spPr>
+          <p:style>
+            <a:lnRef idx="2">
+              <a:schemeClr val="accent1"/>
+            </a:lnRef>
+            <a:fillRef idx="0">
+              <a:schemeClr val="accent1"/>
+            </a:fillRef>
+            <a:effectRef idx="1">
+              <a:schemeClr val="accent1"/>
+            </a:effectRef>
+            <a:fontRef idx="minor">
+              <a:schemeClr val="tx1"/>
+            </a:fontRef>
+          </p:style>
+        </p:cxnSp>
+        <p:cxnSp>
+          <p:nvCxnSpPr>
+            <p:cNvPr id="72" name="Connector 7">
+              <a:extLst>
+                <a:ext uri="{FF2B5EF4-FFF2-40B4-BE49-F238E27FC236}">
+                  <a16:creationId xmlns:a16="http://schemas.microsoft.com/office/drawing/2014/main" id="{57CCB3BE-38A8-0362-08C4-C235990587DA}"/>
+                </a:ext>
+              </a:extLst>
+            </p:cNvPr>
+            <p:cNvCxnSpPr>
+              <a:cxnSpLocks/>
+            </p:cNvCxnSpPr>
+            <p:nvPr/>
+          </p:nvCxnSpPr>
+          <p:spPr>
+            <a:xfrm>
+              <a:off x="4877411" y="8008935"/>
+              <a:ext cx="121920" cy="0"/>
+            </a:xfrm>
+            <a:prstGeom prst="line">
+              <a:avLst/>
+            </a:prstGeom>
+            <a:ln w="7408">
+              <a:solidFill>
+                <a:srgbClr val="333333"/>
+              </a:solidFill>
+              <a:tailEnd type="triangle" w="med" len="med"/>
+            </a:ln>
+            <a:effectLst/>
+          </p:spPr>
+          <p:style>
+            <a:lnRef idx="2">
+              <a:schemeClr val="accent1"/>
+            </a:lnRef>
+            <a:fillRef idx="0">
+              <a:schemeClr val="accent1"/>
+            </a:fillRef>
+            <a:effectRef idx="1">
+              <a:schemeClr val="accent1"/>
+            </a:effectRef>
+            <a:fontRef idx="minor">
+              <a:schemeClr val="tx1"/>
+            </a:fontRef>
+          </p:style>
+        </p:cxnSp>
+        <p:cxnSp>
+          <p:nvCxnSpPr>
+            <p:cNvPr id="73" name="Connector 8">
+              <a:extLst>
+                <a:ext uri="{FF2B5EF4-FFF2-40B4-BE49-F238E27FC236}">
+                  <a16:creationId xmlns:a16="http://schemas.microsoft.com/office/drawing/2014/main" id="{5B8BB2A1-7181-F67B-901E-58E4D63686D4}"/>
+                </a:ext>
+              </a:extLst>
+            </p:cNvPr>
+            <p:cNvCxnSpPr>
+              <a:cxnSpLocks/>
+            </p:cNvCxnSpPr>
+            <p:nvPr/>
+          </p:nvCxnSpPr>
+          <p:spPr>
+            <a:xfrm>
+              <a:off x="5791812" y="8007308"/>
+              <a:ext cx="138309" cy="0"/>
+            </a:xfrm>
+            <a:prstGeom prst="line">
+              <a:avLst/>
+            </a:prstGeom>
+            <a:ln w="7407">
+              <a:solidFill>
+                <a:srgbClr val="333333"/>
+              </a:solidFill>
+              <a:tailEnd type="triangle" w="med" len="med"/>
+            </a:ln>
+            <a:effectLst/>
+          </p:spPr>
+          <p:style>
+            <a:lnRef idx="2">
+              <a:schemeClr val="accent1"/>
+            </a:lnRef>
+            <a:fillRef idx="0">
+              <a:schemeClr val="accent1"/>
+            </a:fillRef>
+            <a:effectRef idx="1">
+              <a:schemeClr val="accent1"/>
+            </a:effectRef>
+            <a:fontRef idx="minor">
+              <a:schemeClr val="tx1"/>
+            </a:fontRef>
+          </p:style>
+        </p:cxnSp>
+        <p:sp>
+          <p:nvSpPr>
+            <p:cNvPr id="74" name="Rounded Rectangle 9">
+              <a:extLst>
+                <a:ext uri="{FF2B5EF4-FFF2-40B4-BE49-F238E27FC236}">
+                  <a16:creationId xmlns:a16="http://schemas.microsoft.com/office/drawing/2014/main" id="{B99ED1C9-031E-27F2-B261-8D7405C13AA8}"/>
+                </a:ext>
+              </a:extLst>
+            </p:cNvPr>
+            <p:cNvSpPr/>
+            <p:nvPr/>
+          </p:nvSpPr>
+          <p:spPr>
+            <a:xfrm>
+              <a:off x="4054452" y="8496615"/>
+              <a:ext cx="761999" cy="243840"/>
+            </a:xfrm>
+            <a:prstGeom prst="roundRect">
+              <a:avLst>
+                <a:gd name="adj" fmla="val 12000"/>
+              </a:avLst>
+            </a:prstGeom>
+            <a:solidFill>
+              <a:srgbClr val="DCE6F1"/>
+            </a:solidFill>
+            <a:ln w="5291">
+              <a:solidFill>
+                <a:srgbClr val="333333"/>
+              </a:solidFill>
+            </a:ln>
+            <a:effectLst/>
+          </p:spPr>
+          <p:style>
+            <a:lnRef idx="1">
+              <a:schemeClr val="accent1"/>
+            </a:lnRef>
+            <a:fillRef idx="3">
+              <a:schemeClr val="accent1"/>
+            </a:fillRef>
+            <a:effectRef idx="2">
+              <a:schemeClr val="accent1"/>
+            </a:effectRef>
+            <a:fontRef idx="minor">
+              <a:schemeClr val="lt1"/>
+            </a:fontRef>
+          </p:style>
+          <p:txBody>
+            <a:bodyPr wrap="square" lIns="12192" tIns="6096" rIns="12192" bIns="6096" rtlCol="0" anchor="ctr"/>
+            <a:lstStyle/>
+            <a:p>
+              <a:pPr algn="ctr"/>
+              <a:r>
+                <a:rPr sz="400" b="1" dirty="0">
+                  <a:solidFill>
+                    <a:srgbClr val="333333"/>
+                  </a:solidFill>
+                  <a:latin typeface="맑은 고딕"/>
+                  <a:ea typeface="맑은 고딕"/>
+                </a:rPr>
+                <a:t>Token Embedding</a:t>
+              </a:r>
+            </a:p>
+            <a:p>
+              <a:pPr algn="ctr"/>
+              <a:r>
+                <a:rPr sz="400" b="0" dirty="0" err="1">
+                  <a:solidFill>
+                    <a:srgbClr val="777777"/>
+                  </a:solidFill>
+                  <a:latin typeface="맑은 고딕"/>
+                  <a:ea typeface="맑은 고딕"/>
+                </a:rPr>
+                <a:t>값</a:t>
+              </a:r>
+              <a:r>
+                <a:rPr sz="400" b="0" dirty="0">
+                  <a:solidFill>
+                    <a:srgbClr val="777777"/>
+                  </a:solidFill>
+                  <a:latin typeface="맑은 고딕"/>
+                  <a:ea typeface="맑은 고딕"/>
+                </a:rPr>
+                <a:t> </a:t>
+              </a:r>
+              <a:r>
+                <a:rPr sz="400" b="0" dirty="0" err="1">
+                  <a:solidFill>
+                    <a:srgbClr val="777777"/>
+                  </a:solidFill>
+                  <a:latin typeface="맑은 고딕"/>
+                  <a:ea typeface="맑은 고딕"/>
+                </a:rPr>
+                <a:t>정보</a:t>
+              </a:r>
+              <a:r>
+                <a:rPr sz="400" b="0" dirty="0">
+                  <a:solidFill>
+                    <a:srgbClr val="777777"/>
+                  </a:solidFill>
+                  <a:latin typeface="맑은 고딕"/>
+                  <a:ea typeface="맑은 고딕"/>
+                </a:rPr>
+                <a:t> </a:t>
+              </a:r>
+              <a:r>
+                <a:rPr sz="400" b="0" dirty="0" err="1">
+                  <a:solidFill>
+                    <a:srgbClr val="777777"/>
+                  </a:solidFill>
+                  <a:latin typeface="맑은 고딕"/>
+                  <a:ea typeface="맑은 고딕"/>
+                </a:rPr>
+                <a:t>담당</a:t>
+              </a:r>
+              <a:endParaRPr sz="400" b="0" dirty="0">
+                <a:solidFill>
+                  <a:srgbClr val="777777"/>
+                </a:solidFill>
+                <a:latin typeface="맑은 고딕"/>
+                <a:ea typeface="맑은 고딕"/>
+              </a:endParaRPr>
+            </a:p>
+          </p:txBody>
+        </p:sp>
+        <p:sp>
+          <p:nvSpPr>
+            <p:cNvPr id="75" name="Rounded Rectangle 10">
+              <a:extLst>
+                <a:ext uri="{FF2B5EF4-FFF2-40B4-BE49-F238E27FC236}">
+                  <a16:creationId xmlns:a16="http://schemas.microsoft.com/office/drawing/2014/main" id="{A74CBF72-2CDC-A6F6-FF46-49F595B11857}"/>
+                </a:ext>
+              </a:extLst>
+            </p:cNvPr>
+            <p:cNvSpPr/>
+            <p:nvPr/>
+          </p:nvSpPr>
+          <p:spPr>
+            <a:xfrm>
+              <a:off x="4968851" y="8496615"/>
+              <a:ext cx="761999" cy="243840"/>
+            </a:xfrm>
+            <a:prstGeom prst="roundRect">
+              <a:avLst>
+                <a:gd name="adj" fmla="val 12000"/>
+              </a:avLst>
+            </a:prstGeom>
+            <a:solidFill>
+              <a:srgbClr val="FDEBD0"/>
+            </a:solidFill>
+            <a:ln w="5291">
+              <a:solidFill>
+                <a:srgbClr val="333333"/>
+              </a:solidFill>
+            </a:ln>
+            <a:effectLst/>
+          </p:spPr>
+          <p:style>
+            <a:lnRef idx="1">
+              <a:schemeClr val="accent1"/>
+            </a:lnRef>
+            <a:fillRef idx="3">
+              <a:schemeClr val="accent1"/>
+            </a:fillRef>
+            <a:effectRef idx="2">
+              <a:schemeClr val="accent1"/>
+            </a:effectRef>
+            <a:fontRef idx="minor">
+              <a:schemeClr val="lt1"/>
+            </a:fontRef>
+          </p:style>
+          <p:txBody>
+            <a:bodyPr wrap="square" lIns="12192" tIns="6096" rIns="12192" bIns="6096" rtlCol="0" anchor="ctr"/>
+            <a:lstStyle/>
+            <a:p>
+              <a:pPr algn="ctr"/>
+              <a:r>
+                <a:rPr sz="400" b="1">
+                  <a:solidFill>
+                    <a:srgbClr val="333333"/>
+                  </a:solidFill>
+                  <a:latin typeface="맑은 고딕"/>
+                  <a:ea typeface="맑은 고딕"/>
+                </a:rPr>
+                <a:t>Positional Embedding</a:t>
+              </a:r>
+            </a:p>
+            <a:p>
+              <a:pPr algn="ctr"/>
+              <a:r>
+                <a:rPr sz="400" b="0">
+                  <a:solidFill>
+                    <a:srgbClr val="777777"/>
+                  </a:solidFill>
+                  <a:latin typeface="맑은 고딕"/>
+                  <a:ea typeface="맑은 고딕"/>
+                </a:rPr>
+                <a:t>위치 정보 담당</a:t>
+              </a:r>
+            </a:p>
+          </p:txBody>
+        </p:sp>
+        <p:cxnSp>
+          <p:nvCxnSpPr>
+            <p:cNvPr id="76" name="Connector 11">
+              <a:extLst>
+                <a:ext uri="{FF2B5EF4-FFF2-40B4-BE49-F238E27FC236}">
+                  <a16:creationId xmlns:a16="http://schemas.microsoft.com/office/drawing/2014/main" id="{F362E2FC-CBDA-89D9-6D5A-CFE12E7F2890}"/>
+                </a:ext>
+              </a:extLst>
+            </p:cNvPr>
+            <p:cNvCxnSpPr>
+              <a:cxnSpLocks/>
+              <a:stCxn id="74" idx="0"/>
+            </p:cNvCxnSpPr>
+            <p:nvPr/>
+          </p:nvCxnSpPr>
+          <p:spPr>
+            <a:xfrm flipH="1" flipV="1">
+              <a:off x="4389732" y="8191815"/>
+              <a:ext cx="45720" cy="304800"/>
+            </a:xfrm>
+            <a:prstGeom prst="line">
+              <a:avLst/>
+            </a:prstGeom>
+            <a:ln w="5291">
+              <a:solidFill>
+                <a:srgbClr val="777777"/>
+              </a:solidFill>
+              <a:tailEnd type="triangle" w="med" len="med"/>
+            </a:ln>
+            <a:effectLst/>
+          </p:spPr>
+          <p:style>
+            <a:lnRef idx="2">
+              <a:schemeClr val="accent1"/>
+            </a:lnRef>
+            <a:fillRef idx="0">
+              <a:schemeClr val="accent1"/>
+            </a:fillRef>
+            <a:effectRef idx="1">
+              <a:schemeClr val="accent1"/>
+            </a:effectRef>
+            <a:fontRef idx="minor">
+              <a:schemeClr val="tx1"/>
+            </a:fontRef>
+          </p:style>
+        </p:cxnSp>
+        <p:cxnSp>
+          <p:nvCxnSpPr>
+            <p:cNvPr id="77" name="Connector 12">
+              <a:extLst>
+                <a:ext uri="{FF2B5EF4-FFF2-40B4-BE49-F238E27FC236}">
+                  <a16:creationId xmlns:a16="http://schemas.microsoft.com/office/drawing/2014/main" id="{D95CAD11-15C1-2474-6ED5-CF1EB5C7ADAA}"/>
+                </a:ext>
+              </a:extLst>
+            </p:cNvPr>
+            <p:cNvCxnSpPr>
+              <a:cxnSpLocks/>
+            </p:cNvCxnSpPr>
+            <p:nvPr/>
+          </p:nvCxnSpPr>
+          <p:spPr>
+            <a:xfrm flipV="1">
+              <a:off x="4722177" y="8190187"/>
+              <a:ext cx="471376" cy="306425"/>
+            </a:xfrm>
+            <a:prstGeom prst="line">
+              <a:avLst/>
+            </a:prstGeom>
+            <a:ln w="5291">
+              <a:solidFill>
+                <a:srgbClr val="777777"/>
+              </a:solidFill>
+              <a:tailEnd type="triangle" w="med" len="med"/>
+            </a:ln>
+            <a:effectLst/>
+          </p:spPr>
+          <p:style>
+            <a:lnRef idx="2">
+              <a:schemeClr val="accent1"/>
+            </a:lnRef>
+            <a:fillRef idx="0">
+              <a:schemeClr val="accent1"/>
+            </a:fillRef>
+            <a:effectRef idx="1">
+              <a:schemeClr val="accent1"/>
+            </a:effectRef>
+            <a:fontRef idx="minor">
+              <a:schemeClr val="tx1"/>
+            </a:fontRef>
+          </p:style>
+        </p:cxnSp>
+        <p:cxnSp>
+          <p:nvCxnSpPr>
+            <p:cNvPr id="78" name="Connector 13">
+              <a:extLst>
+                <a:ext uri="{FF2B5EF4-FFF2-40B4-BE49-F238E27FC236}">
+                  <a16:creationId xmlns:a16="http://schemas.microsoft.com/office/drawing/2014/main" id="{90DE7151-FB2C-EF5D-7106-4847677D3397}"/>
+                </a:ext>
+              </a:extLst>
+            </p:cNvPr>
+            <p:cNvCxnSpPr>
+              <a:cxnSpLocks/>
+            </p:cNvCxnSpPr>
+            <p:nvPr/>
+          </p:nvCxnSpPr>
+          <p:spPr>
+            <a:xfrm flipH="1" flipV="1">
+              <a:off x="4664051" y="8191815"/>
+              <a:ext cx="428864" cy="304797"/>
+            </a:xfrm>
+            <a:prstGeom prst="line">
+              <a:avLst/>
+            </a:prstGeom>
+            <a:ln w="5291">
+              <a:solidFill>
+                <a:srgbClr val="777777"/>
+              </a:solidFill>
+              <a:tailEnd type="triangle" w="med" len="med"/>
+            </a:ln>
+            <a:effectLst/>
+          </p:spPr>
+          <p:style>
+            <a:lnRef idx="2">
+              <a:schemeClr val="accent1"/>
+            </a:lnRef>
+            <a:fillRef idx="0">
+              <a:schemeClr val="accent1"/>
+            </a:fillRef>
+            <a:effectRef idx="1">
+              <a:schemeClr val="accent1"/>
+            </a:effectRef>
+            <a:fontRef idx="minor">
+              <a:schemeClr val="tx1"/>
+            </a:fontRef>
+          </p:style>
+        </p:cxnSp>
+        <p:cxnSp>
+          <p:nvCxnSpPr>
+            <p:cNvPr id="79" name="Connector 14">
+              <a:extLst>
+                <a:ext uri="{FF2B5EF4-FFF2-40B4-BE49-F238E27FC236}">
+                  <a16:creationId xmlns:a16="http://schemas.microsoft.com/office/drawing/2014/main" id="{23E35000-89FE-1310-04F7-845169AD7FCC}"/>
+                </a:ext>
+              </a:extLst>
+            </p:cNvPr>
+            <p:cNvCxnSpPr>
+              <a:cxnSpLocks/>
+              <a:stCxn id="75" idx="0"/>
+            </p:cNvCxnSpPr>
+            <p:nvPr/>
+          </p:nvCxnSpPr>
+          <p:spPr>
+            <a:xfrm flipV="1">
+              <a:off x="5349851" y="8191815"/>
+              <a:ext cx="350521" cy="304800"/>
+            </a:xfrm>
+            <a:prstGeom prst="line">
+              <a:avLst/>
+            </a:prstGeom>
+            <a:ln w="5291">
+              <a:solidFill>
+                <a:srgbClr val="777777"/>
+              </a:solidFill>
+              <a:tailEnd type="triangle" w="med" len="med"/>
+            </a:ln>
+            <a:effectLst/>
+          </p:spPr>
+          <p:style>
+            <a:lnRef idx="2">
+              <a:schemeClr val="accent1"/>
+            </a:lnRef>
+            <a:fillRef idx="0">
+              <a:schemeClr val="accent1"/>
+            </a:fillRef>
+            <a:effectRef idx="1">
+              <a:schemeClr val="accent1"/>
+            </a:effectRef>
+            <a:fontRef idx="minor">
+              <a:schemeClr val="tx1"/>
+            </a:fontRef>
+          </p:style>
+        </p:cxnSp>
+      </p:grpSp>
       <p:sp>
         <p:nvSpPr>
-          <p:cNvPr id="36" name="TextBox 35">
+          <p:cNvPr id="83" name="TextBox 82">
             <a:extLst>
               <a:ext uri="{FF2B5EF4-FFF2-40B4-BE49-F238E27FC236}">
-                <a16:creationId xmlns:a16="http://schemas.microsoft.com/office/drawing/2014/main" id="{4254F8B2-E2DB-2D57-7824-BB0EDD71D88C}"/>
+                <a16:creationId xmlns:a16="http://schemas.microsoft.com/office/drawing/2014/main" id="{6D2388AB-35EC-2E03-F63F-399C50F364DF}"/>
               </a:ext>
             </a:extLst>
           </p:cNvPr>
@@ -5515,2076 +9094,23 @@
         </p:nvSpPr>
         <p:spPr>
           <a:xfrm>
-            <a:off x="4363884" y="4163296"/>
-            <a:ext cx="1219200" cy="169277"/>
-          </a:xfrm>
-          <a:prstGeom prst="rect">
-            <a:avLst/>
-          </a:prstGeom>
-          <a:noFill/>
-        </p:spPr>
-        <p:txBody>
-          <a:bodyPr wrap="square" anchor="t">
-            <a:spAutoFit/>
-          </a:bodyPr>
-          <a:lstStyle/>
-          <a:p>
-            <a:pPr algn="ctr"/>
-            <a:r>
-              <a:rPr sz="500" b="1" dirty="0" err="1">
-                <a:solidFill>
-                  <a:srgbClr val="333333"/>
-                </a:solidFill>
-                <a:latin typeface="맑은 고딕"/>
-                <a:ea typeface="맑은 고딕"/>
-              </a:rPr>
-              <a:t>입력</a:t>
-            </a:r>
-            <a:r>
-              <a:rPr sz="500" b="1" dirty="0">
-                <a:solidFill>
-                  <a:srgbClr val="333333"/>
-                </a:solidFill>
-                <a:latin typeface="맑은 고딕"/>
-                <a:ea typeface="맑은 고딕"/>
-              </a:rPr>
-              <a:t> </a:t>
-            </a:r>
-            <a:r>
-              <a:rPr sz="500" b="1" dirty="0" err="1">
-                <a:solidFill>
-                  <a:srgbClr val="333333"/>
-                </a:solidFill>
-                <a:latin typeface="맑은 고딕"/>
-                <a:ea typeface="맑은 고딕"/>
-              </a:rPr>
-              <a:t>수열</a:t>
-            </a:r>
-            <a:r>
-              <a:rPr sz="500" b="1" dirty="0">
-                <a:solidFill>
-                  <a:srgbClr val="333333"/>
-                </a:solidFill>
-                <a:latin typeface="맑은 고딕"/>
-                <a:ea typeface="맑은 고딕"/>
-              </a:rPr>
-              <a:t> (</a:t>
-            </a:r>
-            <a:r>
-              <a:rPr lang="ko-KR" altLang="en-US" sz="500" b="1" dirty="0">
-                <a:solidFill>
-                  <a:srgbClr val="333333"/>
-                </a:solidFill>
-                <a:latin typeface="맑은 고딕"/>
-                <a:ea typeface="맑은 고딕"/>
-              </a:rPr>
-              <a:t>순서 랜덤</a:t>
-            </a:r>
-            <a:r>
-              <a:rPr sz="500" b="1" dirty="0">
-                <a:solidFill>
-                  <a:srgbClr val="333333"/>
-                </a:solidFill>
-                <a:latin typeface="맑은 고딕"/>
-                <a:ea typeface="맑은 고딕"/>
-              </a:rPr>
-              <a:t>)</a:t>
-            </a:r>
-          </a:p>
-        </p:txBody>
-      </p:sp>
-      <p:sp>
-        <p:nvSpPr>
-          <p:cNvPr id="37" name="Rectangle 3">
-            <a:extLst>
-              <a:ext uri="{FF2B5EF4-FFF2-40B4-BE49-F238E27FC236}">
-                <a16:creationId xmlns:a16="http://schemas.microsoft.com/office/drawing/2014/main" id="{9A6E1F78-0EE2-49E3-E983-72A57441E4EA}"/>
-              </a:ext>
-            </a:extLst>
-          </p:cNvPr>
-          <p:cNvSpPr/>
-          <p:nvPr/>
-        </p:nvSpPr>
-        <p:spPr>
-          <a:xfrm>
-            <a:off x="4546617" y="4333058"/>
-            <a:ext cx="152400" cy="152400"/>
+            <a:off x="7552800" y="4881600"/>
+            <a:ext cx="184731" cy="369332"/>
           </a:xfrm>
           <a:prstGeom prst="rect">
             <a:avLst/>
           </a:prstGeom>
           <a:solidFill>
-            <a:srgbClr val="FFFFFF"/>
+            <a:schemeClr val="bg1"/>
           </a:solidFill>
-          <a:ln w="4233">
-            <a:solidFill>
-              <a:srgbClr val="333333"/>
-            </a:solidFill>
-          </a:ln>
-          <a:effectLst/>
-        </p:spPr>
-        <p:style>
-          <a:lnRef idx="1">
-            <a:schemeClr val="accent1"/>
-          </a:lnRef>
-          <a:fillRef idx="3">
-            <a:schemeClr val="accent1"/>
-          </a:fillRef>
-          <a:effectRef idx="2">
-            <a:schemeClr val="accent1"/>
-          </a:effectRef>
-          <a:fontRef idx="minor">
-            <a:schemeClr val="lt1"/>
-          </a:fontRef>
-        </p:style>
-        <p:txBody>
-          <a:bodyPr wrap="square" lIns="12192" tIns="6096" rIns="12192" bIns="6096" rtlCol="0" anchor="ctr"/>
-          <a:lstStyle/>
-          <a:p>
-            <a:pPr algn="ctr"/>
-            <a:r>
-              <a:rPr sz="600" b="1">
-                <a:solidFill>
-                  <a:srgbClr val="333333"/>
-                </a:solidFill>
-                <a:latin typeface="맑은 고딕"/>
-                <a:ea typeface="맑은 고딕"/>
-              </a:rPr>
-              <a:t>3</a:t>
-            </a:r>
-          </a:p>
-        </p:txBody>
-      </p:sp>
-      <p:sp>
-        <p:nvSpPr>
-          <p:cNvPr id="38" name="Rectangle 4">
-            <a:extLst>
-              <a:ext uri="{FF2B5EF4-FFF2-40B4-BE49-F238E27FC236}">
-                <a16:creationId xmlns:a16="http://schemas.microsoft.com/office/drawing/2014/main" id="{396DE008-8E8B-F9E0-A20F-E8ABC14E70E2}"/>
-              </a:ext>
-            </a:extLst>
-          </p:cNvPr>
-          <p:cNvSpPr/>
-          <p:nvPr/>
-        </p:nvSpPr>
-        <p:spPr>
-          <a:xfrm>
-            <a:off x="4723402" y="4333058"/>
-            <a:ext cx="152400" cy="152400"/>
-          </a:xfrm>
-          <a:prstGeom prst="rect">
-            <a:avLst/>
-          </a:prstGeom>
-          <a:solidFill>
-            <a:srgbClr val="FFFFFF"/>
-          </a:solidFill>
-          <a:ln w="4233">
-            <a:solidFill>
-              <a:srgbClr val="333333"/>
-            </a:solidFill>
-          </a:ln>
-          <a:effectLst/>
-        </p:spPr>
-        <p:style>
-          <a:lnRef idx="1">
-            <a:schemeClr val="accent1"/>
-          </a:lnRef>
-          <a:fillRef idx="3">
-            <a:schemeClr val="accent1"/>
-          </a:fillRef>
-          <a:effectRef idx="2">
-            <a:schemeClr val="accent1"/>
-          </a:effectRef>
-          <a:fontRef idx="minor">
-            <a:schemeClr val="lt1"/>
-          </a:fontRef>
-        </p:style>
-        <p:txBody>
-          <a:bodyPr wrap="square" lIns="12192" tIns="6096" rIns="12192" bIns="6096" rtlCol="0" anchor="ctr"/>
-          <a:lstStyle/>
-          <a:p>
-            <a:pPr algn="ctr"/>
-            <a:r>
-              <a:rPr sz="600" b="1">
-                <a:solidFill>
-                  <a:srgbClr val="333333"/>
-                </a:solidFill>
-                <a:latin typeface="맑은 고딕"/>
-                <a:ea typeface="맑은 고딕"/>
-              </a:rPr>
-              <a:t>1</a:t>
-            </a:r>
-          </a:p>
-        </p:txBody>
-      </p:sp>
-      <p:sp>
-        <p:nvSpPr>
-          <p:cNvPr id="39" name="Rectangle 5">
-            <a:extLst>
-              <a:ext uri="{FF2B5EF4-FFF2-40B4-BE49-F238E27FC236}">
-                <a16:creationId xmlns:a16="http://schemas.microsoft.com/office/drawing/2014/main" id="{7CCDB098-877F-BD88-898D-2C1CC8FFB7C9}"/>
-              </a:ext>
-            </a:extLst>
-          </p:cNvPr>
-          <p:cNvSpPr/>
-          <p:nvPr/>
-        </p:nvSpPr>
-        <p:spPr>
-          <a:xfrm>
-            <a:off x="4900185" y="4333058"/>
-            <a:ext cx="152400" cy="152400"/>
-          </a:xfrm>
-          <a:prstGeom prst="rect">
-            <a:avLst/>
-          </a:prstGeom>
-          <a:solidFill>
-            <a:srgbClr val="FFFFFF"/>
-          </a:solidFill>
-          <a:ln w="4233">
-            <a:solidFill>
-              <a:srgbClr val="333333"/>
-            </a:solidFill>
-          </a:ln>
-          <a:effectLst/>
-        </p:spPr>
-        <p:style>
-          <a:lnRef idx="1">
-            <a:schemeClr val="accent1"/>
-          </a:lnRef>
-          <a:fillRef idx="3">
-            <a:schemeClr val="accent1"/>
-          </a:fillRef>
-          <a:effectRef idx="2">
-            <a:schemeClr val="accent1"/>
-          </a:effectRef>
-          <a:fontRef idx="minor">
-            <a:schemeClr val="lt1"/>
-          </a:fontRef>
-        </p:style>
-        <p:txBody>
-          <a:bodyPr wrap="square" lIns="12192" tIns="6096" rIns="12192" bIns="6096" rtlCol="0" anchor="ctr"/>
-          <a:lstStyle/>
-          <a:p>
-            <a:pPr algn="ctr"/>
-            <a:r>
-              <a:rPr sz="600" b="1">
-                <a:solidFill>
-                  <a:srgbClr val="333333"/>
-                </a:solidFill>
-                <a:latin typeface="맑은 고딕"/>
-                <a:ea typeface="맑은 고딕"/>
-              </a:rPr>
-              <a:t>4</a:t>
-            </a:r>
-          </a:p>
-        </p:txBody>
-      </p:sp>
-      <p:sp>
-        <p:nvSpPr>
-          <p:cNvPr id="40" name="Rectangle 6">
-            <a:extLst>
-              <a:ext uri="{FF2B5EF4-FFF2-40B4-BE49-F238E27FC236}">
-                <a16:creationId xmlns:a16="http://schemas.microsoft.com/office/drawing/2014/main" id="{AADD7C06-939C-E566-59A7-F75ECB908A28}"/>
-              </a:ext>
-            </a:extLst>
-          </p:cNvPr>
-          <p:cNvSpPr/>
-          <p:nvPr/>
-        </p:nvSpPr>
-        <p:spPr>
-          <a:xfrm>
-            <a:off x="5076969" y="4333058"/>
-            <a:ext cx="152400" cy="152400"/>
-          </a:xfrm>
-          <a:prstGeom prst="rect">
-            <a:avLst/>
-          </a:prstGeom>
-          <a:solidFill>
-            <a:srgbClr val="FFFFFF"/>
-          </a:solidFill>
-          <a:ln w="4233">
-            <a:solidFill>
-              <a:srgbClr val="333333"/>
-            </a:solidFill>
-          </a:ln>
-          <a:effectLst/>
-        </p:spPr>
-        <p:style>
-          <a:lnRef idx="1">
-            <a:schemeClr val="accent1"/>
-          </a:lnRef>
-          <a:fillRef idx="3">
-            <a:schemeClr val="accent1"/>
-          </a:fillRef>
-          <a:effectRef idx="2">
-            <a:schemeClr val="accent1"/>
-          </a:effectRef>
-          <a:fontRef idx="minor">
-            <a:schemeClr val="lt1"/>
-          </a:fontRef>
-        </p:style>
-        <p:txBody>
-          <a:bodyPr wrap="square" lIns="12192" tIns="6096" rIns="12192" bIns="6096" rtlCol="0" anchor="ctr"/>
-          <a:lstStyle/>
-          <a:p>
-            <a:pPr algn="ctr"/>
-            <a:r>
-              <a:rPr sz="600" b="1">
-                <a:solidFill>
-                  <a:srgbClr val="333333"/>
-                </a:solidFill>
-                <a:latin typeface="맑은 고딕"/>
-                <a:ea typeface="맑은 고딕"/>
-              </a:rPr>
-              <a:t>1</a:t>
-            </a:r>
-          </a:p>
-        </p:txBody>
-      </p:sp>
-      <p:sp>
-        <p:nvSpPr>
-          <p:cNvPr id="41" name="Rectangle 7">
-            <a:extLst>
-              <a:ext uri="{FF2B5EF4-FFF2-40B4-BE49-F238E27FC236}">
-                <a16:creationId xmlns:a16="http://schemas.microsoft.com/office/drawing/2014/main" id="{5993AA03-CEF1-14EC-5E70-534424E88481}"/>
-              </a:ext>
-            </a:extLst>
-          </p:cNvPr>
-          <p:cNvSpPr/>
-          <p:nvPr/>
-        </p:nvSpPr>
-        <p:spPr>
-          <a:xfrm>
-            <a:off x="5253753" y="4333058"/>
-            <a:ext cx="152400" cy="152400"/>
-          </a:xfrm>
-          <a:prstGeom prst="rect">
-            <a:avLst/>
-          </a:prstGeom>
-          <a:solidFill>
-            <a:srgbClr val="FFFFFF"/>
-          </a:solidFill>
-          <a:ln w="4233">
-            <a:solidFill>
-              <a:srgbClr val="333333"/>
-            </a:solidFill>
-          </a:ln>
-          <a:effectLst/>
-        </p:spPr>
-        <p:style>
-          <a:lnRef idx="1">
-            <a:schemeClr val="accent1"/>
-          </a:lnRef>
-          <a:fillRef idx="3">
-            <a:schemeClr val="accent1"/>
-          </a:fillRef>
-          <a:effectRef idx="2">
-            <a:schemeClr val="accent1"/>
-          </a:effectRef>
-          <a:fontRef idx="minor">
-            <a:schemeClr val="lt1"/>
-          </a:fontRef>
-        </p:style>
-        <p:txBody>
-          <a:bodyPr wrap="square" lIns="12192" tIns="6096" rIns="12192" bIns="6096" rtlCol="0" anchor="ctr"/>
-          <a:lstStyle/>
-          <a:p>
-            <a:pPr algn="ctr"/>
-            <a:r>
-              <a:rPr sz="600" b="1">
-                <a:solidFill>
-                  <a:srgbClr val="333333"/>
-                </a:solidFill>
-                <a:latin typeface="맑은 고딕"/>
-                <a:ea typeface="맑은 고딕"/>
-              </a:rPr>
-              <a:t>5</a:t>
-            </a:r>
-          </a:p>
-        </p:txBody>
-      </p:sp>
-      <p:cxnSp>
-        <p:nvCxnSpPr>
-          <p:cNvPr id="42" name="Connector 8">
-            <a:extLst>
-              <a:ext uri="{FF2B5EF4-FFF2-40B4-BE49-F238E27FC236}">
-                <a16:creationId xmlns:a16="http://schemas.microsoft.com/office/drawing/2014/main" id="{15F7A10F-9DD1-CEA6-BB41-D41215BE847C}"/>
-              </a:ext>
-            </a:extLst>
-          </p:cNvPr>
-          <p:cNvCxnSpPr>
-            <a:cxnSpLocks/>
-          </p:cNvCxnSpPr>
-          <p:nvPr/>
-        </p:nvCxnSpPr>
-        <p:spPr>
-          <a:xfrm flipH="1">
-            <a:off x="3905762" y="4510194"/>
-            <a:ext cx="1068594" cy="188624"/>
-          </a:xfrm>
-          <a:prstGeom prst="line">
-            <a:avLst/>
-          </a:prstGeom>
-          <a:ln w="5291">
-            <a:solidFill>
-              <a:srgbClr val="777777"/>
-            </a:solidFill>
-            <a:tailEnd type="triangle" w="med" len="med"/>
-          </a:ln>
-          <a:effectLst/>
-        </p:spPr>
-        <p:style>
-          <a:lnRef idx="2">
-            <a:schemeClr val="accent1"/>
-          </a:lnRef>
-          <a:fillRef idx="0">
-            <a:schemeClr val="accent1"/>
-          </a:fillRef>
-          <a:effectRef idx="1">
-            <a:schemeClr val="accent1"/>
-          </a:effectRef>
-          <a:fontRef idx="minor">
-            <a:schemeClr val="tx1"/>
-          </a:fontRef>
-        </p:style>
-      </p:cxnSp>
-      <p:sp>
-        <p:nvSpPr>
-          <p:cNvPr id="43" name="TextBox 42">
-            <a:extLst>
-              <a:ext uri="{FF2B5EF4-FFF2-40B4-BE49-F238E27FC236}">
-                <a16:creationId xmlns:a16="http://schemas.microsoft.com/office/drawing/2014/main" id="{E91060F0-77DB-DBC0-3477-BF10644305BB}"/>
-              </a:ext>
-            </a:extLst>
-          </p:cNvPr>
-          <p:cNvSpPr txBox="1"/>
-          <p:nvPr/>
-        </p:nvSpPr>
-        <p:spPr>
-          <a:xfrm>
-            <a:off x="3245530" y="4706778"/>
-            <a:ext cx="1219200" cy="169277"/>
-          </a:xfrm>
-          <a:prstGeom prst="rect">
-            <a:avLst/>
-          </a:prstGeom>
-          <a:noFill/>
         </p:spPr>
         <p:txBody>
-          <a:bodyPr wrap="square" anchor="t">
+          <a:bodyPr wrap="none" rtlCol="0">
             <a:spAutoFit/>
           </a:bodyPr>
           <a:lstStyle/>
           <a:p>
-            <a:pPr algn="ctr"/>
-            <a:r>
-              <a:rPr sz="500" b="1" dirty="0" err="1">
-                <a:solidFill>
-                  <a:srgbClr val="333333"/>
-                </a:solidFill>
-                <a:latin typeface="맑은 고딕"/>
-                <a:ea typeface="맑은 고딕"/>
-              </a:rPr>
-              <a:t>기준</a:t>
-            </a:r>
-            <a:r>
-              <a:rPr sz="500" b="1" dirty="0">
-                <a:solidFill>
-                  <a:srgbClr val="333333"/>
-                </a:solidFill>
-                <a:latin typeface="맑은 고딕"/>
-                <a:ea typeface="맑은 고딕"/>
-              </a:rPr>
-              <a:t> A </a:t>
-            </a:r>
-            <a:r>
-              <a:rPr lang="en-US" altLang="ko-KR" sz="500" b="1" dirty="0">
-                <a:solidFill>
-                  <a:srgbClr val="333333"/>
-                </a:solidFill>
-                <a:latin typeface="맑은 고딕"/>
-                <a:ea typeface="맑은 고딕"/>
-              </a:rPr>
-              <a:t>-</a:t>
-            </a:r>
-            <a:r>
-              <a:rPr sz="500" b="1" dirty="0">
-                <a:solidFill>
-                  <a:srgbClr val="333333"/>
-                </a:solidFill>
-                <a:latin typeface="맑은 고딕"/>
-                <a:ea typeface="맑은 고딕"/>
-              </a:rPr>
-              <a:t> </a:t>
-            </a:r>
-            <a:r>
-              <a:rPr sz="500" b="1" dirty="0" err="1">
-                <a:solidFill>
-                  <a:srgbClr val="333333"/>
-                </a:solidFill>
-                <a:latin typeface="맑은 고딕"/>
-                <a:ea typeface="맑은 고딕"/>
-              </a:rPr>
-              <a:t>오름차순</a:t>
-            </a:r>
-            <a:r>
-              <a:rPr sz="500" b="1" dirty="0">
-                <a:solidFill>
-                  <a:srgbClr val="333333"/>
-                </a:solidFill>
-                <a:latin typeface="맑은 고딕"/>
-                <a:ea typeface="맑은 고딕"/>
-              </a:rPr>
-              <a:t> </a:t>
-            </a:r>
-            <a:r>
-              <a:rPr sz="500" b="1" dirty="0" err="1">
-                <a:solidFill>
-                  <a:srgbClr val="333333"/>
-                </a:solidFill>
-                <a:latin typeface="맑은 고딕"/>
-                <a:ea typeface="맑은 고딕"/>
-              </a:rPr>
-              <a:t>정렬</a:t>
-            </a:r>
-            <a:endParaRPr sz="500" b="1" dirty="0">
-              <a:solidFill>
-                <a:srgbClr val="333333"/>
-              </a:solidFill>
-              <a:latin typeface="맑은 고딕"/>
-              <a:ea typeface="맑은 고딕"/>
-            </a:endParaRPr>
-          </a:p>
-        </p:txBody>
-      </p:sp>
-      <p:sp>
-        <p:nvSpPr>
-          <p:cNvPr id="44" name="Rectangle 10">
-            <a:extLst>
-              <a:ext uri="{FF2B5EF4-FFF2-40B4-BE49-F238E27FC236}">
-                <a16:creationId xmlns:a16="http://schemas.microsoft.com/office/drawing/2014/main" id="{6328C051-61EE-3B83-86D9-9064F54AC4B2}"/>
-              </a:ext>
-            </a:extLst>
-          </p:cNvPr>
-          <p:cNvSpPr/>
-          <p:nvPr/>
-        </p:nvSpPr>
-        <p:spPr>
-          <a:xfrm>
-            <a:off x="3461086" y="4866458"/>
-            <a:ext cx="152400" cy="152400"/>
-          </a:xfrm>
-          <a:prstGeom prst="rect">
-            <a:avLst/>
-          </a:prstGeom>
-          <a:solidFill>
-            <a:srgbClr val="FFFFFF"/>
-          </a:solidFill>
-          <a:ln w="4233">
-            <a:solidFill>
-              <a:srgbClr val="333333"/>
-            </a:solidFill>
-          </a:ln>
-          <a:effectLst/>
-        </p:spPr>
-        <p:style>
-          <a:lnRef idx="1">
-            <a:schemeClr val="accent1"/>
-          </a:lnRef>
-          <a:fillRef idx="3">
-            <a:schemeClr val="accent1"/>
-          </a:fillRef>
-          <a:effectRef idx="2">
-            <a:schemeClr val="accent1"/>
-          </a:effectRef>
-          <a:fontRef idx="minor">
-            <a:schemeClr val="lt1"/>
-          </a:fontRef>
-        </p:style>
-        <p:txBody>
-          <a:bodyPr wrap="square" lIns="12192" tIns="6096" rIns="12192" bIns="6096" rtlCol="0" anchor="ctr"/>
-          <a:lstStyle/>
-          <a:p>
-            <a:pPr algn="ctr"/>
-            <a:r>
-              <a:rPr sz="600" b="1">
-                <a:solidFill>
-                  <a:srgbClr val="333333"/>
-                </a:solidFill>
-                <a:latin typeface="맑은 고딕"/>
-                <a:ea typeface="맑은 고딕"/>
-              </a:rPr>
-              <a:t>1</a:t>
-            </a:r>
-          </a:p>
-        </p:txBody>
-      </p:sp>
-      <p:sp>
-        <p:nvSpPr>
-          <p:cNvPr id="45" name="Rectangle 11">
-            <a:extLst>
-              <a:ext uri="{FF2B5EF4-FFF2-40B4-BE49-F238E27FC236}">
-                <a16:creationId xmlns:a16="http://schemas.microsoft.com/office/drawing/2014/main" id="{2599D488-F670-9781-AAC4-18D9039DD856}"/>
-              </a:ext>
-            </a:extLst>
-          </p:cNvPr>
-          <p:cNvSpPr/>
-          <p:nvPr/>
-        </p:nvSpPr>
-        <p:spPr>
-          <a:xfrm>
-            <a:off x="3637870" y="4866458"/>
-            <a:ext cx="152400" cy="152400"/>
-          </a:xfrm>
-          <a:prstGeom prst="rect">
-            <a:avLst/>
-          </a:prstGeom>
-          <a:solidFill>
-            <a:srgbClr val="FFFFFF"/>
-          </a:solidFill>
-          <a:ln w="4233">
-            <a:solidFill>
-              <a:srgbClr val="333333"/>
-            </a:solidFill>
-          </a:ln>
-          <a:effectLst/>
-        </p:spPr>
-        <p:style>
-          <a:lnRef idx="1">
-            <a:schemeClr val="accent1"/>
-          </a:lnRef>
-          <a:fillRef idx="3">
-            <a:schemeClr val="accent1"/>
-          </a:fillRef>
-          <a:effectRef idx="2">
-            <a:schemeClr val="accent1"/>
-          </a:effectRef>
-          <a:fontRef idx="minor">
-            <a:schemeClr val="lt1"/>
-          </a:fontRef>
-        </p:style>
-        <p:txBody>
-          <a:bodyPr wrap="square" lIns="12192" tIns="6096" rIns="12192" bIns="6096" rtlCol="0" anchor="ctr"/>
-          <a:lstStyle/>
-          <a:p>
-            <a:pPr algn="ctr"/>
-            <a:r>
-              <a:rPr sz="600" b="1">
-                <a:solidFill>
-                  <a:srgbClr val="333333"/>
-                </a:solidFill>
-                <a:latin typeface="맑은 고딕"/>
-                <a:ea typeface="맑은 고딕"/>
-              </a:rPr>
-              <a:t>1</a:t>
-            </a:r>
-          </a:p>
-        </p:txBody>
-      </p:sp>
-      <p:sp>
-        <p:nvSpPr>
-          <p:cNvPr id="46" name="Rectangle 12">
-            <a:extLst>
-              <a:ext uri="{FF2B5EF4-FFF2-40B4-BE49-F238E27FC236}">
-                <a16:creationId xmlns:a16="http://schemas.microsoft.com/office/drawing/2014/main" id="{4C40E51C-67B3-EBEA-3AD3-94CFD50BB310}"/>
-              </a:ext>
-            </a:extLst>
-          </p:cNvPr>
-          <p:cNvSpPr/>
-          <p:nvPr/>
-        </p:nvSpPr>
-        <p:spPr>
-          <a:xfrm>
-            <a:off x="3814654" y="4866458"/>
-            <a:ext cx="152400" cy="152400"/>
-          </a:xfrm>
-          <a:prstGeom prst="rect">
-            <a:avLst/>
-          </a:prstGeom>
-          <a:solidFill>
-            <a:srgbClr val="FFFFFF"/>
-          </a:solidFill>
-          <a:ln w="4233">
-            <a:solidFill>
-              <a:srgbClr val="333333"/>
-            </a:solidFill>
-          </a:ln>
-          <a:effectLst/>
-        </p:spPr>
-        <p:style>
-          <a:lnRef idx="1">
-            <a:schemeClr val="accent1"/>
-          </a:lnRef>
-          <a:fillRef idx="3">
-            <a:schemeClr val="accent1"/>
-          </a:fillRef>
-          <a:effectRef idx="2">
-            <a:schemeClr val="accent1"/>
-          </a:effectRef>
-          <a:fontRef idx="minor">
-            <a:schemeClr val="lt1"/>
-          </a:fontRef>
-        </p:style>
-        <p:txBody>
-          <a:bodyPr wrap="square" lIns="12192" tIns="6096" rIns="12192" bIns="6096" rtlCol="0" anchor="ctr"/>
-          <a:lstStyle/>
-          <a:p>
-            <a:pPr algn="ctr"/>
-            <a:r>
-              <a:rPr sz="600" b="1">
-                <a:solidFill>
-                  <a:srgbClr val="333333"/>
-                </a:solidFill>
-                <a:latin typeface="맑은 고딕"/>
-                <a:ea typeface="맑은 고딕"/>
-              </a:rPr>
-              <a:t>3</a:t>
-            </a:r>
-          </a:p>
-        </p:txBody>
-      </p:sp>
-      <p:sp>
-        <p:nvSpPr>
-          <p:cNvPr id="47" name="Rectangle 13">
-            <a:extLst>
-              <a:ext uri="{FF2B5EF4-FFF2-40B4-BE49-F238E27FC236}">
-                <a16:creationId xmlns:a16="http://schemas.microsoft.com/office/drawing/2014/main" id="{7AE4DC3D-49EE-8594-55E3-F5EF922F4994}"/>
-              </a:ext>
-            </a:extLst>
-          </p:cNvPr>
-          <p:cNvSpPr/>
-          <p:nvPr/>
-        </p:nvSpPr>
-        <p:spPr>
-          <a:xfrm>
-            <a:off x="3991438" y="4866458"/>
-            <a:ext cx="152400" cy="152400"/>
-          </a:xfrm>
-          <a:prstGeom prst="rect">
-            <a:avLst/>
-          </a:prstGeom>
-          <a:solidFill>
-            <a:srgbClr val="FFFFFF"/>
-          </a:solidFill>
-          <a:ln w="4233">
-            <a:solidFill>
-              <a:srgbClr val="333333"/>
-            </a:solidFill>
-          </a:ln>
-          <a:effectLst/>
-        </p:spPr>
-        <p:style>
-          <a:lnRef idx="1">
-            <a:schemeClr val="accent1"/>
-          </a:lnRef>
-          <a:fillRef idx="3">
-            <a:schemeClr val="accent1"/>
-          </a:fillRef>
-          <a:effectRef idx="2">
-            <a:schemeClr val="accent1"/>
-          </a:effectRef>
-          <a:fontRef idx="minor">
-            <a:schemeClr val="lt1"/>
-          </a:fontRef>
-        </p:style>
-        <p:txBody>
-          <a:bodyPr wrap="square" lIns="12192" tIns="6096" rIns="12192" bIns="6096" rtlCol="0" anchor="ctr"/>
-          <a:lstStyle/>
-          <a:p>
-            <a:pPr algn="ctr"/>
-            <a:r>
-              <a:rPr sz="600" b="1">
-                <a:solidFill>
-                  <a:srgbClr val="333333"/>
-                </a:solidFill>
-                <a:latin typeface="맑은 고딕"/>
-                <a:ea typeface="맑은 고딕"/>
-              </a:rPr>
-              <a:t>4</a:t>
-            </a:r>
-          </a:p>
-        </p:txBody>
-      </p:sp>
-      <p:sp>
-        <p:nvSpPr>
-          <p:cNvPr id="48" name="Rectangle 14">
-            <a:extLst>
-              <a:ext uri="{FF2B5EF4-FFF2-40B4-BE49-F238E27FC236}">
-                <a16:creationId xmlns:a16="http://schemas.microsoft.com/office/drawing/2014/main" id="{AB929C1B-46D5-986F-9C41-7A21F3A28E1F}"/>
-              </a:ext>
-            </a:extLst>
-          </p:cNvPr>
-          <p:cNvSpPr/>
-          <p:nvPr/>
-        </p:nvSpPr>
-        <p:spPr>
-          <a:xfrm>
-            <a:off x="4168222" y="4866458"/>
-            <a:ext cx="152400" cy="152400"/>
-          </a:xfrm>
-          <a:prstGeom prst="rect">
-            <a:avLst/>
-          </a:prstGeom>
-          <a:solidFill>
-            <a:srgbClr val="FFFFFF"/>
-          </a:solidFill>
-          <a:ln w="4233">
-            <a:solidFill>
-              <a:srgbClr val="333333"/>
-            </a:solidFill>
-          </a:ln>
-          <a:effectLst/>
-        </p:spPr>
-        <p:style>
-          <a:lnRef idx="1">
-            <a:schemeClr val="accent1"/>
-          </a:lnRef>
-          <a:fillRef idx="3">
-            <a:schemeClr val="accent1"/>
-          </a:fillRef>
-          <a:effectRef idx="2">
-            <a:schemeClr val="accent1"/>
-          </a:effectRef>
-          <a:fontRef idx="minor">
-            <a:schemeClr val="lt1"/>
-          </a:fontRef>
-        </p:style>
-        <p:txBody>
-          <a:bodyPr wrap="square" lIns="12192" tIns="6096" rIns="12192" bIns="6096" rtlCol="0" anchor="ctr"/>
-          <a:lstStyle/>
-          <a:p>
-            <a:pPr algn="ctr"/>
-            <a:r>
-              <a:rPr sz="600" b="1">
-                <a:solidFill>
-                  <a:srgbClr val="333333"/>
-                </a:solidFill>
-                <a:latin typeface="맑은 고딕"/>
-                <a:ea typeface="맑은 고딕"/>
-              </a:rPr>
-              <a:t>5</a:t>
-            </a:r>
-          </a:p>
-        </p:txBody>
-      </p:sp>
-      <p:cxnSp>
-        <p:nvCxnSpPr>
-          <p:cNvPr id="49" name="Connector 16">
-            <a:extLst>
-              <a:ext uri="{FF2B5EF4-FFF2-40B4-BE49-F238E27FC236}">
-                <a16:creationId xmlns:a16="http://schemas.microsoft.com/office/drawing/2014/main" id="{D49AB154-429B-8940-AC55-55C0D4638F47}"/>
-              </a:ext>
-            </a:extLst>
-          </p:cNvPr>
-          <p:cNvCxnSpPr>
-            <a:cxnSpLocks/>
-          </p:cNvCxnSpPr>
-          <p:nvPr/>
-        </p:nvCxnSpPr>
-        <p:spPr>
-          <a:xfrm>
-            <a:off x="4976385" y="4510194"/>
-            <a:ext cx="0" cy="188624"/>
-          </a:xfrm>
-          <a:prstGeom prst="line">
-            <a:avLst/>
-          </a:prstGeom>
-          <a:ln w="5291">
-            <a:solidFill>
-              <a:srgbClr val="777777"/>
-            </a:solidFill>
-            <a:tailEnd type="triangle" w="med" len="med"/>
-          </a:ln>
-          <a:effectLst/>
-        </p:spPr>
-        <p:style>
-          <a:lnRef idx="2">
-            <a:schemeClr val="accent1"/>
-          </a:lnRef>
-          <a:fillRef idx="0">
-            <a:schemeClr val="accent1"/>
-          </a:fillRef>
-          <a:effectRef idx="1">
-            <a:schemeClr val="accent1"/>
-          </a:effectRef>
-          <a:fontRef idx="minor">
-            <a:schemeClr val="tx1"/>
-          </a:fontRef>
-        </p:style>
-      </p:cxnSp>
-      <p:sp>
-        <p:nvSpPr>
-          <p:cNvPr id="50" name="TextBox 49">
-            <a:extLst>
-              <a:ext uri="{FF2B5EF4-FFF2-40B4-BE49-F238E27FC236}">
-                <a16:creationId xmlns:a16="http://schemas.microsoft.com/office/drawing/2014/main" id="{016A07C4-0B9B-82FA-D664-DD64444B7017}"/>
-              </a:ext>
-            </a:extLst>
-          </p:cNvPr>
-          <p:cNvSpPr txBox="1"/>
-          <p:nvPr/>
-        </p:nvSpPr>
-        <p:spPr>
-          <a:xfrm>
-            <a:off x="4366786" y="4706778"/>
-            <a:ext cx="1260952" cy="169277"/>
-          </a:xfrm>
-          <a:prstGeom prst="rect">
-            <a:avLst/>
-          </a:prstGeom>
-          <a:noFill/>
-        </p:spPr>
-        <p:txBody>
-          <a:bodyPr wrap="square" anchor="t">
-            <a:spAutoFit/>
-          </a:bodyPr>
-          <a:lstStyle/>
-          <a:p>
-            <a:pPr algn="ctr"/>
-            <a:r>
-              <a:rPr sz="500" b="1" dirty="0" err="1">
-                <a:solidFill>
-                  <a:srgbClr val="333333"/>
-                </a:solidFill>
-                <a:latin typeface="맑은 고딕"/>
-                <a:ea typeface="맑은 고딕"/>
-              </a:rPr>
-              <a:t>기준</a:t>
-            </a:r>
-            <a:r>
-              <a:rPr sz="500" b="1" dirty="0">
-                <a:solidFill>
-                  <a:srgbClr val="333333"/>
-                </a:solidFill>
-                <a:latin typeface="맑은 고딕"/>
-                <a:ea typeface="맑은 고딕"/>
-              </a:rPr>
-              <a:t> B </a:t>
-            </a:r>
-            <a:r>
-              <a:rPr lang="en-US" altLang="ko-KR" sz="500" b="1" dirty="0">
-                <a:solidFill>
-                  <a:srgbClr val="333333"/>
-                </a:solidFill>
-                <a:latin typeface="맑은 고딕"/>
-                <a:ea typeface="맑은 고딕"/>
-              </a:rPr>
-              <a:t>-</a:t>
-            </a:r>
-            <a:r>
-              <a:rPr sz="500" b="1" dirty="0">
-                <a:solidFill>
-                  <a:srgbClr val="333333"/>
-                </a:solidFill>
-                <a:latin typeface="맑은 고딕"/>
-                <a:ea typeface="맑은 고딕"/>
-              </a:rPr>
-              <a:t> </a:t>
-            </a:r>
-            <a:r>
-              <a:rPr sz="500" b="1" dirty="0" err="1">
-                <a:solidFill>
-                  <a:srgbClr val="333333"/>
-                </a:solidFill>
-                <a:latin typeface="맑은 고딕"/>
-                <a:ea typeface="맑은 고딕"/>
-              </a:rPr>
-              <a:t>잉여류</a:t>
-            </a:r>
-            <a:r>
-              <a:rPr sz="500" b="1" dirty="0">
-                <a:solidFill>
-                  <a:srgbClr val="333333"/>
-                </a:solidFill>
-                <a:latin typeface="맑은 고딕"/>
-                <a:ea typeface="맑은 고딕"/>
-              </a:rPr>
-              <a:t> </a:t>
-            </a:r>
-            <a:r>
-              <a:rPr sz="500" b="1" dirty="0" err="1">
-                <a:solidFill>
-                  <a:srgbClr val="333333"/>
-                </a:solidFill>
-                <a:latin typeface="맑은 고딕"/>
-                <a:ea typeface="맑은 고딕"/>
-              </a:rPr>
-              <a:t>기반</a:t>
-            </a:r>
-            <a:r>
-              <a:rPr sz="500" b="1" dirty="0">
-                <a:solidFill>
-                  <a:srgbClr val="333333"/>
-                </a:solidFill>
-                <a:latin typeface="맑은 고딕"/>
-                <a:ea typeface="맑은 고딕"/>
-              </a:rPr>
-              <a:t> </a:t>
-            </a:r>
-            <a:r>
-              <a:rPr sz="500" b="1" dirty="0" err="1">
-                <a:solidFill>
-                  <a:srgbClr val="333333"/>
-                </a:solidFill>
-                <a:latin typeface="맑은 고딕"/>
-                <a:ea typeface="맑은 고딕"/>
-              </a:rPr>
-              <a:t>정렬</a:t>
-            </a:r>
-            <a:r>
-              <a:rPr sz="500" b="1" dirty="0">
-                <a:solidFill>
-                  <a:srgbClr val="333333"/>
-                </a:solidFill>
-                <a:latin typeface="맑은 고딕"/>
-                <a:ea typeface="맑은 고딕"/>
-              </a:rPr>
-              <a:t> (mod 3)</a:t>
-            </a:r>
-          </a:p>
-        </p:txBody>
-      </p:sp>
-      <p:sp>
-        <p:nvSpPr>
-          <p:cNvPr id="51" name="Rectangle 18">
-            <a:extLst>
-              <a:ext uri="{FF2B5EF4-FFF2-40B4-BE49-F238E27FC236}">
-                <a16:creationId xmlns:a16="http://schemas.microsoft.com/office/drawing/2014/main" id="{56ED826F-6F7D-CCB5-76A1-EA49A9AF35F1}"/>
-              </a:ext>
-            </a:extLst>
-          </p:cNvPr>
-          <p:cNvSpPr/>
-          <p:nvPr/>
-        </p:nvSpPr>
-        <p:spPr>
-          <a:xfrm>
-            <a:off x="4546617" y="4866458"/>
-            <a:ext cx="152400" cy="152400"/>
-          </a:xfrm>
-          <a:prstGeom prst="rect">
-            <a:avLst/>
-          </a:prstGeom>
-          <a:solidFill>
-            <a:srgbClr val="DCE6F1"/>
-          </a:solidFill>
-          <a:ln w="4233">
-            <a:solidFill>
-              <a:srgbClr val="333333"/>
-            </a:solidFill>
-          </a:ln>
-          <a:effectLst/>
-        </p:spPr>
-        <p:style>
-          <a:lnRef idx="1">
-            <a:schemeClr val="accent1"/>
-          </a:lnRef>
-          <a:fillRef idx="3">
-            <a:schemeClr val="accent1"/>
-          </a:fillRef>
-          <a:effectRef idx="2">
-            <a:schemeClr val="accent1"/>
-          </a:effectRef>
-          <a:fontRef idx="minor">
-            <a:schemeClr val="lt1"/>
-          </a:fontRef>
-        </p:style>
-        <p:txBody>
-          <a:bodyPr wrap="square" lIns="12192" tIns="6096" rIns="12192" bIns="6096" rtlCol="0" anchor="ctr"/>
-          <a:lstStyle/>
-          <a:p>
-            <a:pPr algn="ctr"/>
-            <a:r>
-              <a:rPr sz="600" b="1">
-                <a:solidFill>
-                  <a:srgbClr val="333333"/>
-                </a:solidFill>
-                <a:latin typeface="맑은 고딕"/>
-                <a:ea typeface="맑은 고딕"/>
-              </a:rPr>
-              <a:t>3</a:t>
-            </a:r>
-          </a:p>
-        </p:txBody>
-      </p:sp>
-      <p:sp>
-        <p:nvSpPr>
-          <p:cNvPr id="52" name="Rectangle 19">
-            <a:extLst>
-              <a:ext uri="{FF2B5EF4-FFF2-40B4-BE49-F238E27FC236}">
-                <a16:creationId xmlns:a16="http://schemas.microsoft.com/office/drawing/2014/main" id="{A3D7B0EE-BC96-E9BD-9B79-5468972B9012}"/>
-              </a:ext>
-            </a:extLst>
-          </p:cNvPr>
-          <p:cNvSpPr/>
-          <p:nvPr/>
-        </p:nvSpPr>
-        <p:spPr>
-          <a:xfrm>
-            <a:off x="4723402" y="4866458"/>
-            <a:ext cx="152400" cy="152400"/>
-          </a:xfrm>
-          <a:prstGeom prst="rect">
-            <a:avLst/>
-          </a:prstGeom>
-          <a:solidFill>
-            <a:srgbClr val="FDEBD0"/>
-          </a:solidFill>
-          <a:ln w="4233">
-            <a:solidFill>
-              <a:srgbClr val="333333"/>
-            </a:solidFill>
-          </a:ln>
-          <a:effectLst/>
-        </p:spPr>
-        <p:style>
-          <a:lnRef idx="1">
-            <a:schemeClr val="accent1"/>
-          </a:lnRef>
-          <a:fillRef idx="3">
-            <a:schemeClr val="accent1"/>
-          </a:fillRef>
-          <a:effectRef idx="2">
-            <a:schemeClr val="accent1"/>
-          </a:effectRef>
-          <a:fontRef idx="minor">
-            <a:schemeClr val="lt1"/>
-          </a:fontRef>
-        </p:style>
-        <p:txBody>
-          <a:bodyPr wrap="square" lIns="12192" tIns="6096" rIns="12192" bIns="6096" rtlCol="0" anchor="ctr"/>
-          <a:lstStyle/>
-          <a:p>
-            <a:pPr algn="ctr"/>
-            <a:r>
-              <a:rPr sz="600" b="1">
-                <a:solidFill>
-                  <a:srgbClr val="333333"/>
-                </a:solidFill>
-                <a:latin typeface="맑은 고딕"/>
-                <a:ea typeface="맑은 고딕"/>
-              </a:rPr>
-              <a:t>1</a:t>
-            </a:r>
-          </a:p>
-        </p:txBody>
-      </p:sp>
-      <p:sp>
-        <p:nvSpPr>
-          <p:cNvPr id="53" name="Rectangle 20">
-            <a:extLst>
-              <a:ext uri="{FF2B5EF4-FFF2-40B4-BE49-F238E27FC236}">
-                <a16:creationId xmlns:a16="http://schemas.microsoft.com/office/drawing/2014/main" id="{726D7316-B0E0-776E-1C02-E564BC9AC693}"/>
-              </a:ext>
-            </a:extLst>
-          </p:cNvPr>
-          <p:cNvSpPr/>
-          <p:nvPr/>
-        </p:nvSpPr>
-        <p:spPr>
-          <a:xfrm>
-            <a:off x="4900185" y="4866458"/>
-            <a:ext cx="152400" cy="152400"/>
-          </a:xfrm>
-          <a:prstGeom prst="rect">
-            <a:avLst/>
-          </a:prstGeom>
-          <a:solidFill>
-            <a:srgbClr val="FDEBD0"/>
-          </a:solidFill>
-          <a:ln w="4233">
-            <a:solidFill>
-              <a:srgbClr val="333333"/>
-            </a:solidFill>
-          </a:ln>
-          <a:effectLst/>
-        </p:spPr>
-        <p:style>
-          <a:lnRef idx="1">
-            <a:schemeClr val="accent1"/>
-          </a:lnRef>
-          <a:fillRef idx="3">
-            <a:schemeClr val="accent1"/>
-          </a:fillRef>
-          <a:effectRef idx="2">
-            <a:schemeClr val="accent1"/>
-          </a:effectRef>
-          <a:fontRef idx="minor">
-            <a:schemeClr val="lt1"/>
-          </a:fontRef>
-        </p:style>
-        <p:txBody>
-          <a:bodyPr wrap="square" lIns="12192" tIns="6096" rIns="12192" bIns="6096" rtlCol="0" anchor="ctr"/>
-          <a:lstStyle/>
-          <a:p>
-            <a:pPr algn="ctr"/>
-            <a:r>
-              <a:rPr sz="600" b="1">
-                <a:solidFill>
-                  <a:srgbClr val="333333"/>
-                </a:solidFill>
-                <a:latin typeface="맑은 고딕"/>
-                <a:ea typeface="맑은 고딕"/>
-              </a:rPr>
-              <a:t>1</a:t>
-            </a:r>
-          </a:p>
-        </p:txBody>
-      </p:sp>
-      <p:sp>
-        <p:nvSpPr>
-          <p:cNvPr id="54" name="Rectangle 21">
-            <a:extLst>
-              <a:ext uri="{FF2B5EF4-FFF2-40B4-BE49-F238E27FC236}">
-                <a16:creationId xmlns:a16="http://schemas.microsoft.com/office/drawing/2014/main" id="{6CADFB5C-D6BF-0406-B0B4-A5A45A4F9CA5}"/>
-              </a:ext>
-            </a:extLst>
-          </p:cNvPr>
-          <p:cNvSpPr/>
-          <p:nvPr/>
-        </p:nvSpPr>
-        <p:spPr>
-          <a:xfrm>
-            <a:off x="5076969" y="4866458"/>
-            <a:ext cx="152400" cy="152400"/>
-          </a:xfrm>
-          <a:prstGeom prst="rect">
-            <a:avLst/>
-          </a:prstGeom>
-          <a:solidFill>
-            <a:srgbClr val="FDEBD0"/>
-          </a:solidFill>
-          <a:ln w="4233">
-            <a:solidFill>
-              <a:srgbClr val="333333"/>
-            </a:solidFill>
-          </a:ln>
-          <a:effectLst/>
-        </p:spPr>
-        <p:style>
-          <a:lnRef idx="1">
-            <a:schemeClr val="accent1"/>
-          </a:lnRef>
-          <a:fillRef idx="3">
-            <a:schemeClr val="accent1"/>
-          </a:fillRef>
-          <a:effectRef idx="2">
-            <a:schemeClr val="accent1"/>
-          </a:effectRef>
-          <a:fontRef idx="minor">
-            <a:schemeClr val="lt1"/>
-          </a:fontRef>
-        </p:style>
-        <p:txBody>
-          <a:bodyPr wrap="square" lIns="12192" tIns="6096" rIns="12192" bIns="6096" rtlCol="0" anchor="ctr"/>
-          <a:lstStyle/>
-          <a:p>
-            <a:pPr algn="ctr"/>
-            <a:r>
-              <a:rPr sz="600" b="1">
-                <a:solidFill>
-                  <a:srgbClr val="333333"/>
-                </a:solidFill>
-                <a:latin typeface="맑은 고딕"/>
-                <a:ea typeface="맑은 고딕"/>
-              </a:rPr>
-              <a:t>4</a:t>
-            </a:r>
-          </a:p>
-        </p:txBody>
-      </p:sp>
-      <p:sp>
-        <p:nvSpPr>
-          <p:cNvPr id="55" name="Rectangle 22">
-            <a:extLst>
-              <a:ext uri="{FF2B5EF4-FFF2-40B4-BE49-F238E27FC236}">
-                <a16:creationId xmlns:a16="http://schemas.microsoft.com/office/drawing/2014/main" id="{6C060DD7-BF7B-AE5C-9349-282865EB0729}"/>
-              </a:ext>
-            </a:extLst>
-          </p:cNvPr>
-          <p:cNvSpPr/>
-          <p:nvPr/>
-        </p:nvSpPr>
-        <p:spPr>
-          <a:xfrm>
-            <a:off x="5253753" y="4866458"/>
-            <a:ext cx="152400" cy="152400"/>
-          </a:xfrm>
-          <a:prstGeom prst="rect">
-            <a:avLst/>
-          </a:prstGeom>
-          <a:solidFill>
-            <a:srgbClr val="D5F5E3"/>
-          </a:solidFill>
-          <a:ln w="4233">
-            <a:solidFill>
-              <a:srgbClr val="333333"/>
-            </a:solidFill>
-          </a:ln>
-          <a:effectLst/>
-        </p:spPr>
-        <p:style>
-          <a:lnRef idx="1">
-            <a:schemeClr val="accent1"/>
-          </a:lnRef>
-          <a:fillRef idx="3">
-            <a:schemeClr val="accent1"/>
-          </a:fillRef>
-          <a:effectRef idx="2">
-            <a:schemeClr val="accent1"/>
-          </a:effectRef>
-          <a:fontRef idx="minor">
-            <a:schemeClr val="lt1"/>
-          </a:fontRef>
-        </p:style>
-        <p:txBody>
-          <a:bodyPr wrap="square" lIns="12192" tIns="6096" rIns="12192" bIns="6096" rtlCol="0" anchor="ctr"/>
-          <a:lstStyle/>
-          <a:p>
-            <a:pPr algn="ctr"/>
-            <a:r>
-              <a:rPr sz="600" b="1">
-                <a:solidFill>
-                  <a:srgbClr val="333333"/>
-                </a:solidFill>
-                <a:latin typeface="맑은 고딕"/>
-                <a:ea typeface="맑은 고딕"/>
-              </a:rPr>
-              <a:t>5</a:t>
-            </a:r>
-          </a:p>
-        </p:txBody>
-      </p:sp>
-      <p:sp>
-        <p:nvSpPr>
-          <p:cNvPr id="56" name="TextBox 55">
-            <a:extLst>
-              <a:ext uri="{FF2B5EF4-FFF2-40B4-BE49-F238E27FC236}">
-                <a16:creationId xmlns:a16="http://schemas.microsoft.com/office/drawing/2014/main" id="{E7E26A74-E939-1C8E-9048-6115BBF41870}"/>
-              </a:ext>
-            </a:extLst>
-          </p:cNvPr>
-          <p:cNvSpPr txBox="1"/>
-          <p:nvPr/>
-        </p:nvSpPr>
-        <p:spPr>
-          <a:xfrm>
-            <a:off x="4546617" y="4993562"/>
-            <a:ext cx="152400" cy="184666"/>
-          </a:xfrm>
-          <a:prstGeom prst="rect">
-            <a:avLst/>
-          </a:prstGeom>
-          <a:noFill/>
-        </p:spPr>
-        <p:txBody>
-          <a:bodyPr wrap="square" anchor="t">
-            <a:spAutoFit/>
-          </a:bodyPr>
-          <a:lstStyle/>
-          <a:p>
-            <a:pPr algn="ctr"/>
-            <a:r>
-              <a:rPr sz="600" b="0">
-                <a:solidFill>
-                  <a:srgbClr val="777777"/>
-                </a:solidFill>
-                <a:latin typeface="맑은 고딕"/>
-                <a:ea typeface="맑은 고딕"/>
-              </a:rPr>
-              <a:t>0</a:t>
-            </a:r>
-          </a:p>
-        </p:txBody>
-      </p:sp>
-      <p:sp>
-        <p:nvSpPr>
-          <p:cNvPr id="57" name="TextBox 56">
-            <a:extLst>
-              <a:ext uri="{FF2B5EF4-FFF2-40B4-BE49-F238E27FC236}">
-                <a16:creationId xmlns:a16="http://schemas.microsoft.com/office/drawing/2014/main" id="{2F5E1BC5-5795-2356-5872-90FAC30D9585}"/>
-              </a:ext>
-            </a:extLst>
-          </p:cNvPr>
-          <p:cNvSpPr txBox="1"/>
-          <p:nvPr/>
-        </p:nvSpPr>
-        <p:spPr>
-          <a:xfrm>
-            <a:off x="4723402" y="4993562"/>
-            <a:ext cx="152400" cy="184666"/>
-          </a:xfrm>
-          <a:prstGeom prst="rect">
-            <a:avLst/>
-          </a:prstGeom>
-          <a:noFill/>
-        </p:spPr>
-        <p:txBody>
-          <a:bodyPr wrap="square" anchor="t">
-            <a:spAutoFit/>
-          </a:bodyPr>
-          <a:lstStyle/>
-          <a:p>
-            <a:pPr algn="ctr"/>
-            <a:r>
-              <a:rPr sz="600" b="0">
-                <a:solidFill>
-                  <a:srgbClr val="777777"/>
-                </a:solidFill>
-                <a:latin typeface="맑은 고딕"/>
-                <a:ea typeface="맑은 고딕"/>
-              </a:rPr>
-              <a:t>1</a:t>
-            </a:r>
-          </a:p>
-        </p:txBody>
-      </p:sp>
-      <p:sp>
-        <p:nvSpPr>
-          <p:cNvPr id="58" name="TextBox 57">
-            <a:extLst>
-              <a:ext uri="{FF2B5EF4-FFF2-40B4-BE49-F238E27FC236}">
-                <a16:creationId xmlns:a16="http://schemas.microsoft.com/office/drawing/2014/main" id="{CFBCF0E5-B5C2-67D1-8D32-30608C47DBB1}"/>
-              </a:ext>
-            </a:extLst>
-          </p:cNvPr>
-          <p:cNvSpPr txBox="1"/>
-          <p:nvPr/>
-        </p:nvSpPr>
-        <p:spPr>
-          <a:xfrm>
-            <a:off x="4900185" y="4993562"/>
-            <a:ext cx="152400" cy="184666"/>
-          </a:xfrm>
-          <a:prstGeom prst="rect">
-            <a:avLst/>
-          </a:prstGeom>
-          <a:noFill/>
-        </p:spPr>
-        <p:txBody>
-          <a:bodyPr wrap="square" anchor="t">
-            <a:spAutoFit/>
-          </a:bodyPr>
-          <a:lstStyle/>
-          <a:p>
-            <a:pPr algn="ctr"/>
-            <a:r>
-              <a:rPr sz="600" b="0">
-                <a:solidFill>
-                  <a:srgbClr val="777777"/>
-                </a:solidFill>
-                <a:latin typeface="맑은 고딕"/>
-                <a:ea typeface="맑은 고딕"/>
-              </a:rPr>
-              <a:t>1</a:t>
-            </a:r>
-          </a:p>
-        </p:txBody>
-      </p:sp>
-      <p:sp>
-        <p:nvSpPr>
-          <p:cNvPr id="59" name="TextBox 58">
-            <a:extLst>
-              <a:ext uri="{FF2B5EF4-FFF2-40B4-BE49-F238E27FC236}">
-                <a16:creationId xmlns:a16="http://schemas.microsoft.com/office/drawing/2014/main" id="{5C29ADD5-A220-15C3-32B1-C169F3A90F21}"/>
-              </a:ext>
-            </a:extLst>
-          </p:cNvPr>
-          <p:cNvSpPr txBox="1"/>
-          <p:nvPr/>
-        </p:nvSpPr>
-        <p:spPr>
-          <a:xfrm>
-            <a:off x="5076969" y="4993562"/>
-            <a:ext cx="152400" cy="184666"/>
-          </a:xfrm>
-          <a:prstGeom prst="rect">
-            <a:avLst/>
-          </a:prstGeom>
-          <a:noFill/>
-        </p:spPr>
-        <p:txBody>
-          <a:bodyPr wrap="square" anchor="t">
-            <a:spAutoFit/>
-          </a:bodyPr>
-          <a:lstStyle/>
-          <a:p>
-            <a:pPr algn="ctr"/>
-            <a:r>
-              <a:rPr sz="600" b="0">
-                <a:solidFill>
-                  <a:srgbClr val="777777"/>
-                </a:solidFill>
-                <a:latin typeface="맑은 고딕"/>
-                <a:ea typeface="맑은 고딕"/>
-              </a:rPr>
-              <a:t>1</a:t>
-            </a:r>
-          </a:p>
-        </p:txBody>
-      </p:sp>
-      <p:sp>
-        <p:nvSpPr>
-          <p:cNvPr id="60" name="TextBox 59">
-            <a:extLst>
-              <a:ext uri="{FF2B5EF4-FFF2-40B4-BE49-F238E27FC236}">
-                <a16:creationId xmlns:a16="http://schemas.microsoft.com/office/drawing/2014/main" id="{3C9C66B9-F41B-A24F-B5CA-81CE8CC2E165}"/>
-              </a:ext>
-            </a:extLst>
-          </p:cNvPr>
-          <p:cNvSpPr txBox="1"/>
-          <p:nvPr/>
-        </p:nvSpPr>
-        <p:spPr>
-          <a:xfrm>
-            <a:off x="5253753" y="4993562"/>
-            <a:ext cx="152400" cy="184666"/>
-          </a:xfrm>
-          <a:prstGeom prst="rect">
-            <a:avLst/>
-          </a:prstGeom>
-          <a:noFill/>
-        </p:spPr>
-        <p:txBody>
-          <a:bodyPr wrap="square" anchor="t">
-            <a:spAutoFit/>
-          </a:bodyPr>
-          <a:lstStyle/>
-          <a:p>
-            <a:pPr algn="ctr"/>
-            <a:r>
-              <a:rPr sz="600" b="0">
-                <a:solidFill>
-                  <a:srgbClr val="777777"/>
-                </a:solidFill>
-                <a:latin typeface="맑은 고딕"/>
-                <a:ea typeface="맑은 고딕"/>
-              </a:rPr>
-              <a:t>2</a:t>
-            </a:r>
-          </a:p>
-        </p:txBody>
-      </p:sp>
-      <p:cxnSp>
-        <p:nvCxnSpPr>
-          <p:cNvPr id="61" name="Connector 29">
-            <a:extLst>
-              <a:ext uri="{FF2B5EF4-FFF2-40B4-BE49-F238E27FC236}">
-                <a16:creationId xmlns:a16="http://schemas.microsoft.com/office/drawing/2014/main" id="{8F757A98-29E9-2775-CF92-31C88C45F6D6}"/>
-              </a:ext>
-            </a:extLst>
-          </p:cNvPr>
-          <p:cNvCxnSpPr>
-            <a:cxnSpLocks/>
-          </p:cNvCxnSpPr>
-          <p:nvPr/>
-        </p:nvCxnSpPr>
-        <p:spPr>
-          <a:xfrm>
-            <a:off x="4974356" y="4510194"/>
-            <a:ext cx="1070622" cy="188624"/>
-          </a:xfrm>
-          <a:prstGeom prst="line">
-            <a:avLst/>
-          </a:prstGeom>
-          <a:ln w="5291">
-            <a:solidFill>
-              <a:srgbClr val="777777"/>
-            </a:solidFill>
-            <a:tailEnd type="triangle" w="med" len="med"/>
-          </a:ln>
-          <a:effectLst/>
-        </p:spPr>
-        <p:style>
-          <a:lnRef idx="2">
-            <a:schemeClr val="accent1"/>
-          </a:lnRef>
-          <a:fillRef idx="0">
-            <a:schemeClr val="accent1"/>
-          </a:fillRef>
-          <a:effectRef idx="1">
-            <a:schemeClr val="accent1"/>
-          </a:effectRef>
-          <a:fontRef idx="minor">
-            <a:schemeClr val="tx1"/>
-          </a:fontRef>
-        </p:style>
-      </p:cxnSp>
-      <p:sp>
-        <p:nvSpPr>
-          <p:cNvPr id="62" name="TextBox 61">
-            <a:extLst>
-              <a:ext uri="{FF2B5EF4-FFF2-40B4-BE49-F238E27FC236}">
-                <a16:creationId xmlns:a16="http://schemas.microsoft.com/office/drawing/2014/main" id="{C68DD229-0A96-AD3D-008C-66A0DEAA3464}"/>
-              </a:ext>
-            </a:extLst>
-          </p:cNvPr>
-          <p:cNvSpPr txBox="1"/>
-          <p:nvPr/>
-        </p:nvSpPr>
-        <p:spPr>
-          <a:xfrm>
-            <a:off x="5472290" y="4711373"/>
-            <a:ext cx="1219200" cy="169277"/>
-          </a:xfrm>
-          <a:prstGeom prst="rect">
-            <a:avLst/>
-          </a:prstGeom>
-          <a:noFill/>
-        </p:spPr>
-        <p:txBody>
-          <a:bodyPr wrap="square" anchor="t">
-            <a:spAutoFit/>
-          </a:bodyPr>
-          <a:lstStyle/>
-          <a:p>
-            <a:pPr algn="ctr"/>
-            <a:r>
-              <a:rPr sz="500" b="1" dirty="0" err="1">
-                <a:solidFill>
-                  <a:srgbClr val="333333"/>
-                </a:solidFill>
-                <a:latin typeface="맑은 고딕"/>
-                <a:ea typeface="맑은 고딕"/>
-              </a:rPr>
-              <a:t>기준</a:t>
-            </a:r>
-            <a:r>
-              <a:rPr sz="500" b="1" dirty="0">
-                <a:solidFill>
-                  <a:srgbClr val="333333"/>
-                </a:solidFill>
-                <a:latin typeface="맑은 고딕"/>
-                <a:ea typeface="맑은 고딕"/>
-              </a:rPr>
-              <a:t> C </a:t>
-            </a:r>
-            <a:r>
-              <a:rPr lang="en-US" altLang="ko-KR" sz="500" b="1" dirty="0">
-                <a:solidFill>
-                  <a:srgbClr val="333333"/>
-                </a:solidFill>
-                <a:latin typeface="맑은 고딕"/>
-                <a:ea typeface="맑은 고딕"/>
-              </a:rPr>
-              <a:t>-</a:t>
-            </a:r>
-            <a:r>
-              <a:rPr sz="500" b="1" dirty="0">
-                <a:solidFill>
-                  <a:srgbClr val="333333"/>
-                </a:solidFill>
-                <a:latin typeface="맑은 고딕"/>
-                <a:ea typeface="맑은 고딕"/>
-              </a:rPr>
-              <a:t> </a:t>
-            </a:r>
-            <a:r>
-              <a:rPr sz="500" b="1" dirty="0" err="1">
-                <a:solidFill>
-                  <a:srgbClr val="333333"/>
-                </a:solidFill>
-                <a:latin typeface="맑은 고딕"/>
-                <a:ea typeface="맑은 고딕"/>
-              </a:rPr>
-              <a:t>최</a:t>
-            </a:r>
-            <a:r>
-              <a:rPr lang="ko-KR" altLang="en-US" sz="500" b="1" dirty="0">
-                <a:solidFill>
-                  <a:srgbClr val="333333"/>
-                </a:solidFill>
-                <a:latin typeface="맑은 고딕"/>
-                <a:ea typeface="맑은 고딕"/>
-              </a:rPr>
-              <a:t>소</a:t>
-            </a:r>
-            <a:r>
-              <a:rPr lang="en-US" altLang="ko-KR" sz="500" b="1" dirty="0">
-                <a:solidFill>
-                  <a:srgbClr val="333333"/>
-                </a:solidFill>
-                <a:latin typeface="맑은 고딕"/>
-                <a:ea typeface="맑은 고딕"/>
-              </a:rPr>
-              <a:t>·</a:t>
-            </a:r>
-            <a:r>
-              <a:rPr lang="ko-KR" altLang="en-US" sz="500" b="1" dirty="0" err="1">
-                <a:solidFill>
-                  <a:srgbClr val="333333"/>
-                </a:solidFill>
-                <a:latin typeface="맑은 고딕"/>
-                <a:ea typeface="맑은 고딕"/>
-              </a:rPr>
-              <a:t>최댓</a:t>
-            </a:r>
-            <a:r>
-              <a:rPr sz="500" b="1" dirty="0" err="1">
-                <a:solidFill>
-                  <a:srgbClr val="333333"/>
-                </a:solidFill>
-                <a:latin typeface="맑은 고딕"/>
-                <a:ea typeface="맑은 고딕"/>
-              </a:rPr>
-              <a:t>값</a:t>
-            </a:r>
-            <a:r>
-              <a:rPr sz="500" b="1" dirty="0">
-                <a:solidFill>
-                  <a:srgbClr val="333333"/>
-                </a:solidFill>
-                <a:latin typeface="맑은 고딕"/>
-                <a:ea typeface="맑은 고딕"/>
-              </a:rPr>
-              <a:t> </a:t>
-            </a:r>
-            <a:r>
-              <a:rPr sz="500" b="1" dirty="0" err="1">
-                <a:solidFill>
-                  <a:srgbClr val="333333"/>
-                </a:solidFill>
-                <a:latin typeface="맑은 고딕"/>
-                <a:ea typeface="맑은 고딕"/>
-              </a:rPr>
-              <a:t>교번</a:t>
-            </a:r>
-            <a:r>
-              <a:rPr sz="500" b="1" dirty="0">
-                <a:solidFill>
-                  <a:srgbClr val="333333"/>
-                </a:solidFill>
-                <a:latin typeface="맑은 고딕"/>
-                <a:ea typeface="맑은 고딕"/>
-              </a:rPr>
-              <a:t> </a:t>
-            </a:r>
-            <a:r>
-              <a:rPr sz="500" b="1" dirty="0" err="1">
-                <a:solidFill>
-                  <a:srgbClr val="333333"/>
-                </a:solidFill>
-                <a:latin typeface="맑은 고딕"/>
-                <a:ea typeface="맑은 고딕"/>
-              </a:rPr>
-              <a:t>정렬</a:t>
-            </a:r>
-            <a:endParaRPr sz="500" b="1" dirty="0">
-              <a:solidFill>
-                <a:srgbClr val="333333"/>
-              </a:solidFill>
-              <a:latin typeface="맑은 고딕"/>
-              <a:ea typeface="맑은 고딕"/>
-            </a:endParaRPr>
-          </a:p>
-        </p:txBody>
-      </p:sp>
-      <p:sp>
-        <p:nvSpPr>
-          <p:cNvPr id="63" name="Rectangle 31">
-            <a:extLst>
-              <a:ext uri="{FF2B5EF4-FFF2-40B4-BE49-F238E27FC236}">
-                <a16:creationId xmlns:a16="http://schemas.microsoft.com/office/drawing/2014/main" id="{E2E41FE1-1CC3-1C2F-A6FA-0C746A2A93DD}"/>
-              </a:ext>
-            </a:extLst>
-          </p:cNvPr>
-          <p:cNvSpPr/>
-          <p:nvPr/>
-        </p:nvSpPr>
-        <p:spPr>
-          <a:xfrm>
-            <a:off x="5652122" y="4871053"/>
-            <a:ext cx="152400" cy="152400"/>
-          </a:xfrm>
-          <a:prstGeom prst="rect">
-            <a:avLst/>
-          </a:prstGeom>
-          <a:solidFill>
-            <a:srgbClr val="FFFFFF"/>
-          </a:solidFill>
-          <a:ln w="4233">
-            <a:solidFill>
-              <a:srgbClr val="333333"/>
-            </a:solidFill>
-          </a:ln>
-          <a:effectLst/>
-        </p:spPr>
-        <p:style>
-          <a:lnRef idx="1">
-            <a:schemeClr val="accent1"/>
-          </a:lnRef>
-          <a:fillRef idx="3">
-            <a:schemeClr val="accent1"/>
-          </a:fillRef>
-          <a:effectRef idx="2">
-            <a:schemeClr val="accent1"/>
-          </a:effectRef>
-          <a:fontRef idx="minor">
-            <a:schemeClr val="lt1"/>
-          </a:fontRef>
-        </p:style>
-        <p:txBody>
-          <a:bodyPr wrap="square" lIns="12192" tIns="6096" rIns="12192" bIns="6096" rtlCol="0" anchor="ctr"/>
-          <a:lstStyle/>
-          <a:p>
-            <a:pPr algn="ctr"/>
-            <a:r>
-              <a:rPr sz="600" b="1">
-                <a:solidFill>
-                  <a:srgbClr val="333333"/>
-                </a:solidFill>
-                <a:latin typeface="맑은 고딕"/>
-                <a:ea typeface="맑은 고딕"/>
-              </a:rPr>
-              <a:t>1</a:t>
-            </a:r>
-          </a:p>
-        </p:txBody>
-      </p:sp>
-      <p:sp>
-        <p:nvSpPr>
-          <p:cNvPr id="64" name="Rectangle 32">
-            <a:extLst>
-              <a:ext uri="{FF2B5EF4-FFF2-40B4-BE49-F238E27FC236}">
-                <a16:creationId xmlns:a16="http://schemas.microsoft.com/office/drawing/2014/main" id="{B3820DFB-AC55-DBAE-535F-075B8C28951F}"/>
-              </a:ext>
-            </a:extLst>
-          </p:cNvPr>
-          <p:cNvSpPr/>
-          <p:nvPr/>
-        </p:nvSpPr>
-        <p:spPr>
-          <a:xfrm>
-            <a:off x="5828906" y="4871053"/>
-            <a:ext cx="152400" cy="152400"/>
-          </a:xfrm>
-          <a:prstGeom prst="rect">
-            <a:avLst/>
-          </a:prstGeom>
-          <a:solidFill>
-            <a:srgbClr val="FFFFFF"/>
-          </a:solidFill>
-          <a:ln w="4233">
-            <a:solidFill>
-              <a:srgbClr val="333333"/>
-            </a:solidFill>
-          </a:ln>
-          <a:effectLst/>
-        </p:spPr>
-        <p:style>
-          <a:lnRef idx="1">
-            <a:schemeClr val="accent1"/>
-          </a:lnRef>
-          <a:fillRef idx="3">
-            <a:schemeClr val="accent1"/>
-          </a:fillRef>
-          <a:effectRef idx="2">
-            <a:schemeClr val="accent1"/>
-          </a:effectRef>
-          <a:fontRef idx="minor">
-            <a:schemeClr val="lt1"/>
-          </a:fontRef>
-        </p:style>
-        <p:txBody>
-          <a:bodyPr wrap="square" lIns="12192" tIns="6096" rIns="12192" bIns="6096" rtlCol="0" anchor="ctr"/>
-          <a:lstStyle/>
-          <a:p>
-            <a:pPr algn="ctr"/>
-            <a:r>
-              <a:rPr sz="600" b="1">
-                <a:solidFill>
-                  <a:srgbClr val="333333"/>
-                </a:solidFill>
-                <a:latin typeface="맑은 고딕"/>
-                <a:ea typeface="맑은 고딕"/>
-              </a:rPr>
-              <a:t>5</a:t>
-            </a:r>
-          </a:p>
-        </p:txBody>
-      </p:sp>
-      <p:sp>
-        <p:nvSpPr>
-          <p:cNvPr id="65" name="Rectangle 33">
-            <a:extLst>
-              <a:ext uri="{FF2B5EF4-FFF2-40B4-BE49-F238E27FC236}">
-                <a16:creationId xmlns:a16="http://schemas.microsoft.com/office/drawing/2014/main" id="{13950230-D01F-A233-93BA-E8974CF0B7A5}"/>
-              </a:ext>
-            </a:extLst>
-          </p:cNvPr>
-          <p:cNvSpPr/>
-          <p:nvPr/>
-        </p:nvSpPr>
-        <p:spPr>
-          <a:xfrm>
-            <a:off x="6005690" y="4871053"/>
-            <a:ext cx="152400" cy="152400"/>
-          </a:xfrm>
-          <a:prstGeom prst="rect">
-            <a:avLst/>
-          </a:prstGeom>
-          <a:solidFill>
-            <a:srgbClr val="FFFFFF"/>
-          </a:solidFill>
-          <a:ln w="4233">
-            <a:solidFill>
-              <a:srgbClr val="333333"/>
-            </a:solidFill>
-          </a:ln>
-          <a:effectLst/>
-        </p:spPr>
-        <p:style>
-          <a:lnRef idx="1">
-            <a:schemeClr val="accent1"/>
-          </a:lnRef>
-          <a:fillRef idx="3">
-            <a:schemeClr val="accent1"/>
-          </a:fillRef>
-          <a:effectRef idx="2">
-            <a:schemeClr val="accent1"/>
-          </a:effectRef>
-          <a:fontRef idx="minor">
-            <a:schemeClr val="lt1"/>
-          </a:fontRef>
-        </p:style>
-        <p:txBody>
-          <a:bodyPr wrap="square" lIns="12192" tIns="6096" rIns="12192" bIns="6096" rtlCol="0" anchor="ctr"/>
-          <a:lstStyle/>
-          <a:p>
-            <a:pPr algn="ctr"/>
-            <a:r>
-              <a:rPr sz="600" b="1">
-                <a:solidFill>
-                  <a:srgbClr val="333333"/>
-                </a:solidFill>
-                <a:latin typeface="맑은 고딕"/>
-                <a:ea typeface="맑은 고딕"/>
-              </a:rPr>
-              <a:t>1</a:t>
-            </a:r>
-          </a:p>
-        </p:txBody>
-      </p:sp>
-      <p:sp>
-        <p:nvSpPr>
-          <p:cNvPr id="66" name="Rectangle 34">
-            <a:extLst>
-              <a:ext uri="{FF2B5EF4-FFF2-40B4-BE49-F238E27FC236}">
-                <a16:creationId xmlns:a16="http://schemas.microsoft.com/office/drawing/2014/main" id="{4ABF18E5-6871-FF54-C8B9-ECAA5A3AE4D5}"/>
-              </a:ext>
-            </a:extLst>
-          </p:cNvPr>
-          <p:cNvSpPr/>
-          <p:nvPr/>
-        </p:nvSpPr>
-        <p:spPr>
-          <a:xfrm>
-            <a:off x="6182474" y="4871053"/>
-            <a:ext cx="152400" cy="152400"/>
-          </a:xfrm>
-          <a:prstGeom prst="rect">
-            <a:avLst/>
-          </a:prstGeom>
-          <a:solidFill>
-            <a:srgbClr val="FFFFFF"/>
-          </a:solidFill>
-          <a:ln w="4233">
-            <a:solidFill>
-              <a:srgbClr val="333333"/>
-            </a:solidFill>
-          </a:ln>
-          <a:effectLst/>
-        </p:spPr>
-        <p:style>
-          <a:lnRef idx="1">
-            <a:schemeClr val="accent1"/>
-          </a:lnRef>
-          <a:fillRef idx="3">
-            <a:schemeClr val="accent1"/>
-          </a:fillRef>
-          <a:effectRef idx="2">
-            <a:schemeClr val="accent1"/>
-          </a:effectRef>
-          <a:fontRef idx="minor">
-            <a:schemeClr val="lt1"/>
-          </a:fontRef>
-        </p:style>
-        <p:txBody>
-          <a:bodyPr wrap="square" lIns="12192" tIns="6096" rIns="12192" bIns="6096" rtlCol="0" anchor="ctr"/>
-          <a:lstStyle/>
-          <a:p>
-            <a:pPr algn="ctr"/>
-            <a:r>
-              <a:rPr sz="600" b="1">
-                <a:solidFill>
-                  <a:srgbClr val="333333"/>
-                </a:solidFill>
-                <a:latin typeface="맑은 고딕"/>
-                <a:ea typeface="맑은 고딕"/>
-              </a:rPr>
-              <a:t>4</a:t>
-            </a:r>
-          </a:p>
-        </p:txBody>
-      </p:sp>
-      <p:sp>
-        <p:nvSpPr>
-          <p:cNvPr id="67" name="Rectangle 35">
-            <a:extLst>
-              <a:ext uri="{FF2B5EF4-FFF2-40B4-BE49-F238E27FC236}">
-                <a16:creationId xmlns:a16="http://schemas.microsoft.com/office/drawing/2014/main" id="{B7C2C650-638D-B53A-559F-E9ADE21ED7E5}"/>
-              </a:ext>
-            </a:extLst>
-          </p:cNvPr>
-          <p:cNvSpPr/>
-          <p:nvPr/>
-        </p:nvSpPr>
-        <p:spPr>
-          <a:xfrm>
-            <a:off x="6359258" y="4871053"/>
-            <a:ext cx="152400" cy="152400"/>
-          </a:xfrm>
-          <a:prstGeom prst="rect">
-            <a:avLst/>
-          </a:prstGeom>
-          <a:solidFill>
-            <a:srgbClr val="FFFFFF"/>
-          </a:solidFill>
-          <a:ln w="4233">
-            <a:solidFill>
-              <a:srgbClr val="333333"/>
-            </a:solidFill>
-          </a:ln>
-          <a:effectLst/>
-        </p:spPr>
-        <p:style>
-          <a:lnRef idx="1">
-            <a:schemeClr val="accent1"/>
-          </a:lnRef>
-          <a:fillRef idx="3">
-            <a:schemeClr val="accent1"/>
-          </a:fillRef>
-          <a:effectRef idx="2">
-            <a:schemeClr val="accent1"/>
-          </a:effectRef>
-          <a:fontRef idx="minor">
-            <a:schemeClr val="lt1"/>
-          </a:fontRef>
-        </p:style>
-        <p:txBody>
-          <a:bodyPr wrap="square" lIns="12192" tIns="6096" rIns="12192" bIns="6096" rtlCol="0" anchor="ctr"/>
-          <a:lstStyle/>
-          <a:p>
-            <a:pPr algn="ctr"/>
-            <a:r>
-              <a:rPr sz="600" b="1">
-                <a:solidFill>
-                  <a:srgbClr val="333333"/>
-                </a:solidFill>
-                <a:latin typeface="맑은 고딕"/>
-                <a:ea typeface="맑은 고딕"/>
-              </a:rPr>
-              <a:t>3</a:t>
-            </a:r>
+            <a:endParaRPr kumimoji="1" lang="ko-KR" altLang="en-US" dirty="0"/>
           </a:p>
         </p:txBody>
       </p:sp>

--- a/주제탐구_포스터.pptx
+++ b/주제탐구_포스터.pptx
@@ -131,12 +131,12 @@
   <pc:docChgLst>
     <pc:chgData name="서혁 김" userId="673a45dc699d0b3e" providerId="LiveId" clId="{B83A4E28-A29A-43FB-A79E-2E1372E663CB}"/>
     <pc:docChg chg="undo custSel modSld">
-      <pc:chgData name="서혁 김" userId="673a45dc699d0b3e" providerId="LiveId" clId="{B83A4E28-A29A-43FB-A79E-2E1372E663CB}" dt="2026-07-02T13:13:55.256" v="204" actId="313"/>
+      <pc:chgData name="서혁 김" userId="673a45dc699d0b3e" providerId="LiveId" clId="{B83A4E28-A29A-43FB-A79E-2E1372E663CB}" dt="2026-07-03T04:37:23.836" v="205" actId="478"/>
       <pc:docMkLst>
         <pc:docMk/>
       </pc:docMkLst>
-      <pc:sldChg chg="modSp mod">
-        <pc:chgData name="서혁 김" userId="673a45dc699d0b3e" providerId="LiveId" clId="{B83A4E28-A29A-43FB-A79E-2E1372E663CB}" dt="2026-07-02T13:13:55.256" v="204" actId="313"/>
+      <pc:sldChg chg="delSp modSp mod">
+        <pc:chgData name="서혁 김" userId="673a45dc699d0b3e" providerId="LiveId" clId="{B83A4E28-A29A-43FB-A79E-2E1372E663CB}" dt="2026-07-03T04:37:23.836" v="205" actId="478"/>
         <pc:sldMkLst>
           <pc:docMk/>
           <pc:sldMk cId="2775059156" sldId="256"/>
@@ -163,6 +163,14 @@
             <pc:docMk/>
             <pc:sldMk cId="2775059156" sldId="256"/>
             <ac:spMk id="8" creationId="{00000000-0000-0000-0000-000000000000}"/>
+          </ac:spMkLst>
+        </pc:spChg>
+        <pc:spChg chg="del">
+          <ac:chgData name="서혁 김" userId="673a45dc699d0b3e" providerId="LiveId" clId="{B83A4E28-A29A-43FB-A79E-2E1372E663CB}" dt="2026-07-03T04:37:23.836" v="205" actId="478"/>
+          <ac:spMkLst>
+            <pc:docMk/>
+            <pc:sldMk cId="2775059156" sldId="256"/>
+            <ac:spMk id="83" creationId="{6D2388AB-35EC-2E03-F63F-399C50F364DF}"/>
           </ac:spMkLst>
         </pc:spChg>
         <pc:picChg chg="mod">
@@ -261,7 +269,7 @@
           <a:p>
             <a:fld id="{678876DD-2ECB-4391-8BA8-BB23CD9FC081}" type="datetimeFigureOut">
               <a:rPr lang="ko-KR" altLang="en-US" smtClean="0"/>
-              <a:t>2026. 7. 2.</a:t>
+              <a:t>2026-07-03</a:t>
             </a:fld>
             <a:endParaRPr lang="ko-KR" altLang="en-US"/>
           </a:p>
@@ -876,7 +884,7 @@
           <a:p>
             <a:fld id="{65A0B9EE-98E3-481A-A7E8-04A8CF889727}" type="datetimeFigureOut">
               <a:rPr lang="ko-KR" altLang="en-US" smtClean="0"/>
-              <a:t>2026. 7. 2.</a:t>
+              <a:t>2026-07-03</a:t>
             </a:fld>
             <a:endParaRPr lang="ko-KR" altLang="en-US"/>
           </a:p>
@@ -1086,7 +1094,7 @@
           <a:p>
             <a:fld id="{65A0B9EE-98E3-481A-A7E8-04A8CF889727}" type="datetimeFigureOut">
               <a:rPr lang="ko-KR" altLang="en-US" smtClean="0"/>
-              <a:t>2026. 7. 2.</a:t>
+              <a:t>2026-07-03</a:t>
             </a:fld>
             <a:endParaRPr lang="ko-KR" altLang="en-US"/>
           </a:p>
@@ -1296,7 +1304,7 @@
           <a:p>
             <a:fld id="{65A0B9EE-98E3-481A-A7E8-04A8CF889727}" type="datetimeFigureOut">
               <a:rPr lang="ko-KR" altLang="en-US" smtClean="0"/>
-              <a:t>2026. 7. 2.</a:t>
+              <a:t>2026-07-03</a:t>
             </a:fld>
             <a:endParaRPr lang="ko-KR" altLang="en-US"/>
           </a:p>
@@ -1570,7 +1578,7 @@
           <a:p>
             <a:fld id="{65A0B9EE-98E3-481A-A7E8-04A8CF889727}" type="datetimeFigureOut">
               <a:rPr lang="ko-KR" altLang="en-US" smtClean="0"/>
-              <a:t>2026. 7. 2.</a:t>
+              <a:t>2026-07-03</a:t>
             </a:fld>
             <a:endParaRPr lang="ko-KR" altLang="en-US"/>
           </a:p>
@@ -1840,7 +1848,7 @@
           <a:p>
             <a:fld id="{65A0B9EE-98E3-481A-A7E8-04A8CF889727}" type="datetimeFigureOut">
               <a:rPr lang="ko-KR" altLang="en-US" smtClean="0"/>
-              <a:t>2026. 7. 2.</a:t>
+              <a:t>2026-07-03</a:t>
             </a:fld>
             <a:endParaRPr lang="ko-KR" altLang="en-US"/>
           </a:p>
@@ -2246,7 +2254,7 @@
           <a:p>
             <a:fld id="{65A0B9EE-98E3-481A-A7E8-04A8CF889727}" type="datetimeFigureOut">
               <a:rPr lang="ko-KR" altLang="en-US" smtClean="0"/>
-              <a:t>2026. 7. 2.</a:t>
+              <a:t>2026-07-03</a:t>
             </a:fld>
             <a:endParaRPr lang="ko-KR" altLang="en-US"/>
           </a:p>
@@ -2396,7 +2404,7 @@
           <a:p>
             <a:fld id="{65A0B9EE-98E3-481A-A7E8-04A8CF889727}" type="datetimeFigureOut">
               <a:rPr lang="ko-KR" altLang="en-US" smtClean="0"/>
-              <a:t>2026. 7. 2.</a:t>
+              <a:t>2026-07-03</a:t>
             </a:fld>
             <a:endParaRPr lang="ko-KR" altLang="en-US"/>
           </a:p>
@@ -2515,7 +2523,7 @@
           <a:p>
             <a:fld id="{65A0B9EE-98E3-481A-A7E8-04A8CF889727}" type="datetimeFigureOut">
               <a:rPr lang="ko-KR" altLang="en-US" smtClean="0"/>
-              <a:t>2026. 7. 2.</a:t>
+              <a:t>2026-07-03</a:t>
             </a:fld>
             <a:endParaRPr lang="ko-KR" altLang="en-US"/>
           </a:p>
@@ -2825,7 +2833,7 @@
           <a:p>
             <a:fld id="{65A0B9EE-98E3-481A-A7E8-04A8CF889727}" type="datetimeFigureOut">
               <a:rPr lang="ko-KR" altLang="en-US" smtClean="0"/>
-              <a:t>2026. 7. 2.</a:t>
+              <a:t>2026-07-03</a:t>
             </a:fld>
             <a:endParaRPr lang="ko-KR" altLang="en-US"/>
           </a:p>
@@ -3115,7 +3123,7 @@
           <a:p>
             <a:fld id="{65A0B9EE-98E3-481A-A7E8-04A8CF889727}" type="datetimeFigureOut">
               <a:rPr lang="ko-KR" altLang="en-US" smtClean="0"/>
-              <a:t>2026. 7. 2.</a:t>
+              <a:t>2026-07-03</a:t>
             </a:fld>
             <a:endParaRPr lang="ko-KR" altLang="en-US"/>
           </a:p>
@@ -9080,40 +9088,6 @@
           </p:style>
         </p:cxnSp>
       </p:grpSp>
-      <p:sp>
-        <p:nvSpPr>
-          <p:cNvPr id="83" name="TextBox 82">
-            <a:extLst>
-              <a:ext uri="{FF2B5EF4-FFF2-40B4-BE49-F238E27FC236}">
-                <a16:creationId xmlns:a16="http://schemas.microsoft.com/office/drawing/2014/main" id="{6D2388AB-35EC-2E03-F63F-399C50F364DF}"/>
-              </a:ext>
-            </a:extLst>
-          </p:cNvPr>
-          <p:cNvSpPr txBox="1"/>
-          <p:nvPr/>
-        </p:nvSpPr>
-        <p:spPr>
-          <a:xfrm>
-            <a:off x="7552800" y="4881600"/>
-            <a:ext cx="184731" cy="369332"/>
-          </a:xfrm>
-          <a:prstGeom prst="rect">
-            <a:avLst/>
-          </a:prstGeom>
-          <a:solidFill>
-            <a:schemeClr val="bg1"/>
-          </a:solidFill>
-        </p:spPr>
-        <p:txBody>
-          <a:bodyPr wrap="none" rtlCol="0">
-            <a:spAutoFit/>
-          </a:bodyPr>
-          <a:lstStyle/>
-          <a:p>
-            <a:endParaRPr kumimoji="1" lang="ko-KR" altLang="en-US" dirty="0"/>
-          </a:p>
-        </p:txBody>
-      </p:sp>
     </p:spTree>
     <p:extLst>
       <p:ext uri="{BB962C8B-B14F-4D97-AF65-F5344CB8AC3E}">
